--- a/schools-presentations/B Gymnasiou/B41M8 - Επεξεργασία αριθμητικών δεδομένων και αναφορές κελιών.pptx
+++ b/schools-presentations/B Gymnasiou/B41M8 - Επεξεργασία αριθμητικών δεδομένων και αναφορές κελιών.pptx
@@ -1,33 +1,159 @@
 
 <file path=ppt/presentation.xml><?xml version="1.0" encoding="utf-8"?>
-<p:presentation xmlns:p="http://schemas.openxmlformats.org/presentationml/2006/main">
+<p:presentation xmlns:a="http://schemas.openxmlformats.org/drawingml/2006/main" xmlns:r="http://schemas.openxmlformats.org/officeDocument/2006/relationships" xmlns:p="http://schemas.openxmlformats.org/presentationml/2006/main">
   <p:sldMasterIdLst>
-    <p:sldMasterId xmlns:r="http://schemas.openxmlformats.org/officeDocument/2006/relationships" id="2147483648" r:id="R4b65bff120dd46aa"/>
+    <p:sldMasterId id="2147483648" r:id="rId1"/>
   </p:sldMasterIdLst>
   <p:notesMasterIdLst>
-    <p:notesMasterId xmlns:r="http://schemas.openxmlformats.org/officeDocument/2006/relationships" r:id="Ra80dd505d9504deb"/>
+    <p:notesMasterId r:id="rId8"/>
   </p:notesMasterIdLst>
   <p:sldIdLst>
-    <p:sldId xmlns:r="http://schemas.openxmlformats.org/officeDocument/2006/relationships" id="256" r:id="R3fe2b7e84f7f4d85"/>
-    <p:sldId xmlns:r="http://schemas.openxmlformats.org/officeDocument/2006/relationships" id="257" r:id="Ra818df1a15054ed7"/>
-    <p:sldId xmlns:r="http://schemas.openxmlformats.org/officeDocument/2006/relationships" id="258" r:id="R2cfb9293352143ee"/>
-    <p:sldId xmlns:r="http://schemas.openxmlformats.org/officeDocument/2006/relationships" id="259" r:id="R62ebe5fd169c4ab5"/>
-    <p:sldId xmlns:r="http://schemas.openxmlformats.org/officeDocument/2006/relationships" id="260" r:id="R414f2825bc4d4a59"/>
-    <p:sldId xmlns:r="http://schemas.openxmlformats.org/officeDocument/2006/relationships" id="261" r:id="Rf0ba9ac1d48747b1"/>
-    <p:sldId xmlns:r="http://schemas.openxmlformats.org/officeDocument/2006/relationships" id="262" r:id="Rdc3daaf565cb4829"/>
-    <p:sldId xmlns:r="http://schemas.openxmlformats.org/officeDocument/2006/relationships" id="263" r:id="R9763118189d94785"/>
+    <p:sldId id="256" r:id="rId2"/>
+    <p:sldId id="257" r:id="rId3"/>
+    <p:sldId id="258" r:id="rId4"/>
+    <p:sldId id="259" r:id="rId5"/>
+    <p:sldId id="260" r:id="rId6"/>
+    <p:sldId id="261" r:id="rId7"/>
   </p:sldIdLst>
   <p:sldSz cx="12192000" cy="6858000"/>
   <p:notesSz cx="6858000" cy="9144000"/>
+  <p:defaultTextStyle>
+    <a:defPPr>
+      <a:defRPr lang="en-US"/>
+    </a:defPPr>
+    <a:lvl1pPr marL="0" algn="l" defTabSz="914400" rtl="0" eaLnBrk="1" latinLnBrk="0" hangingPunct="1">
+      <a:defRPr sz="1800" kern="1200">
+        <a:solidFill>
+          <a:schemeClr val="tx1"/>
+        </a:solidFill>
+        <a:latin typeface="+mn-lt"/>
+        <a:ea typeface="+mn-ea"/>
+        <a:cs typeface="+mn-cs"/>
+      </a:defRPr>
+    </a:lvl1pPr>
+    <a:lvl2pPr marL="457200" algn="l" defTabSz="914400" rtl="0" eaLnBrk="1" latinLnBrk="0" hangingPunct="1">
+      <a:defRPr sz="1800" kern="1200">
+        <a:solidFill>
+          <a:schemeClr val="tx1"/>
+        </a:solidFill>
+        <a:latin typeface="+mn-lt"/>
+        <a:ea typeface="+mn-ea"/>
+        <a:cs typeface="+mn-cs"/>
+      </a:defRPr>
+    </a:lvl2pPr>
+    <a:lvl3pPr marL="914400" algn="l" defTabSz="914400" rtl="0" eaLnBrk="1" latinLnBrk="0" hangingPunct="1">
+      <a:defRPr sz="1800" kern="1200">
+        <a:solidFill>
+          <a:schemeClr val="tx1"/>
+        </a:solidFill>
+        <a:latin typeface="+mn-lt"/>
+        <a:ea typeface="+mn-ea"/>
+        <a:cs typeface="+mn-cs"/>
+      </a:defRPr>
+    </a:lvl3pPr>
+    <a:lvl4pPr marL="1371600" algn="l" defTabSz="914400" rtl="0" eaLnBrk="1" latinLnBrk="0" hangingPunct="1">
+      <a:defRPr sz="1800" kern="1200">
+        <a:solidFill>
+          <a:schemeClr val="tx1"/>
+        </a:solidFill>
+        <a:latin typeface="+mn-lt"/>
+        <a:ea typeface="+mn-ea"/>
+        <a:cs typeface="+mn-cs"/>
+      </a:defRPr>
+    </a:lvl4pPr>
+    <a:lvl5pPr marL="1828800" algn="l" defTabSz="914400" rtl="0" eaLnBrk="1" latinLnBrk="0" hangingPunct="1">
+      <a:defRPr sz="1800" kern="1200">
+        <a:solidFill>
+          <a:schemeClr val="tx1"/>
+        </a:solidFill>
+        <a:latin typeface="+mn-lt"/>
+        <a:ea typeface="+mn-ea"/>
+        <a:cs typeface="+mn-cs"/>
+      </a:defRPr>
+    </a:lvl5pPr>
+    <a:lvl6pPr marL="2286000" algn="l" defTabSz="914400" rtl="0" eaLnBrk="1" latinLnBrk="0" hangingPunct="1">
+      <a:defRPr sz="1800" kern="1200">
+        <a:solidFill>
+          <a:schemeClr val="tx1"/>
+        </a:solidFill>
+        <a:latin typeface="+mn-lt"/>
+        <a:ea typeface="+mn-ea"/>
+        <a:cs typeface="+mn-cs"/>
+      </a:defRPr>
+    </a:lvl6pPr>
+    <a:lvl7pPr marL="2743200" algn="l" defTabSz="914400" rtl="0" eaLnBrk="1" latinLnBrk="0" hangingPunct="1">
+      <a:defRPr sz="1800" kern="1200">
+        <a:solidFill>
+          <a:schemeClr val="tx1"/>
+        </a:solidFill>
+        <a:latin typeface="+mn-lt"/>
+        <a:ea typeface="+mn-ea"/>
+        <a:cs typeface="+mn-cs"/>
+      </a:defRPr>
+    </a:lvl7pPr>
+    <a:lvl8pPr marL="3200400" algn="l" defTabSz="914400" rtl="0" eaLnBrk="1" latinLnBrk="0" hangingPunct="1">
+      <a:defRPr sz="1800" kern="1200">
+        <a:solidFill>
+          <a:schemeClr val="tx1"/>
+        </a:solidFill>
+        <a:latin typeface="+mn-lt"/>
+        <a:ea typeface="+mn-ea"/>
+        <a:cs typeface="+mn-cs"/>
+      </a:defRPr>
+    </a:lvl8pPr>
+    <a:lvl9pPr marL="3657600" algn="l" defTabSz="914400" rtl="0" eaLnBrk="1" latinLnBrk="0" hangingPunct="1">
+      <a:defRPr sz="1800" kern="1200">
+        <a:solidFill>
+          <a:schemeClr val="tx1"/>
+        </a:solidFill>
+        <a:latin typeface="+mn-lt"/>
+        <a:ea typeface="+mn-ea"/>
+        <a:cs typeface="+mn-cs"/>
+      </a:defRPr>
+    </a:lvl9pPr>
+  </p:defaultTextStyle>
+  <p:extLst>
+    <p:ext uri="{EFAFB233-063F-42B5-8137-9DF3F51BA10A}">
+      <p15:sldGuideLst xmlns:p15="http://schemas.microsoft.com/office/powerpoint/2012/main"/>
+    </p:ext>
+  </p:extLst>
 </p:presentation>
 </file>
 
+<file path=ppt/changesInfos/changesInfo1.xml><?xml version="1.0" encoding="utf-8"?>
+<pc:chgInfo xmlns:a="http://schemas.openxmlformats.org/drawingml/2006/main" xmlns:r="http://schemas.openxmlformats.org/officeDocument/2006/relationships" xmlns:ac="http://schemas.microsoft.com/office/drawing/2013/main/command" xmlns:pc="http://schemas.microsoft.com/office/powerpoint/2013/main/command">
+  <pc:docChgLst>
+    <pc:chgData name="Άριστος Αρέστη" userId="813aa191-2d4c-464f-9d05-0a7e494d859f" providerId="ADAL" clId="{49C7B61D-1ACF-4AFF-A04E-A3B433E32474}"/>
+    <pc:docChg chg="delSld">
+      <pc:chgData name="Άριστος Αρέστη" userId="813aa191-2d4c-464f-9d05-0a7e494d859f" providerId="ADAL" clId="{49C7B61D-1ACF-4AFF-A04E-A3B433E32474}" dt="2026-10-15T14:56:19.695" v="1" actId="47"/>
+      <pc:docMkLst>
+        <pc:docMk/>
+      </pc:docMkLst>
+      <pc:sldChg chg="del">
+        <pc:chgData name="Άριστος Αρέστη" userId="813aa191-2d4c-464f-9d05-0a7e494d859f" providerId="ADAL" clId="{49C7B61D-1ACF-4AFF-A04E-A3B433E32474}" dt="2026-10-15T14:56:18.316" v="0" actId="47"/>
+        <pc:sldMkLst>
+          <pc:docMk/>
+          <pc:sldMk cId="3815878654" sldId="262"/>
+        </pc:sldMkLst>
+      </pc:sldChg>
+      <pc:sldChg chg="del">
+        <pc:chgData name="Άριστος Αρέστη" userId="813aa191-2d4c-464f-9d05-0a7e494d859f" providerId="ADAL" clId="{49C7B61D-1ACF-4AFF-A04E-A3B433E32474}" dt="2026-10-15T14:56:19.695" v="1" actId="47"/>
+        <pc:sldMkLst>
+          <pc:docMk/>
+          <pc:sldMk cId="608684808" sldId="263"/>
+        </pc:sldMkLst>
+      </pc:sldChg>
+    </pc:docChg>
+  </pc:docChgLst>
+</pc:chgInfo>
+</file>
+
 <file path=ppt/notesMasters/notesMaster1.xml><?xml version="1.0" encoding="utf-8"?>
-<p:notesMaster xmlns:p="http://schemas.openxmlformats.org/presentationml/2006/main">
+<p:notesMaster xmlns:a="http://schemas.openxmlformats.org/drawingml/2006/main" xmlns:r="http://schemas.openxmlformats.org/officeDocument/2006/relationships" xmlns:p="http://schemas.openxmlformats.org/presentationml/2006/main">
   <p:cSld>
     <p:bg>
       <p:bgRef idx="1001">
-        <a:schemeClr xmlns:a="http://schemas.openxmlformats.org/drawingml/2006/main" val="bg1"/>
+        <a:schemeClr val="bg1"/>
       </p:bgRef>
     </p:bg>
     <p:spTree>
@@ -37,420 +163,164 @@
         <p:nvPr/>
       </p:nvGrpSpPr>
       <p:grpSpPr>
-        <a:xfrm xmlns:a="http://schemas.openxmlformats.org/drawingml/2006/main"/>
+        <a:xfrm>
+          <a:off x="0" y="0"/>
+          <a:ext cx="0" cy="0"/>
+          <a:chOff x="0" y="0"/>
+          <a:chExt cx="0" cy="0"/>
+        </a:xfrm>
       </p:grpSpPr>
       <p:sp>
         <p:nvSpPr>
           <p:cNvPr id="2" name="Header Placeholder"/>
-          <p:cNvSpPr/>
+          <p:cNvSpPr>
+            <a:spLocks noGrp="1"/>
+          </p:cNvSpPr>
           <p:nvPr>
             <p:ph type="hdr" sz="quarter"/>
           </p:nvPr>
         </p:nvSpPr>
         <p:spPr>
-          <a:prstGeom xmlns:a="http://schemas.openxmlformats.org/drawingml/2006/main" prst="rect">
+          <a:prstGeom prst="rect">
             <a:avLst/>
           </a:prstGeom>
         </p:spPr>
         <p:txBody>
-          <a:bodyPr xmlns:a="http://schemas.openxmlformats.org/drawingml/2006/main"/>
-          <a:lstStyle xmlns:a="http://schemas.openxmlformats.org/drawingml/2006/main"/>
-          <a:p xmlns:a="http://schemas.openxmlformats.org/drawingml/2006/main"/>
+          <a:bodyPr/>
+          <a:lstStyle/>
+          <a:p>
+            <a:endParaRPr/>
+          </a:p>
         </p:txBody>
       </p:sp>
       <p:sp>
         <p:nvSpPr>
           <p:cNvPr id="3" name="Date Placeholder"/>
-          <p:cNvSpPr/>
+          <p:cNvSpPr>
+            <a:spLocks noGrp="1"/>
+          </p:cNvSpPr>
           <p:nvPr>
             <p:ph type="dt" sz="quarter" idx="1"/>
           </p:nvPr>
         </p:nvSpPr>
         <p:spPr>
-          <a:prstGeom xmlns:a="http://schemas.openxmlformats.org/drawingml/2006/main" prst="rect">
+          <a:prstGeom prst="rect">
             <a:avLst/>
           </a:prstGeom>
         </p:spPr>
         <p:txBody>
-          <a:bodyPr xmlns:a="http://schemas.openxmlformats.org/drawingml/2006/main"/>
-          <a:lstStyle xmlns:a="http://schemas.openxmlformats.org/drawingml/2006/main"/>
-          <a:p xmlns:a="http://schemas.openxmlformats.org/drawingml/2006/main"/>
+          <a:bodyPr/>
+          <a:lstStyle/>
+          <a:p>
+            <a:endParaRPr/>
+          </a:p>
         </p:txBody>
       </p:sp>
       <p:sp>
         <p:nvSpPr>
           <p:cNvPr id="4" name="Slide Image Placeholder"/>
-          <p:cNvSpPr/>
+          <p:cNvSpPr>
+            <a:spLocks noGrp="1" noRot="1" noChangeAspect="1"/>
+          </p:cNvSpPr>
           <p:nvPr>
             <p:ph type="sldImg" idx="2"/>
           </p:nvPr>
         </p:nvSpPr>
         <p:spPr>
-          <a:prstGeom xmlns:a="http://schemas.openxmlformats.org/drawingml/2006/main" prst="rect">
+          <a:prstGeom prst="rect">
             <a:avLst/>
           </a:prstGeom>
         </p:spPr>
         <p:txBody>
-          <a:bodyPr xmlns:a="http://schemas.openxmlformats.org/drawingml/2006/main"/>
-          <a:lstStyle xmlns:a="http://schemas.openxmlformats.org/drawingml/2006/main"/>
-          <a:p xmlns:a="http://schemas.openxmlformats.org/drawingml/2006/main"/>
+          <a:bodyPr/>
+          <a:lstStyle/>
+          <a:p>
+            <a:endParaRPr/>
+          </a:p>
         </p:txBody>
       </p:sp>
       <p:sp>
         <p:nvSpPr>
           <p:cNvPr id="5" name="Notes Placeholder"/>
-          <p:cNvSpPr/>
+          <p:cNvSpPr>
+            <a:spLocks noGrp="1"/>
+          </p:cNvSpPr>
           <p:nvPr>
             <p:ph type="body" sz="quarter" idx="3"/>
           </p:nvPr>
         </p:nvSpPr>
         <p:spPr>
-          <a:prstGeom xmlns:a="http://schemas.openxmlformats.org/drawingml/2006/main" prst="rect">
+          <a:prstGeom prst="rect">
             <a:avLst/>
           </a:prstGeom>
         </p:spPr>
         <p:txBody>
-          <a:bodyPr xmlns:a="http://schemas.openxmlformats.org/drawingml/2006/main"/>
-          <a:lstStyle xmlns:a="http://schemas.openxmlformats.org/drawingml/2006/main"/>
-          <a:p xmlns:a="http://schemas.openxmlformats.org/drawingml/2006/main"/>
+          <a:bodyPr/>
+          <a:lstStyle/>
+          <a:p>
+            <a:endParaRPr/>
+          </a:p>
         </p:txBody>
       </p:sp>
       <p:sp>
         <p:nvSpPr>
           <p:cNvPr id="6" name="Footer Placeholder"/>
-          <p:cNvSpPr/>
+          <p:cNvSpPr>
+            <a:spLocks noGrp="1"/>
+          </p:cNvSpPr>
           <p:nvPr>
             <p:ph type="ftr" sz="quarter" idx="4"/>
           </p:nvPr>
         </p:nvSpPr>
         <p:spPr>
-          <a:prstGeom xmlns:a="http://schemas.openxmlformats.org/drawingml/2006/main" prst="rect">
+          <a:prstGeom prst="rect">
             <a:avLst/>
           </a:prstGeom>
         </p:spPr>
         <p:txBody>
-          <a:bodyPr xmlns:a="http://schemas.openxmlformats.org/drawingml/2006/main"/>
-          <a:lstStyle xmlns:a="http://schemas.openxmlformats.org/drawingml/2006/main"/>
-          <a:p xmlns:a="http://schemas.openxmlformats.org/drawingml/2006/main"/>
+          <a:bodyPr/>
+          <a:lstStyle/>
+          <a:p>
+            <a:endParaRPr/>
+          </a:p>
         </p:txBody>
       </p:sp>
       <p:sp>
         <p:nvSpPr>
           <p:cNvPr id="7" name="Slide Number Placeholder"/>
-          <p:cNvSpPr/>
+          <p:cNvSpPr>
+            <a:spLocks noGrp="1"/>
+          </p:cNvSpPr>
           <p:nvPr>
             <p:ph type="sldNum" sz="quarter" idx="5"/>
           </p:nvPr>
         </p:nvSpPr>
         <p:spPr>
-          <a:prstGeom xmlns:a="http://schemas.openxmlformats.org/drawingml/2006/main" prst="rect">
+          <a:prstGeom prst="rect">
             <a:avLst/>
           </a:prstGeom>
         </p:spPr>
         <p:txBody>
-          <a:bodyPr xmlns:a="http://schemas.openxmlformats.org/drawingml/2006/main"/>
-          <a:lstStyle xmlns:a="http://schemas.openxmlformats.org/drawingml/2006/main"/>
-          <a:p xmlns:a="http://schemas.openxmlformats.org/drawingml/2006/main"/>
+          <a:bodyPr/>
+          <a:lstStyle/>
+          <a:p>
+            <a:endParaRPr/>
+          </a:p>
         </p:txBody>
       </p:sp>
     </p:spTree>
   </p:cSld>
   <p:clrMap bg1="lt1" tx1="dk1" bg2="lt2" tx2="dk2" accent1="accent1" accent2="accent2" accent3="accent3" accent4="accent4" accent5="accent5" accent6="accent6" hlink="hlink" folHlink="folHlink"/>
   <p:notesStyle>
-    <a:lvl1pPr xmlns:a="http://schemas.openxmlformats.org/drawingml/2006/main" marL="0" algn="l" defTabSz="914400" rtl="0" eaLnBrk="1" latinLnBrk="0" hangingPunct="1">
+    <a:lvl1pPr marL="0" algn="l" defTabSz="914400" rtl="0" eaLnBrk="1" latinLnBrk="0" hangingPunct="1">
       <a:defRPr sz="1200" kern="1200"/>
     </a:lvl1pPr>
   </p:notesStyle>
 </p:notesMaster>
 </file>
 
-<file path=ppt/notesMasters/theme/theme3.xml><?xml version="1.0" encoding="utf-8"?>
-<a:theme xmlns:a="http://schemas.openxmlformats.org/drawingml/2006/main" name="Office Theme">
-  <a:themeElements>
-    <a:clrScheme name="Red Violet">
-      <a:dk1>
-        <a:sysClr val="windowText" lastClr="000000"/>
-      </a:dk1>
-      <a:lt1>
-        <a:sysClr val="window" lastClr="FFFFFF"/>
-      </a:lt1>
-      <a:dk2>
-        <a:srgbClr val="454551"/>
-      </a:dk2>
-      <a:lt2>
-        <a:srgbClr val="D8D9DC"/>
-      </a:lt2>
-      <a:accent1>
-        <a:srgbClr val="E32D91"/>
-      </a:accent1>
-      <a:accent2>
-        <a:srgbClr val="C830CC"/>
-      </a:accent2>
-      <a:accent3>
-        <a:srgbClr val="4EA6DC"/>
-      </a:accent3>
-      <a:accent4>
-        <a:srgbClr val="4775E7"/>
-      </a:accent4>
-      <a:accent5>
-        <a:srgbClr val="8971E1"/>
-      </a:accent5>
-      <a:accent6>
-        <a:srgbClr val="D54773"/>
-      </a:accent6>
-      <a:hlink>
-        <a:srgbClr val="6B9F25"/>
-      </a:hlink>
-      <a:folHlink>
-        <a:srgbClr val="8C8C8C"/>
-      </a:folHlink>
-    </a:clrScheme>
-    <a:fontScheme name="Office">
-      <a:majorFont>
-        <a:latin typeface="Calibri Light"/>
-        <a:ea typeface=""/>
-        <a:cs typeface=""/>
-        <a:font script="Jpan" typeface="游ゴシック Light"/>
-        <a:font script="Hang" typeface="맑은 고딕"/>
-        <a:font script="Hans" typeface="等线 Light"/>
-        <a:font script="Hant" typeface="新細明體"/>
-        <a:font script="Arab" typeface="Times New Roman"/>
-        <a:font script="Hebr" typeface="Times New Roman"/>
-        <a:font script="Thai" typeface="Angsana New"/>
-        <a:font script="Ethi" typeface="Nyala"/>
-        <a:font script="Beng" typeface="Vrinda"/>
-        <a:font script="Gujr" typeface="Shruti"/>
-        <a:font script="Khmr" typeface="MoolBoran"/>
-        <a:font script="Knda" typeface="Tunga"/>
-        <a:font script="Guru" typeface="Raavi"/>
-        <a:font script="Cans" typeface="Euphemia"/>
-        <a:font script="Cher" typeface="Plantagenet Cherokee"/>
-        <a:font script="Yiii" typeface="Microsoft Yi Baiti"/>
-        <a:font script="Tibt" typeface="Microsoft Himalaya"/>
-        <a:font script="Thaa" typeface="MV Boli"/>
-        <a:font script="Deva" typeface="Mangal"/>
-        <a:font script="Telu" typeface="Gautami"/>
-        <a:font script="Taml" typeface="Latha"/>
-        <a:font script="Syrc" typeface="Estrangelo Edessa"/>
-        <a:font script="Orya" typeface="Kalinga"/>
-        <a:font script="Mlym" typeface="Kartika"/>
-        <a:font script="Laoo" typeface="DokChampa"/>
-        <a:font script="Sinh" typeface="Iskoola Pota"/>
-        <a:font script="Mong" typeface="Mongolian Baiti"/>
-        <a:font script="Viet" typeface="Times New Roman"/>
-        <a:font script="Uigh" typeface="Microsoft Uighur"/>
-        <a:font script="Geor" typeface="Sylfaen"/>
-        <a:font script="Armn" typeface="Arial"/>
-        <a:font script="Bugi" typeface="Leelawadee UI"/>
-        <a:font script="Bopo" typeface="Microsoft JhengHei"/>
-        <a:font script="Java" typeface="Javanese Text"/>
-        <a:font script="Lisu" typeface="Segoe UI"/>
-        <a:font script="Mymr" typeface="Myanmar Text"/>
-        <a:font script="Nkoo" typeface="Ebrima"/>
-        <a:font script="Olck" typeface="Nirmala UI"/>
-        <a:font script="Osma" typeface="Ebrima"/>
-        <a:font script="Phag" typeface="Phagspa"/>
-        <a:font script="Syrn" typeface="Estrangelo Edessa"/>
-        <a:font script="Syrj" typeface="Estrangelo Edessa"/>
-        <a:font script="Syre" typeface="Estrangelo Edessa"/>
-        <a:font script="Sora" typeface="Nirmala UI"/>
-        <a:font script="Tale" typeface="Microsoft Tai Le"/>
-        <a:font script="Talu" typeface="Microsoft New Tai Lue"/>
-        <a:font script="Tfng" typeface="Ebrima"/>
-      </a:majorFont>
-      <a:minorFont>
-        <a:latin typeface="Calibri"/>
-        <a:ea typeface=""/>
-        <a:cs typeface=""/>
-        <a:font script="Jpan" typeface="游ゴシック"/>
-        <a:font script="Hang" typeface="맑은 고딕"/>
-        <a:font script="Hans" typeface="等线"/>
-        <a:font script="Hant" typeface="新細明體"/>
-        <a:font script="Arab" typeface="Arial"/>
-        <a:font script="Hebr" typeface="Arial"/>
-        <a:font script="Thai" typeface="Cordia New"/>
-        <a:font script="Ethi" typeface="Nyala"/>
-        <a:font script="Beng" typeface="Vrinda"/>
-        <a:font script="Gujr" typeface="Shruti"/>
-        <a:font script="Khmr" typeface="DaunPenh"/>
-        <a:font script="Knda" typeface="Tunga"/>
-        <a:font script="Guru" typeface="Raavi"/>
-        <a:font script="Cans" typeface="Euphemia"/>
-        <a:font script="Cher" typeface="Plantagenet Cherokee"/>
-        <a:font script="Yiii" typeface="Microsoft Yi Baiti"/>
-        <a:font script="Tibt" typeface="Microsoft Himalaya"/>
-        <a:font script="Thaa" typeface="MV Boli"/>
-        <a:font script="Deva" typeface="Mangal"/>
-        <a:font script="Telu" typeface="Gautami"/>
-        <a:font script="Taml" typeface="Latha"/>
-        <a:font script="Syrc" typeface="Estrangelo Edessa"/>
-        <a:font script="Orya" typeface="Kalinga"/>
-        <a:font script="Mlym" typeface="Kartika"/>
-        <a:font script="Laoo" typeface="DokChampa"/>
-        <a:font script="Sinh" typeface="Iskoola Pota"/>
-        <a:font script="Mong" typeface="Mongolian Baiti"/>
-        <a:font script="Viet" typeface="Arial"/>
-        <a:font script="Uigh" typeface="Microsoft Uighur"/>
-        <a:font script="Geor" typeface="Sylfaen"/>
-        <a:font script="Armn" typeface="Arial"/>
-        <a:font script="Bugi" typeface="Leelawadee UI"/>
-        <a:font script="Bopo" typeface="Microsoft JhengHei"/>
-        <a:font script="Java" typeface="Javanese Text"/>
-        <a:font script="Lisu" typeface="Segoe UI"/>
-        <a:font script="Mymr" typeface="Myanmar Text"/>
-        <a:font script="Nkoo" typeface="Ebrima"/>
-        <a:font script="Olck" typeface="Nirmala UI"/>
-        <a:font script="Osma" typeface="Ebrima"/>
-        <a:font script="Phag" typeface="Phagspa"/>
-        <a:font script="Syrn" typeface="Estrangelo Edessa"/>
-        <a:font script="Syrj" typeface="Estrangelo Edessa"/>
-        <a:font script="Syre" typeface="Estrangelo Edessa"/>
-        <a:font script="Sora" typeface="Nirmala UI"/>
-        <a:font script="Tale" typeface="Microsoft Tai Le"/>
-        <a:font script="Talu" typeface="Microsoft New Tai Lue"/>
-        <a:font script="Tfng" typeface="Ebrima"/>
-      </a:minorFont>
-    </a:fontScheme>
-    <a:fmtScheme name="Red Violet">
-      <a:fillStyleLst>
-        <a:solidFill>
-          <a:schemeClr val="phClr"/>
-        </a:solidFill>
-        <a:gradFill rotWithShape="1">
-          <a:gsLst>
-            <a:gs pos="0">
-              <a:schemeClr val="phClr">
-                <a:tint val="67000"/>
-                <a:lumMod val="110000"/>
-                <a:satMod val="105000"/>
-              </a:schemeClr>
-            </a:gs>
-            <a:gs pos="50000">
-              <a:schemeClr val="phClr">
-                <a:tint val="73000"/>
-                <a:lumMod val="105000"/>
-                <a:satMod val="103000"/>
-              </a:schemeClr>
-            </a:gs>
-            <a:gs pos="100000">
-              <a:schemeClr val="phClr">
-                <a:tint val="81000"/>
-                <a:lumMod val="105000"/>
-                <a:satMod val="109000"/>
-              </a:schemeClr>
-            </a:gs>
-          </a:gsLst>
-          <a:lin ang="5400000" scaled="0"/>
-        </a:gradFill>
-        <a:gradFill rotWithShape="1">
-          <a:gsLst>
-            <a:gs pos="0">
-              <a:schemeClr val="phClr">
-                <a:tint val="94000"/>
-                <a:lumMod val="102000"/>
-                <a:satMod val="103000"/>
-              </a:schemeClr>
-            </a:gs>
-            <a:gs pos="50000">
-              <a:schemeClr val="phClr">
-                <a:shade val="100000"/>
-                <a:lumMod val="100000"/>
-                <a:satMod val="110000"/>
-              </a:schemeClr>
-            </a:gs>
-            <a:gs pos="100000">
-              <a:schemeClr val="phClr">
-                <a:shade val="78000"/>
-                <a:lumMod val="99000"/>
-                <a:satMod val="120000"/>
-              </a:schemeClr>
-            </a:gs>
-          </a:gsLst>
-          <a:lin ang="5400000" scaled="0"/>
-        </a:gradFill>
-      </a:fillStyleLst>
-      <a:lnStyleLst>
-        <a:ln w="6350">
-          <a:solidFill>
-            <a:schemeClr val="phClr"/>
-          </a:solidFill>
-          <a:prstDash val="solid"/>
-        </a:ln>
-        <a:ln w="12700">
-          <a:solidFill>
-            <a:schemeClr val="phClr"/>
-          </a:solidFill>
-          <a:prstDash val="solid"/>
-        </a:ln>
-        <a:ln w="19050">
-          <a:solidFill>
-            <a:schemeClr val="phClr"/>
-          </a:solidFill>
-          <a:prstDash val="solid"/>
-        </a:ln>
-      </a:lnStyleLst>
-      <a:effectStyleLst>
-        <a:effectStyle>
-          <a:effectLst/>
-        </a:effectStyle>
-        <a:effectStyle>
-          <a:effectLst/>
-        </a:effectStyle>
-        <a:effectStyle>
-          <a:effectLst>
-            <a:outerShdw blurRad="57150" dist="19050" dir="5400000" algn="ctr" rotWithShape="0">
-              <a:srgbClr val="000000">
-                <a:alpha val="63000"/>
-              </a:srgbClr>
-            </a:outerShdw>
-          </a:effectLst>
-        </a:effectStyle>
-      </a:effectStyleLst>
-      <a:bgFillStyleLst>
-        <a:solidFill>
-          <a:schemeClr val="phClr"/>
-        </a:solidFill>
-        <a:solidFill>
-          <a:schemeClr val="phClr">
-            <a:tint val="95000"/>
-            <a:satMod val="170000"/>
-          </a:schemeClr>
-        </a:solidFill>
-        <a:gradFill rotWithShape="1">
-          <a:gsLst>
-            <a:gs pos="0">
-              <a:schemeClr val="phClr">
-                <a:tint val="93000"/>
-                <a:shade val="98000"/>
-                <a:lumMod val="102000"/>
-                <a:satMod val="150000"/>
-              </a:schemeClr>
-            </a:gs>
-            <a:gs pos="50000">
-              <a:schemeClr val="phClr">
-                <a:tint val="98000"/>
-                <a:shade val="90000"/>
-                <a:lumMod val="103000"/>
-                <a:satMod val="130000"/>
-              </a:schemeClr>
-            </a:gs>
-            <a:gs pos="100000">
-              <a:schemeClr val="phClr">
-                <a:shade val="63000"/>
-                <a:satMod val="120000"/>
-              </a:schemeClr>
-            </a:gs>
-          </a:gsLst>
-          <a:lin ang="5400000" scaled="0"/>
-        </a:gradFill>
-      </a:bgFillStyleLst>
-    </a:fmtScheme>
-  </a:themeElements>
-</a:theme>
-</file>
-
 <file path=ppt/notesSlides/notesSlide1.xml><?xml version="1.0" encoding="utf-8"?>
-<p:notes xmlns:p="http://schemas.openxmlformats.org/presentationml/2006/main">
+<p:notes xmlns:a="http://schemas.openxmlformats.org/drawingml/2006/main" xmlns:r="http://schemas.openxmlformats.org/officeDocument/2006/relationships" xmlns:p="http://schemas.openxmlformats.org/presentationml/2006/main">
   <p:cSld>
     <p:spTree>
       <p:nvGrpSpPr>
@@ -459,16 +329,21 @@
         <p:nvPr/>
       </p:nvGrpSpPr>
       <p:grpSpPr>
-        <a:xfrm xmlns:a="http://schemas.openxmlformats.org/drawingml/2006/main"/>
+        <a:xfrm>
+          <a:off x="0" y="0"/>
+          <a:ext cx="0" cy="0"/>
+          <a:chOff x="0" y="0"/>
+          <a:chExt cx="0" cy="0"/>
+        </a:xfrm>
       </p:grpSpPr>
       <p:sp>
         <p:nvSpPr>
           <p:cNvPr id="2" name="Slide Image Placeholder 1"/>
           <p:cNvSpPr>
-            <a:spLocks xmlns:a="http://schemas.openxmlformats.org/drawingml/2006/main" noGrp="1"/>
-          </p:cNvSpPr>
-          <p:nvPr>
-            <p:ph type="sldImg" idx="0"/>
+            <a:spLocks noGrp="1" noRot="1" noChangeAspect="1"/>
+          </p:cNvSpPr>
+          <p:nvPr>
+            <p:ph type="sldImg"/>
           </p:nvPr>
         </p:nvSpPr>
         <p:spPr/>
@@ -477,7 +352,7 @@
         <p:nvSpPr>
           <p:cNvPr id="3" name="Notes Placeholder 2"/>
           <p:cNvSpPr>
-            <a:spLocks xmlns:a="http://schemas.openxmlformats.org/drawingml/2006/main" noGrp="1"/>
+            <a:spLocks noGrp="1"/>
           </p:cNvSpPr>
           <p:nvPr>
             <p:ph type="body" idx="1"/>
@@ -485,16 +360,18 @@
         </p:nvSpPr>
         <p:spPr/>
         <p:txBody>
-          <a:bodyPr xmlns:a="http://schemas.openxmlformats.org/drawingml/2006/main"/>
-          <a:lstStyle xmlns:a="http://schemas.openxmlformats.org/drawingml/2006/main"/>
-          <a:p xmlns:a="http://schemas.openxmlformats.org/drawingml/2006/main"/>
+          <a:bodyPr/>
+          <a:lstStyle/>
+          <a:p>
+            <a:endParaRPr/>
+          </a:p>
         </p:txBody>
       </p:sp>
       <p:sp>
         <p:nvSpPr>
           <p:cNvPr id="4" name="Slide Number Placeholder 3"/>
           <p:cNvSpPr>
-            <a:spLocks xmlns:a="http://schemas.openxmlformats.org/drawingml/2006/main" noGrp="1"/>
+            <a:spLocks noGrp="1"/>
           </p:cNvSpPr>
           <p:nvPr>
             <p:ph type="sldNum" idx="5"/>
@@ -502,21 +379,23 @@
         </p:nvSpPr>
         <p:spPr/>
         <p:txBody>
-          <a:bodyPr xmlns:a="http://schemas.openxmlformats.org/drawingml/2006/main"/>
-          <a:lstStyle xmlns:a="http://schemas.openxmlformats.org/drawingml/2006/main"/>
-          <a:p xmlns:a="http://schemas.openxmlformats.org/drawingml/2006/main"/>
+          <a:bodyPr/>
+          <a:lstStyle/>
+          <a:p>
+            <a:endParaRPr/>
+          </a:p>
         </p:txBody>
       </p:sp>
     </p:spTree>
   </p:cSld>
   <p:clrMapOvr>
-    <a:masterClrMapping xmlns:a="http://schemas.openxmlformats.org/drawingml/2006/main"/>
+    <a:masterClrMapping/>
   </p:clrMapOvr>
 </p:notes>
 </file>
 
 <file path=ppt/notesSlides/notesSlide2.xml><?xml version="1.0" encoding="utf-8"?>
-<p:notes xmlns:p="http://schemas.openxmlformats.org/presentationml/2006/main">
+<p:notes xmlns:a="http://schemas.openxmlformats.org/drawingml/2006/main" xmlns:r="http://schemas.openxmlformats.org/officeDocument/2006/relationships" xmlns:p="http://schemas.openxmlformats.org/presentationml/2006/main">
   <p:cSld>
     <p:spTree>
       <p:nvGrpSpPr>
@@ -525,16 +404,21 @@
         <p:nvPr/>
       </p:nvGrpSpPr>
       <p:grpSpPr>
-        <a:xfrm xmlns:a="http://schemas.openxmlformats.org/drawingml/2006/main"/>
+        <a:xfrm>
+          <a:off x="0" y="0"/>
+          <a:ext cx="0" cy="0"/>
+          <a:chOff x="0" y="0"/>
+          <a:chExt cx="0" cy="0"/>
+        </a:xfrm>
       </p:grpSpPr>
       <p:sp>
         <p:nvSpPr>
           <p:cNvPr id="2" name="Slide Image Placeholder 1"/>
           <p:cNvSpPr>
-            <a:spLocks xmlns:a="http://schemas.openxmlformats.org/drawingml/2006/main" noGrp="1"/>
-          </p:cNvSpPr>
-          <p:nvPr>
-            <p:ph type="sldImg" idx="0"/>
+            <a:spLocks noGrp="1" noRot="1" noChangeAspect="1"/>
+          </p:cNvSpPr>
+          <p:nvPr>
+            <p:ph type="sldImg"/>
           </p:nvPr>
         </p:nvSpPr>
         <p:spPr/>
@@ -543,7 +427,7 @@
         <p:nvSpPr>
           <p:cNvPr id="3" name="Notes Placeholder 2"/>
           <p:cNvSpPr>
-            <a:spLocks xmlns:a="http://schemas.openxmlformats.org/drawingml/2006/main" noGrp="1"/>
+            <a:spLocks noGrp="1"/>
           </p:cNvSpPr>
           <p:nvPr>
             <p:ph type="body" idx="1"/>
@@ -551,9 +435,9 @@
         </p:nvSpPr>
         <p:spPr/>
         <p:txBody>
-          <a:bodyPr xmlns:a="http://schemas.openxmlformats.org/drawingml/2006/main"/>
-          <a:lstStyle xmlns:a="http://schemas.openxmlformats.org/drawingml/2006/main"/>
-          <a:p xmlns:a="http://schemas.openxmlformats.org/drawingml/2006/main">
+          <a:bodyPr/>
+          <a:lstStyle/>
+          <a:p>
             <a:r>
               <a:t>Screenshot: https://www.howtoexcel.org/shift-cells-down/</a:t>
             </a:r>
@@ -564,7 +448,7 @@
         <p:nvSpPr>
           <p:cNvPr id="4" name="Slide Number Placeholder 3"/>
           <p:cNvSpPr>
-            <a:spLocks xmlns:a="http://schemas.openxmlformats.org/drawingml/2006/main" noGrp="1"/>
+            <a:spLocks noGrp="1"/>
           </p:cNvSpPr>
           <p:nvPr>
             <p:ph type="sldNum" idx="5"/>
@@ -572,21 +456,23 @@
         </p:nvSpPr>
         <p:spPr/>
         <p:txBody>
-          <a:bodyPr xmlns:a="http://schemas.openxmlformats.org/drawingml/2006/main"/>
-          <a:lstStyle xmlns:a="http://schemas.openxmlformats.org/drawingml/2006/main"/>
-          <a:p xmlns:a="http://schemas.openxmlformats.org/drawingml/2006/main"/>
+          <a:bodyPr/>
+          <a:lstStyle/>
+          <a:p>
+            <a:endParaRPr/>
+          </a:p>
         </p:txBody>
       </p:sp>
     </p:spTree>
   </p:cSld>
   <p:clrMapOvr>
-    <a:masterClrMapping xmlns:a="http://schemas.openxmlformats.org/drawingml/2006/main"/>
+    <a:masterClrMapping/>
   </p:clrMapOvr>
 </p:notes>
 </file>
 
 <file path=ppt/notesSlides/notesSlide3.xml><?xml version="1.0" encoding="utf-8"?>
-<p:notes xmlns:p="http://schemas.openxmlformats.org/presentationml/2006/main">
+<p:notes xmlns:a="http://schemas.openxmlformats.org/drawingml/2006/main" xmlns:r="http://schemas.openxmlformats.org/officeDocument/2006/relationships" xmlns:p="http://schemas.openxmlformats.org/presentationml/2006/main">
   <p:cSld>
     <p:spTree>
       <p:nvGrpSpPr>
@@ -595,16 +481,21 @@
         <p:nvPr/>
       </p:nvGrpSpPr>
       <p:grpSpPr>
-        <a:xfrm xmlns:a="http://schemas.openxmlformats.org/drawingml/2006/main"/>
+        <a:xfrm>
+          <a:off x="0" y="0"/>
+          <a:ext cx="0" cy="0"/>
+          <a:chOff x="0" y="0"/>
+          <a:chExt cx="0" cy="0"/>
+        </a:xfrm>
       </p:grpSpPr>
       <p:sp>
         <p:nvSpPr>
           <p:cNvPr id="2" name="Slide Image Placeholder 1"/>
           <p:cNvSpPr>
-            <a:spLocks xmlns:a="http://schemas.openxmlformats.org/drawingml/2006/main" noGrp="1"/>
-          </p:cNvSpPr>
-          <p:nvPr>
-            <p:ph type="sldImg" idx="0"/>
+            <a:spLocks noGrp="1" noRot="1" noChangeAspect="1"/>
+          </p:cNvSpPr>
+          <p:nvPr>
+            <p:ph type="sldImg"/>
           </p:nvPr>
         </p:nvSpPr>
         <p:spPr/>
@@ -613,7 +504,7 @@
         <p:nvSpPr>
           <p:cNvPr id="3" name="Notes Placeholder 2"/>
           <p:cNvSpPr>
-            <a:spLocks xmlns:a="http://schemas.openxmlformats.org/drawingml/2006/main" noGrp="1"/>
+            <a:spLocks noGrp="1"/>
           </p:cNvSpPr>
           <p:nvPr>
             <p:ph type="body" idx="1"/>
@@ -621,9 +512,9 @@
         </p:nvSpPr>
         <p:spPr/>
         <p:txBody>
-          <a:bodyPr xmlns:a="http://schemas.openxmlformats.org/drawingml/2006/main"/>
-          <a:lstStyle xmlns:a="http://schemas.openxmlformats.org/drawingml/2006/main"/>
-          <a:p xmlns:a="http://schemas.openxmlformats.org/drawingml/2006/main">
+          <a:bodyPr/>
+          <a:lstStyle/>
+          <a:p>
             <a:r>
               <a:t>Screenshot: https://500rockets.io/excel/the-excel-move-column-tutorial-59/</a:t>
             </a:r>
@@ -634,7 +525,7 @@
         <p:nvSpPr>
           <p:cNvPr id="4" name="Slide Number Placeholder 3"/>
           <p:cNvSpPr>
-            <a:spLocks xmlns:a="http://schemas.openxmlformats.org/drawingml/2006/main" noGrp="1"/>
+            <a:spLocks noGrp="1"/>
           </p:cNvSpPr>
           <p:nvPr>
             <p:ph type="sldNum" idx="5"/>
@@ -642,21 +533,23 @@
         </p:nvSpPr>
         <p:spPr/>
         <p:txBody>
-          <a:bodyPr xmlns:a="http://schemas.openxmlformats.org/drawingml/2006/main"/>
-          <a:lstStyle xmlns:a="http://schemas.openxmlformats.org/drawingml/2006/main"/>
-          <a:p xmlns:a="http://schemas.openxmlformats.org/drawingml/2006/main"/>
+          <a:bodyPr/>
+          <a:lstStyle/>
+          <a:p>
+            <a:endParaRPr/>
+          </a:p>
         </p:txBody>
       </p:sp>
     </p:spTree>
   </p:cSld>
   <p:clrMapOvr>
-    <a:masterClrMapping xmlns:a="http://schemas.openxmlformats.org/drawingml/2006/main"/>
+    <a:masterClrMapping/>
   </p:clrMapOvr>
 </p:notes>
 </file>
 
 <file path=ppt/notesSlides/notesSlide4.xml><?xml version="1.0" encoding="utf-8"?>
-<p:notes xmlns:p="http://schemas.openxmlformats.org/presentationml/2006/main">
+<p:notes xmlns:a="http://schemas.openxmlformats.org/drawingml/2006/main" xmlns:r="http://schemas.openxmlformats.org/officeDocument/2006/relationships" xmlns:p="http://schemas.openxmlformats.org/presentationml/2006/main">
   <p:cSld>
     <p:spTree>
       <p:nvGrpSpPr>
@@ -665,16 +558,21 @@
         <p:nvPr/>
       </p:nvGrpSpPr>
       <p:grpSpPr>
-        <a:xfrm xmlns:a="http://schemas.openxmlformats.org/drawingml/2006/main"/>
+        <a:xfrm>
+          <a:off x="0" y="0"/>
+          <a:ext cx="0" cy="0"/>
+          <a:chOff x="0" y="0"/>
+          <a:chExt cx="0" cy="0"/>
+        </a:xfrm>
       </p:grpSpPr>
       <p:sp>
         <p:nvSpPr>
           <p:cNvPr id="2" name="Slide Image Placeholder 1"/>
           <p:cNvSpPr>
-            <a:spLocks xmlns:a="http://schemas.openxmlformats.org/drawingml/2006/main" noGrp="1"/>
-          </p:cNvSpPr>
-          <p:nvPr>
-            <p:ph type="sldImg" idx="0"/>
+            <a:spLocks noGrp="1" noRot="1" noChangeAspect="1"/>
+          </p:cNvSpPr>
+          <p:nvPr>
+            <p:ph type="sldImg"/>
           </p:nvPr>
         </p:nvSpPr>
         <p:spPr/>
@@ -683,7 +581,7 @@
         <p:nvSpPr>
           <p:cNvPr id="3" name="Notes Placeholder 2"/>
           <p:cNvSpPr>
-            <a:spLocks xmlns:a="http://schemas.openxmlformats.org/drawingml/2006/main" noGrp="1"/>
+            <a:spLocks noGrp="1"/>
           </p:cNvSpPr>
           <p:nvPr>
             <p:ph type="body" idx="1"/>
@@ -691,9 +589,9 @@
         </p:nvSpPr>
         <p:spPr/>
         <p:txBody>
-          <a:bodyPr xmlns:a="http://schemas.openxmlformats.org/drawingml/2006/main"/>
-          <a:lstStyle xmlns:a="http://schemas.openxmlformats.org/drawingml/2006/main"/>
-          <a:p xmlns:a="http://schemas.openxmlformats.org/drawingml/2006/main">
+          <a:bodyPr/>
+          <a:lstStyle/>
+          <a:p>
             <a:r>
               <a:t>Screenshot: https://smallbiztrends.com/how-to-delete-your-twitter-account/</a:t>
             </a:r>
@@ -704,7 +602,7 @@
         <p:nvSpPr>
           <p:cNvPr id="4" name="Slide Number Placeholder 3"/>
           <p:cNvSpPr>
-            <a:spLocks xmlns:a="http://schemas.openxmlformats.org/drawingml/2006/main" noGrp="1"/>
+            <a:spLocks noGrp="1"/>
           </p:cNvSpPr>
           <p:nvPr>
             <p:ph type="sldNum" idx="5"/>
@@ -712,21 +610,23 @@
         </p:nvSpPr>
         <p:spPr/>
         <p:txBody>
-          <a:bodyPr xmlns:a="http://schemas.openxmlformats.org/drawingml/2006/main"/>
-          <a:lstStyle xmlns:a="http://schemas.openxmlformats.org/drawingml/2006/main"/>
-          <a:p xmlns:a="http://schemas.openxmlformats.org/drawingml/2006/main"/>
+          <a:bodyPr/>
+          <a:lstStyle/>
+          <a:p>
+            <a:endParaRPr/>
+          </a:p>
         </p:txBody>
       </p:sp>
     </p:spTree>
   </p:cSld>
   <p:clrMapOvr>
-    <a:masterClrMapping xmlns:a="http://schemas.openxmlformats.org/drawingml/2006/main"/>
+    <a:masterClrMapping/>
   </p:clrMapOvr>
 </p:notes>
 </file>
 
 <file path=ppt/notesSlides/notesSlide5.xml><?xml version="1.0" encoding="utf-8"?>
-<p:notes xmlns:p="http://schemas.openxmlformats.org/presentationml/2006/main">
+<p:notes xmlns:a="http://schemas.openxmlformats.org/drawingml/2006/main" xmlns:r="http://schemas.openxmlformats.org/officeDocument/2006/relationships" xmlns:p="http://schemas.openxmlformats.org/presentationml/2006/main">
   <p:cSld>
     <p:spTree>
       <p:nvGrpSpPr>
@@ -735,16 +635,21 @@
         <p:nvPr/>
       </p:nvGrpSpPr>
       <p:grpSpPr>
-        <a:xfrm xmlns:a="http://schemas.openxmlformats.org/drawingml/2006/main"/>
+        <a:xfrm>
+          <a:off x="0" y="0"/>
+          <a:ext cx="0" cy="0"/>
+          <a:chOff x="0" y="0"/>
+          <a:chExt cx="0" cy="0"/>
+        </a:xfrm>
       </p:grpSpPr>
       <p:sp>
         <p:nvSpPr>
           <p:cNvPr id="2" name="Slide Image Placeholder 1"/>
           <p:cNvSpPr>
-            <a:spLocks xmlns:a="http://schemas.openxmlformats.org/drawingml/2006/main" noGrp="1"/>
-          </p:cNvSpPr>
-          <p:nvPr>
-            <p:ph type="sldImg" idx="0"/>
+            <a:spLocks noGrp="1" noRot="1" noChangeAspect="1"/>
+          </p:cNvSpPr>
+          <p:nvPr>
+            <p:ph type="sldImg"/>
           </p:nvPr>
         </p:nvSpPr>
         <p:spPr/>
@@ -753,7 +658,7 @@
         <p:nvSpPr>
           <p:cNvPr id="3" name="Notes Placeholder 2"/>
           <p:cNvSpPr>
-            <a:spLocks xmlns:a="http://schemas.openxmlformats.org/drawingml/2006/main" noGrp="1"/>
+            <a:spLocks noGrp="1"/>
           </p:cNvSpPr>
           <p:nvPr>
             <p:ph type="body" idx="1"/>
@@ -761,9 +666,9 @@
         </p:nvSpPr>
         <p:spPr/>
         <p:txBody>
-          <a:bodyPr xmlns:a="http://schemas.openxmlformats.org/drawingml/2006/main"/>
-          <a:lstStyle xmlns:a="http://schemas.openxmlformats.org/drawingml/2006/main"/>
-          <a:p xmlns:a="http://schemas.openxmlformats.org/drawingml/2006/main">
+          <a:bodyPr/>
+          <a:lstStyle/>
+          <a:p>
             <a:r>
               <a:t>Screenshot: https://excelinsights.net/web/find-replace-data/</a:t>
             </a:r>
@@ -774,7 +679,7 @@
         <p:nvSpPr>
           <p:cNvPr id="4" name="Slide Number Placeholder 3"/>
           <p:cNvSpPr>
-            <a:spLocks xmlns:a="http://schemas.openxmlformats.org/drawingml/2006/main" noGrp="1"/>
+            <a:spLocks noGrp="1"/>
           </p:cNvSpPr>
           <p:nvPr>
             <p:ph type="sldNum" idx="5"/>
@@ -782,21 +687,23 @@
         </p:nvSpPr>
         <p:spPr/>
         <p:txBody>
-          <a:bodyPr xmlns:a="http://schemas.openxmlformats.org/drawingml/2006/main"/>
-          <a:lstStyle xmlns:a="http://schemas.openxmlformats.org/drawingml/2006/main"/>
-          <a:p xmlns:a="http://schemas.openxmlformats.org/drawingml/2006/main"/>
+          <a:bodyPr/>
+          <a:lstStyle/>
+          <a:p>
+            <a:endParaRPr/>
+          </a:p>
         </p:txBody>
       </p:sp>
     </p:spTree>
   </p:cSld>
   <p:clrMapOvr>
-    <a:masterClrMapping xmlns:a="http://schemas.openxmlformats.org/drawingml/2006/main"/>
+    <a:masterClrMapping/>
   </p:clrMapOvr>
 </p:notes>
 </file>
 
 <file path=ppt/notesSlides/notesSlide6.xml><?xml version="1.0" encoding="utf-8"?>
-<p:notes xmlns:p="http://schemas.openxmlformats.org/presentationml/2006/main">
+<p:notes xmlns:a="http://schemas.openxmlformats.org/drawingml/2006/main" xmlns:r="http://schemas.openxmlformats.org/officeDocument/2006/relationships" xmlns:p="http://schemas.openxmlformats.org/presentationml/2006/main">
   <p:cSld>
     <p:spTree>
       <p:nvGrpSpPr>
@@ -805,16 +712,21 @@
         <p:nvPr/>
       </p:nvGrpSpPr>
       <p:grpSpPr>
-        <a:xfrm xmlns:a="http://schemas.openxmlformats.org/drawingml/2006/main"/>
+        <a:xfrm>
+          <a:off x="0" y="0"/>
+          <a:ext cx="0" cy="0"/>
+          <a:chOff x="0" y="0"/>
+          <a:chExt cx="0" cy="0"/>
+        </a:xfrm>
       </p:grpSpPr>
       <p:sp>
         <p:nvSpPr>
           <p:cNvPr id="2" name="Slide Image Placeholder 1"/>
           <p:cNvSpPr>
-            <a:spLocks xmlns:a="http://schemas.openxmlformats.org/drawingml/2006/main" noGrp="1"/>
-          </p:cNvSpPr>
-          <p:nvPr>
-            <p:ph type="sldImg" idx="0"/>
+            <a:spLocks noGrp="1" noRot="1" noChangeAspect="1"/>
+          </p:cNvSpPr>
+          <p:nvPr>
+            <p:ph type="sldImg"/>
           </p:nvPr>
         </p:nvSpPr>
         <p:spPr/>
@@ -823,7 +735,7 @@
         <p:nvSpPr>
           <p:cNvPr id="3" name="Notes Placeholder 2"/>
           <p:cNvSpPr>
-            <a:spLocks xmlns:a="http://schemas.openxmlformats.org/drawingml/2006/main" noGrp="1"/>
+            <a:spLocks noGrp="1"/>
           </p:cNvSpPr>
           <p:nvPr>
             <p:ph type="body" idx="1"/>
@@ -831,16 +743,18 @@
         </p:nvSpPr>
         <p:spPr/>
         <p:txBody>
-          <a:bodyPr xmlns:a="http://schemas.openxmlformats.org/drawingml/2006/main"/>
-          <a:lstStyle xmlns:a="http://schemas.openxmlformats.org/drawingml/2006/main"/>
-          <a:p xmlns:a="http://schemas.openxmlformats.org/drawingml/2006/main"/>
+          <a:bodyPr/>
+          <a:lstStyle/>
+          <a:p>
+            <a:endParaRPr/>
+          </a:p>
         </p:txBody>
       </p:sp>
       <p:sp>
         <p:nvSpPr>
           <p:cNvPr id="4" name="Slide Number Placeholder 3"/>
           <p:cNvSpPr>
-            <a:spLocks xmlns:a="http://schemas.openxmlformats.org/drawingml/2006/main" noGrp="1"/>
+            <a:spLocks noGrp="1"/>
           </p:cNvSpPr>
           <p:nvPr>
             <p:ph type="sldNum" idx="5"/>
@@ -848,153 +762,23 @@
         </p:nvSpPr>
         <p:spPr/>
         <p:txBody>
-          <a:bodyPr xmlns:a="http://schemas.openxmlformats.org/drawingml/2006/main"/>
-          <a:lstStyle xmlns:a="http://schemas.openxmlformats.org/drawingml/2006/main"/>
-          <a:p xmlns:a="http://schemas.openxmlformats.org/drawingml/2006/main"/>
+          <a:bodyPr/>
+          <a:lstStyle/>
+          <a:p>
+            <a:endParaRPr/>
+          </a:p>
         </p:txBody>
       </p:sp>
     </p:spTree>
   </p:cSld>
   <p:clrMapOvr>
-    <a:masterClrMapping xmlns:a="http://schemas.openxmlformats.org/drawingml/2006/main"/>
-  </p:clrMapOvr>
-</p:notes>
-</file>
-
-<file path=ppt/notesSlides/notesSlide7.xml><?xml version="1.0" encoding="utf-8"?>
-<p:notes xmlns:p="http://schemas.openxmlformats.org/presentationml/2006/main">
-  <p:cSld>
-    <p:spTree>
-      <p:nvGrpSpPr>
-        <p:cNvPr id="1" name=""/>
-        <p:cNvGrpSpPr/>
-        <p:nvPr/>
-      </p:nvGrpSpPr>
-      <p:grpSpPr>
-        <a:xfrm xmlns:a="http://schemas.openxmlformats.org/drawingml/2006/main"/>
-      </p:grpSpPr>
-      <p:sp>
-        <p:nvSpPr>
-          <p:cNvPr id="2" name="Slide Image Placeholder 1"/>
-          <p:cNvSpPr>
-            <a:spLocks xmlns:a="http://schemas.openxmlformats.org/drawingml/2006/main" noGrp="1"/>
-          </p:cNvSpPr>
-          <p:nvPr>
-            <p:ph type="sldImg" idx="0"/>
-          </p:nvPr>
-        </p:nvSpPr>
-        <p:spPr/>
-      </p:sp>
-      <p:sp>
-        <p:nvSpPr>
-          <p:cNvPr id="3" name="Notes Placeholder 2"/>
-          <p:cNvSpPr>
-            <a:spLocks xmlns:a="http://schemas.openxmlformats.org/drawingml/2006/main" noGrp="1"/>
-          </p:cNvSpPr>
-          <p:nvPr>
-            <p:ph type="body" idx="1"/>
-          </p:nvPr>
-        </p:nvSpPr>
-        <p:spPr/>
-        <p:txBody>
-          <a:bodyPr xmlns:a="http://schemas.openxmlformats.org/drawingml/2006/main"/>
-          <a:lstStyle xmlns:a="http://schemas.openxmlformats.org/drawingml/2006/main"/>
-          <a:p xmlns:a="http://schemas.openxmlformats.org/drawingml/2006/main"/>
-        </p:txBody>
-      </p:sp>
-      <p:sp>
-        <p:nvSpPr>
-          <p:cNvPr id="4" name="Slide Number Placeholder 3"/>
-          <p:cNvSpPr>
-            <a:spLocks xmlns:a="http://schemas.openxmlformats.org/drawingml/2006/main" noGrp="1"/>
-          </p:cNvSpPr>
-          <p:nvPr>
-            <p:ph type="sldNum" idx="5"/>
-          </p:nvPr>
-        </p:nvSpPr>
-        <p:spPr/>
-        <p:txBody>
-          <a:bodyPr xmlns:a="http://schemas.openxmlformats.org/drawingml/2006/main"/>
-          <a:lstStyle xmlns:a="http://schemas.openxmlformats.org/drawingml/2006/main"/>
-          <a:p xmlns:a="http://schemas.openxmlformats.org/drawingml/2006/main"/>
-        </p:txBody>
-      </p:sp>
-    </p:spTree>
-  </p:cSld>
-  <p:clrMapOvr>
-    <a:masterClrMapping xmlns:a="http://schemas.openxmlformats.org/drawingml/2006/main"/>
-  </p:clrMapOvr>
-</p:notes>
-</file>
-
-<file path=ppt/notesSlides/notesSlide8.xml><?xml version="1.0" encoding="utf-8"?>
-<p:notes xmlns:p="http://schemas.openxmlformats.org/presentationml/2006/main">
-  <p:cSld>
-    <p:spTree>
-      <p:nvGrpSpPr>
-        <p:cNvPr id="1" name=""/>
-        <p:cNvGrpSpPr/>
-        <p:nvPr/>
-      </p:nvGrpSpPr>
-      <p:grpSpPr>
-        <a:xfrm xmlns:a="http://schemas.openxmlformats.org/drawingml/2006/main"/>
-      </p:grpSpPr>
-      <p:sp>
-        <p:nvSpPr>
-          <p:cNvPr id="2" name="Slide Image Placeholder 1"/>
-          <p:cNvSpPr>
-            <a:spLocks xmlns:a="http://schemas.openxmlformats.org/drawingml/2006/main" noGrp="1"/>
-          </p:cNvSpPr>
-          <p:nvPr>
-            <p:ph type="sldImg" idx="0"/>
-          </p:nvPr>
-        </p:nvSpPr>
-        <p:spPr/>
-      </p:sp>
-      <p:sp>
-        <p:nvSpPr>
-          <p:cNvPr id="3" name="Notes Placeholder 2"/>
-          <p:cNvSpPr>
-            <a:spLocks xmlns:a="http://schemas.openxmlformats.org/drawingml/2006/main" noGrp="1"/>
-          </p:cNvSpPr>
-          <p:nvPr>
-            <p:ph type="body" idx="1"/>
-          </p:nvPr>
-        </p:nvSpPr>
-        <p:spPr/>
-        <p:txBody>
-          <a:bodyPr xmlns:a="http://schemas.openxmlformats.org/drawingml/2006/main"/>
-          <a:lstStyle xmlns:a="http://schemas.openxmlformats.org/drawingml/2006/main"/>
-          <a:p xmlns:a="http://schemas.openxmlformats.org/drawingml/2006/main"/>
-        </p:txBody>
-      </p:sp>
-      <p:sp>
-        <p:nvSpPr>
-          <p:cNvPr id="4" name="Slide Number Placeholder 3"/>
-          <p:cNvSpPr>
-            <a:spLocks xmlns:a="http://schemas.openxmlformats.org/drawingml/2006/main" noGrp="1"/>
-          </p:cNvSpPr>
-          <p:nvPr>
-            <p:ph type="sldNum" idx="5"/>
-          </p:nvPr>
-        </p:nvSpPr>
-        <p:spPr/>
-        <p:txBody>
-          <a:bodyPr xmlns:a="http://schemas.openxmlformats.org/drawingml/2006/main"/>
-          <a:lstStyle xmlns:a="http://schemas.openxmlformats.org/drawingml/2006/main"/>
-          <a:p xmlns:a="http://schemas.openxmlformats.org/drawingml/2006/main"/>
-        </p:txBody>
-      </p:sp>
-    </p:spTree>
-  </p:cSld>
-  <p:clrMapOvr>
-    <a:masterClrMapping xmlns:a="http://schemas.openxmlformats.org/drawingml/2006/main"/>
+    <a:masterClrMapping/>
   </p:clrMapOvr>
 </p:notes>
 </file>
 
 <file path=ppt/slideLayouts/slideLayout1.xml><?xml version="1.0" encoding="utf-8"?>
-<p:sldLayout xmlns:p="http://schemas.openxmlformats.org/presentationml/2006/main" type="title" preserve="1">
+<p:sldLayout xmlns:a="http://schemas.openxmlformats.org/drawingml/2006/main" xmlns:r="http://schemas.openxmlformats.org/officeDocument/2006/relationships" xmlns:p="http://schemas.openxmlformats.org/presentationml/2006/main" type="title" preserve="1">
   <p:cSld name="Title Slide">
     <p:spTree>
       <p:nvGrpSpPr>
@@ -1003,71 +787,75 @@
         <p:nvPr/>
       </p:nvGrpSpPr>
       <p:grpSpPr>
-        <a:xfrm xmlns:a="http://schemas.openxmlformats.org/drawingml/2006/main"/>
+        <a:xfrm>
+          <a:off x="0" y="0"/>
+          <a:ext cx="0" cy="0"/>
+          <a:chOff x="0" y="0"/>
+          <a:chExt cx="0" cy="0"/>
+        </a:xfrm>
       </p:grpSpPr>
       <p:sp>
         <p:nvSpPr>
           <p:cNvPr id="2" name="Title 1">
-            <a:extLst xmlns:a="http://schemas.openxmlformats.org/drawingml/2006/main">
+            <a:extLst>
               <a:ext uri="{FF2B5EF4-FFF2-40B4-BE49-F238E27FC236}">
                 <a16:creationId xmlns:a16="http://schemas.microsoft.com/office/drawing/2014/main" id="{7F9585AB-590D-2940-F9D8-91A2DEA70AEC}"/>
               </a:ext>
             </a:extLst>
           </p:cNvPr>
           <p:cNvSpPr>
-            <a:spLocks xmlns:a="http://schemas.openxmlformats.org/drawingml/2006/main" noGrp="1"/>
-          </p:cNvSpPr>
-          <p:nvPr>
-            <p:ph type="ctrTitle" idx="0"/>
+            <a:spLocks noGrp="1"/>
+          </p:cNvSpPr>
+          <p:nvPr>
+            <p:ph type="ctrTitle"/>
           </p:nvPr>
         </p:nvSpPr>
         <p:spPr>
-          <a:xfrm xmlns:a="http://schemas.openxmlformats.org/drawingml/2006/main">
+          <a:xfrm>
             <a:off x="1524000" y="1122363"/>
             <a:ext cx="9144000" cy="2387600"/>
           </a:xfrm>
         </p:spPr>
         <p:txBody>
-          <a:bodyPr xmlns:a="http://schemas.openxmlformats.org/drawingml/2006/main" anchor="b"/>
-          <a:lstStyle xmlns:a="http://schemas.openxmlformats.org/drawingml/2006/main">
+          <a:bodyPr anchor="b"/>
+          <a:lstStyle>
             <a:lvl1pPr algn="ctr">
               <a:buNone/>
               <a:defRPr sz="6000"/>
             </a:lvl1pPr>
           </a:lstStyle>
-          <a:p xmlns:a="http://schemas.openxmlformats.org/drawingml/2006/main">
+          <a:p>
             <a:r>
               <a:t>Click to edit Master title style</a:t>
             </a:r>
-            <a:endParaRPr/>
           </a:p>
         </p:txBody>
       </p:sp>
       <p:sp>
         <p:nvSpPr>
           <p:cNvPr id="3" name="Subtitle 2">
-            <a:extLst xmlns:a="http://schemas.openxmlformats.org/drawingml/2006/main">
+            <a:extLst>
               <a:ext uri="{FF2B5EF4-FFF2-40B4-BE49-F238E27FC236}">
                 <a16:creationId xmlns:a16="http://schemas.microsoft.com/office/drawing/2014/main" id="{8B41E1D7-50E5-605C-ACD7-89AFACCFD5E6}"/>
               </a:ext>
             </a:extLst>
           </p:cNvPr>
           <p:cNvSpPr>
-            <a:spLocks xmlns:a="http://schemas.openxmlformats.org/drawingml/2006/main" noGrp="1"/>
+            <a:spLocks noGrp="1"/>
           </p:cNvSpPr>
           <p:nvPr>
             <p:ph type="subTitle" idx="1"/>
           </p:nvPr>
         </p:nvSpPr>
         <p:spPr>
-          <a:xfrm xmlns:a="http://schemas.openxmlformats.org/drawingml/2006/main">
+          <a:xfrm>
             <a:off x="1524000" y="3602038"/>
             <a:ext cx="9144000" cy="1655762"/>
           </a:xfrm>
         </p:spPr>
         <p:txBody>
-          <a:bodyPr xmlns:a="http://schemas.openxmlformats.org/drawingml/2006/main"/>
-          <a:lstStyle xmlns:a="http://schemas.openxmlformats.org/drawingml/2006/main">
+          <a:bodyPr/>
+          <a:lstStyle>
             <a:lvl1pPr marL="0" indent="0" algn="ctr">
               <a:buNone/>
               <a:defRPr sz="2400"/>
@@ -1105,25 +893,24 @@
               <a:defRPr sz="1600"/>
             </a:lvl9pPr>
           </a:lstStyle>
-          <a:p xmlns:a="http://schemas.openxmlformats.org/drawingml/2006/main">
+          <a:p>
             <a:r>
               <a:t>Click to edit Master subtitle style</a:t>
             </a:r>
-            <a:endParaRPr/>
           </a:p>
         </p:txBody>
       </p:sp>
       <p:sp>
         <p:nvSpPr>
           <p:cNvPr id="4" name="Date Placeholder 3">
-            <a:extLst xmlns:a="http://schemas.openxmlformats.org/drawingml/2006/main">
+            <a:extLst>
               <a:ext uri="{FF2B5EF4-FFF2-40B4-BE49-F238E27FC236}">
                 <a16:creationId xmlns:a16="http://schemas.microsoft.com/office/drawing/2014/main" id="{1DEE8DB3-D225-FB0F-4A95-87FE121ACE41}"/>
               </a:ext>
             </a:extLst>
           </p:cNvPr>
           <p:cNvSpPr>
-            <a:spLocks xmlns:a="http://schemas.openxmlformats.org/drawingml/2006/main" noGrp="1"/>
+            <a:spLocks noGrp="1"/>
           </p:cNvSpPr>
           <p:nvPr>
             <p:ph type="dt" idx="10"/>
@@ -1131,11 +918,11 @@
         </p:nvSpPr>
         <p:spPr/>
         <p:txBody>
-          <a:bodyPr xmlns:a="http://schemas.openxmlformats.org/drawingml/2006/main"/>
-          <a:lstStyle xmlns:a="http://schemas.openxmlformats.org/drawingml/2006/main"/>
-          <a:p xmlns:a="http://schemas.openxmlformats.org/drawingml/2006/main">
+          <a:bodyPr/>
+          <a:lstStyle/>
+          <a:p>
             <a:fld id="{EDB99004-FBBF-4BCC-9BC3-88F554ADE514}" type="datetimeFigureOut">
-              <a:t>09/10/2026</a:t>
+              <a:t>15-Oct-26</a:t>
             </a:fld>
             <a:endParaRPr/>
           </a:p>
@@ -1144,14 +931,14 @@
       <p:sp>
         <p:nvSpPr>
           <p:cNvPr id="5" name="Footer Placeholder 4">
-            <a:extLst xmlns:a="http://schemas.openxmlformats.org/drawingml/2006/main">
+            <a:extLst>
               <a:ext uri="{FF2B5EF4-FFF2-40B4-BE49-F238E27FC236}">
                 <a16:creationId xmlns:a16="http://schemas.microsoft.com/office/drawing/2014/main" id="{47F4E33A-D01E-EAC3-6198-75DCE67E4BA9}"/>
               </a:ext>
             </a:extLst>
           </p:cNvPr>
           <p:cNvSpPr>
-            <a:spLocks xmlns:a="http://schemas.openxmlformats.org/drawingml/2006/main" noGrp="1"/>
+            <a:spLocks noGrp="1"/>
           </p:cNvSpPr>
           <p:nvPr>
             <p:ph type="ftr" idx="11"/>
@@ -1159,9 +946,9 @@
         </p:nvSpPr>
         <p:spPr/>
         <p:txBody>
-          <a:bodyPr xmlns:a="http://schemas.openxmlformats.org/drawingml/2006/main"/>
-          <a:lstStyle xmlns:a="http://schemas.openxmlformats.org/drawingml/2006/main"/>
-          <a:p xmlns:a="http://schemas.openxmlformats.org/drawingml/2006/main">
+          <a:bodyPr/>
+          <a:lstStyle/>
+          <a:p>
             <a:endParaRPr/>
           </a:p>
         </p:txBody>
@@ -1169,14 +956,14 @@
       <p:sp>
         <p:nvSpPr>
           <p:cNvPr id="6" name="Slide Number Placeholder 5">
-            <a:extLst xmlns:a="http://schemas.openxmlformats.org/drawingml/2006/main">
+            <a:extLst>
               <a:ext uri="{FF2B5EF4-FFF2-40B4-BE49-F238E27FC236}">
                 <a16:creationId xmlns:a16="http://schemas.microsoft.com/office/drawing/2014/main" id="{0A783C2F-F6A4-CF68-E054-91D3A8A6FC35}"/>
               </a:ext>
             </a:extLst>
           </p:cNvPr>
           <p:cNvSpPr>
-            <a:spLocks xmlns:a="http://schemas.openxmlformats.org/drawingml/2006/main" noGrp="1"/>
+            <a:spLocks noGrp="1"/>
           </p:cNvSpPr>
           <p:nvPr>
             <p:ph type="sldNum" idx="12"/>
@@ -1184,9 +971,9 @@
         </p:nvSpPr>
         <p:spPr/>
         <p:txBody>
-          <a:bodyPr xmlns:a="http://schemas.openxmlformats.org/drawingml/2006/main"/>
-          <a:lstStyle xmlns:a="http://schemas.openxmlformats.org/drawingml/2006/main"/>
-          <a:p xmlns:a="http://schemas.openxmlformats.org/drawingml/2006/main">
+          <a:bodyPr/>
+          <a:lstStyle/>
+          <a:p>
             <a:fld id="{3721C89F-AE7A-4C3B-889F-FA429D0A7F97}" type="slidenum">
               <a:t>‹#›</a:t>
             </a:fld>
@@ -1196,11 +983,14 @@
       </p:sp>
     </p:spTree>
   </p:cSld>
+  <p:clrMapOvr>
+    <a:masterClrMapping/>
+  </p:clrMapOvr>
 </p:sldLayout>
 </file>
 
 <file path=ppt/slideLayouts/slideLayout10.xml><?xml version="1.0" encoding="utf-8"?>
-<p:sldLayout xmlns:p="http://schemas.openxmlformats.org/presentationml/2006/main" type="vertTx" preserve="1">
+<p:sldLayout xmlns:a="http://schemas.openxmlformats.org/drawingml/2006/main" xmlns:r="http://schemas.openxmlformats.org/officeDocument/2006/relationships" xmlns:p="http://schemas.openxmlformats.org/presentationml/2006/main" type="vertTx" preserve="1">
   <p:cSld name="Title and Vertical Text">
     <p:spTree>
       <p:nvGrpSpPr>
@@ -1209,47 +999,51 @@
         <p:nvPr/>
       </p:nvGrpSpPr>
       <p:grpSpPr>
-        <a:xfrm xmlns:a="http://schemas.openxmlformats.org/drawingml/2006/main"/>
+        <a:xfrm>
+          <a:off x="0" y="0"/>
+          <a:ext cx="0" cy="0"/>
+          <a:chOff x="0" y="0"/>
+          <a:chExt cx="0" cy="0"/>
+        </a:xfrm>
       </p:grpSpPr>
       <p:sp>
         <p:nvSpPr>
           <p:cNvPr id="2" name="Title 1">
-            <a:extLst xmlns:a="http://schemas.openxmlformats.org/drawingml/2006/main">
+            <a:extLst>
               <a:ext uri="{FF2B5EF4-FFF2-40B4-BE49-F238E27FC236}">
                 <a16:creationId xmlns:a16="http://schemas.microsoft.com/office/drawing/2014/main" id="{D44DC5F4-D20C-2DB3-8411-B320533BB9DA}"/>
               </a:ext>
             </a:extLst>
           </p:cNvPr>
           <p:cNvSpPr>
-            <a:spLocks xmlns:a="http://schemas.openxmlformats.org/drawingml/2006/main" noGrp="1"/>
-          </p:cNvSpPr>
-          <p:nvPr>
-            <p:ph type="title" idx="0"/>
+            <a:spLocks noGrp="1"/>
+          </p:cNvSpPr>
+          <p:nvPr>
+            <p:ph type="title"/>
           </p:nvPr>
         </p:nvSpPr>
         <p:spPr/>
         <p:txBody>
-          <a:bodyPr xmlns:a="http://schemas.openxmlformats.org/drawingml/2006/main"/>
-          <a:lstStyle xmlns:a="http://schemas.openxmlformats.org/drawingml/2006/main"/>
-          <a:p xmlns:a="http://schemas.openxmlformats.org/drawingml/2006/main">
+          <a:bodyPr/>
+          <a:lstStyle/>
+          <a:p>
             <a:r>
               <a:t>Click to edit Master title style</a:t>
             </a:r>
-            <a:endParaRPr/>
           </a:p>
         </p:txBody>
       </p:sp>
       <p:sp>
         <p:nvSpPr>
           <p:cNvPr id="3" name="Vertical Text Placeholder 2">
-            <a:extLst xmlns:a="http://schemas.openxmlformats.org/drawingml/2006/main">
+            <a:extLst>
               <a:ext uri="{FF2B5EF4-FFF2-40B4-BE49-F238E27FC236}">
                 <a16:creationId xmlns:a16="http://schemas.microsoft.com/office/drawing/2014/main" id="{030EA972-BBB4-2124-F72C-ECCD0063490E}"/>
               </a:ext>
             </a:extLst>
           </p:cNvPr>
           <p:cNvSpPr>
-            <a:spLocks xmlns:a="http://schemas.openxmlformats.org/drawingml/2006/main" noGrp="1"/>
+            <a:spLocks noGrp="1"/>
           </p:cNvSpPr>
           <p:nvPr>
             <p:ph type="body" idx="1"/>
@@ -1257,9 +1051,9 @@
         </p:nvSpPr>
         <p:spPr/>
         <p:txBody>
-          <a:bodyPr xmlns:a="http://schemas.openxmlformats.org/drawingml/2006/main" vert="eaVert"/>
-          <a:lstStyle xmlns:a="http://schemas.openxmlformats.org/drawingml/2006/main"/>
-          <a:p xmlns:a="http://schemas.openxmlformats.org/drawingml/2006/main">
+          <a:bodyPr vert="eaVert"/>
+          <a:lstStyle/>
+          <a:p>
             <a:pPr lvl="0">
               <a:buNone/>
             </a:pPr>
@@ -1267,7 +1061,7 @@
               <a:t>Click to edit Master text styles</a:t>
             </a:r>
           </a:p>
-          <a:p xmlns:a="http://schemas.openxmlformats.org/drawingml/2006/main">
+          <a:p>
             <a:pPr lvl="1">
               <a:buNone/>
             </a:pPr>
@@ -1275,7 +1069,7 @@
               <a:t>Second level</a:t>
             </a:r>
           </a:p>
-          <a:p xmlns:a="http://schemas.openxmlformats.org/drawingml/2006/main">
+          <a:p>
             <a:pPr lvl="2">
               <a:buNone/>
             </a:pPr>
@@ -1283,7 +1077,7 @@
               <a:t>Third level</a:t>
             </a:r>
           </a:p>
-          <a:p xmlns:a="http://schemas.openxmlformats.org/drawingml/2006/main">
+          <a:p>
             <a:pPr lvl="3">
               <a:buNone/>
             </a:pPr>
@@ -1291,28 +1085,27 @@
               <a:t>Fourth level</a:t>
             </a:r>
           </a:p>
-          <a:p xmlns:a="http://schemas.openxmlformats.org/drawingml/2006/main">
+          <a:p>
             <a:pPr lvl="4">
               <a:buNone/>
             </a:pPr>
             <a:r>
               <a:t>Fifth level</a:t>
             </a:r>
-            <a:endParaRPr/>
           </a:p>
         </p:txBody>
       </p:sp>
       <p:sp>
         <p:nvSpPr>
           <p:cNvPr id="4" name="Date Placeholder 3">
-            <a:extLst xmlns:a="http://schemas.openxmlformats.org/drawingml/2006/main">
+            <a:extLst>
               <a:ext uri="{FF2B5EF4-FFF2-40B4-BE49-F238E27FC236}">
                 <a16:creationId xmlns:a16="http://schemas.microsoft.com/office/drawing/2014/main" id="{3644EE25-5808-5EF9-D529-A97D9A5F4E7F}"/>
               </a:ext>
             </a:extLst>
           </p:cNvPr>
           <p:cNvSpPr>
-            <a:spLocks xmlns:a="http://schemas.openxmlformats.org/drawingml/2006/main" noGrp="1"/>
+            <a:spLocks noGrp="1"/>
           </p:cNvSpPr>
           <p:nvPr>
             <p:ph type="dt" idx="10"/>
@@ -1320,11 +1113,11 @@
         </p:nvSpPr>
         <p:spPr/>
         <p:txBody>
-          <a:bodyPr xmlns:a="http://schemas.openxmlformats.org/drawingml/2006/main"/>
-          <a:lstStyle xmlns:a="http://schemas.openxmlformats.org/drawingml/2006/main"/>
-          <a:p xmlns:a="http://schemas.openxmlformats.org/drawingml/2006/main">
+          <a:bodyPr/>
+          <a:lstStyle/>
+          <a:p>
             <a:fld id="{EDB99004-FBBF-4BCC-9BC3-88F554ADE514}" type="datetimeFigureOut">
-              <a:t>09/10/2026</a:t>
+              <a:t>15-Oct-26</a:t>
             </a:fld>
             <a:endParaRPr/>
           </a:p>
@@ -1333,14 +1126,14 @@
       <p:sp>
         <p:nvSpPr>
           <p:cNvPr id="5" name="Footer Placeholder 4">
-            <a:extLst xmlns:a="http://schemas.openxmlformats.org/drawingml/2006/main">
+            <a:extLst>
               <a:ext uri="{FF2B5EF4-FFF2-40B4-BE49-F238E27FC236}">
                 <a16:creationId xmlns:a16="http://schemas.microsoft.com/office/drawing/2014/main" id="{9662F814-6E03-DA7E-994E-BD8357BF20F4}"/>
               </a:ext>
             </a:extLst>
           </p:cNvPr>
           <p:cNvSpPr>
-            <a:spLocks xmlns:a="http://schemas.openxmlformats.org/drawingml/2006/main" noGrp="1"/>
+            <a:spLocks noGrp="1"/>
           </p:cNvSpPr>
           <p:nvPr>
             <p:ph type="ftr" idx="11"/>
@@ -1348,9 +1141,9 @@
         </p:nvSpPr>
         <p:spPr/>
         <p:txBody>
-          <a:bodyPr xmlns:a="http://schemas.openxmlformats.org/drawingml/2006/main"/>
-          <a:lstStyle xmlns:a="http://schemas.openxmlformats.org/drawingml/2006/main"/>
-          <a:p xmlns:a="http://schemas.openxmlformats.org/drawingml/2006/main">
+          <a:bodyPr/>
+          <a:lstStyle/>
+          <a:p>
             <a:endParaRPr/>
           </a:p>
         </p:txBody>
@@ -1358,14 +1151,14 @@
       <p:sp>
         <p:nvSpPr>
           <p:cNvPr id="6" name="Slide Number Placeholder 5">
-            <a:extLst xmlns:a="http://schemas.openxmlformats.org/drawingml/2006/main">
+            <a:extLst>
               <a:ext uri="{FF2B5EF4-FFF2-40B4-BE49-F238E27FC236}">
                 <a16:creationId xmlns:a16="http://schemas.microsoft.com/office/drawing/2014/main" id="{7B08E29C-8AD9-8F1D-C539-6DC238A4F76A}"/>
               </a:ext>
             </a:extLst>
           </p:cNvPr>
           <p:cNvSpPr>
-            <a:spLocks xmlns:a="http://schemas.openxmlformats.org/drawingml/2006/main" noGrp="1"/>
+            <a:spLocks noGrp="1"/>
           </p:cNvSpPr>
           <p:nvPr>
             <p:ph type="sldNum" idx="12"/>
@@ -1373,9 +1166,9 @@
         </p:nvSpPr>
         <p:spPr/>
         <p:txBody>
-          <a:bodyPr xmlns:a="http://schemas.openxmlformats.org/drawingml/2006/main"/>
-          <a:lstStyle xmlns:a="http://schemas.openxmlformats.org/drawingml/2006/main"/>
-          <a:p xmlns:a="http://schemas.openxmlformats.org/drawingml/2006/main">
+          <a:bodyPr/>
+          <a:lstStyle/>
+          <a:p>
             <a:fld id="{3721C89F-AE7A-4C3B-889F-FA429D0A7F97}" type="slidenum">
               <a:t>‹#›</a:t>
             </a:fld>
@@ -1385,11 +1178,14 @@
       </p:sp>
     </p:spTree>
   </p:cSld>
+  <p:clrMapOvr>
+    <a:masterClrMapping/>
+  </p:clrMapOvr>
 </p:sldLayout>
 </file>
 
 <file path=ppt/slideLayouts/slideLayout11.xml><?xml version="1.0" encoding="utf-8"?>
-<p:sldLayout xmlns:p="http://schemas.openxmlformats.org/presentationml/2006/main" type="vertTitleAndTx" preserve="1">
+<p:sldLayout xmlns:a="http://schemas.openxmlformats.org/drawingml/2006/main" xmlns:r="http://schemas.openxmlformats.org/officeDocument/2006/relationships" xmlns:p="http://schemas.openxmlformats.org/presentationml/2006/main" type="vertTitleAndTx" preserve="1">
   <p:cSld name="Vertical Title and Text">
     <p:spTree>
       <p:nvGrpSpPr>
@@ -1398,67 +1194,71 @@
         <p:nvPr/>
       </p:nvGrpSpPr>
       <p:grpSpPr>
-        <a:xfrm xmlns:a="http://schemas.openxmlformats.org/drawingml/2006/main"/>
+        <a:xfrm>
+          <a:off x="0" y="0"/>
+          <a:ext cx="0" cy="0"/>
+          <a:chOff x="0" y="0"/>
+          <a:chExt cx="0" cy="0"/>
+        </a:xfrm>
       </p:grpSpPr>
       <p:sp>
         <p:nvSpPr>
           <p:cNvPr id="2" name="Vertical Title 1">
-            <a:extLst xmlns:a="http://schemas.openxmlformats.org/drawingml/2006/main">
+            <a:extLst>
               <a:ext uri="{FF2B5EF4-FFF2-40B4-BE49-F238E27FC236}">
                 <a16:creationId xmlns:a16="http://schemas.microsoft.com/office/drawing/2014/main" id="{7E9B99B6-549F-E1E7-9083-8BA3B57D86FB}"/>
               </a:ext>
             </a:extLst>
           </p:cNvPr>
           <p:cNvSpPr>
-            <a:spLocks xmlns:a="http://schemas.openxmlformats.org/drawingml/2006/main" noGrp="1"/>
-          </p:cNvSpPr>
-          <p:nvPr>
-            <p:ph type="title" idx="0"/>
+            <a:spLocks noGrp="1"/>
+          </p:cNvSpPr>
+          <p:nvPr>
+            <p:ph type="title"/>
           </p:nvPr>
         </p:nvSpPr>
         <p:spPr>
-          <a:xfrm xmlns:a="http://schemas.openxmlformats.org/drawingml/2006/main">
+          <a:xfrm>
             <a:off x="8724900" y="365125"/>
             <a:ext cx="2628900" cy="5811838"/>
           </a:xfrm>
         </p:spPr>
         <p:txBody>
-          <a:bodyPr xmlns:a="http://schemas.openxmlformats.org/drawingml/2006/main" vert="eaVert"/>
-          <a:lstStyle xmlns:a="http://schemas.openxmlformats.org/drawingml/2006/main"/>
-          <a:p xmlns:a="http://schemas.openxmlformats.org/drawingml/2006/main">
+          <a:bodyPr vert="eaVert"/>
+          <a:lstStyle/>
+          <a:p>
             <a:r>
               <a:t>Click to edit Master title style</a:t>
             </a:r>
-            <a:endParaRPr/>
           </a:p>
         </p:txBody>
       </p:sp>
       <p:sp>
         <p:nvSpPr>
           <p:cNvPr id="3" name="Vertical Text Placeholder 2">
-            <a:extLst xmlns:a="http://schemas.openxmlformats.org/drawingml/2006/main">
+            <a:extLst>
               <a:ext uri="{FF2B5EF4-FFF2-40B4-BE49-F238E27FC236}">
                 <a16:creationId xmlns:a16="http://schemas.microsoft.com/office/drawing/2014/main" id="{DE6435A8-2F0B-810A-E41D-C6ABD4CC491A}"/>
               </a:ext>
             </a:extLst>
           </p:cNvPr>
           <p:cNvSpPr>
-            <a:spLocks xmlns:a="http://schemas.openxmlformats.org/drawingml/2006/main" noGrp="1"/>
+            <a:spLocks noGrp="1"/>
           </p:cNvSpPr>
           <p:nvPr>
             <p:ph type="body" idx="1"/>
           </p:nvPr>
         </p:nvSpPr>
         <p:spPr>
-          <a:xfrm xmlns:a="http://schemas.openxmlformats.org/drawingml/2006/main">
+          <a:xfrm>
             <a:off x="838200" y="365125"/>
             <a:ext cx="7734300" cy="5811838"/>
           </a:xfrm>
         </p:spPr>
         <p:txBody>
-          <a:bodyPr xmlns:a="http://schemas.openxmlformats.org/drawingml/2006/main" vert="eaVert"/>
-          <a:lstStyle xmlns:a="http://schemas.openxmlformats.org/drawingml/2006/main"/>
-          <a:p xmlns:a="http://schemas.openxmlformats.org/drawingml/2006/main">
+          <a:bodyPr vert="eaVert"/>
+          <a:lstStyle/>
+          <a:p>
             <a:pPr lvl="0">
               <a:buNone/>
             </a:pPr>
@@ -1466,7 +1266,7 @@
               <a:t>Click to edit Master text styles</a:t>
             </a:r>
           </a:p>
-          <a:p xmlns:a="http://schemas.openxmlformats.org/drawingml/2006/main">
+          <a:p>
             <a:pPr lvl="1">
               <a:buNone/>
             </a:pPr>
@@ -1474,7 +1274,7 @@
               <a:t>Second level</a:t>
             </a:r>
           </a:p>
-          <a:p xmlns:a="http://schemas.openxmlformats.org/drawingml/2006/main">
+          <a:p>
             <a:pPr lvl="2">
               <a:buNone/>
             </a:pPr>
@@ -1482,7 +1282,7 @@
               <a:t>Third level</a:t>
             </a:r>
           </a:p>
-          <a:p xmlns:a="http://schemas.openxmlformats.org/drawingml/2006/main">
+          <a:p>
             <a:pPr lvl="3">
               <a:buNone/>
             </a:pPr>
@@ -1490,28 +1290,27 @@
               <a:t>Fourth level</a:t>
             </a:r>
           </a:p>
-          <a:p xmlns:a="http://schemas.openxmlformats.org/drawingml/2006/main">
+          <a:p>
             <a:pPr lvl="4">
               <a:buNone/>
             </a:pPr>
             <a:r>
               <a:t>Fifth level</a:t>
             </a:r>
-            <a:endParaRPr/>
           </a:p>
         </p:txBody>
       </p:sp>
       <p:sp>
         <p:nvSpPr>
           <p:cNvPr id="4" name="Date Placeholder 3">
-            <a:extLst xmlns:a="http://schemas.openxmlformats.org/drawingml/2006/main">
+            <a:extLst>
               <a:ext uri="{FF2B5EF4-FFF2-40B4-BE49-F238E27FC236}">
                 <a16:creationId xmlns:a16="http://schemas.microsoft.com/office/drawing/2014/main" id="{62877F48-282A-7BEC-513D-DD66A962A5D6}"/>
               </a:ext>
             </a:extLst>
           </p:cNvPr>
           <p:cNvSpPr>
-            <a:spLocks xmlns:a="http://schemas.openxmlformats.org/drawingml/2006/main" noGrp="1"/>
+            <a:spLocks noGrp="1"/>
           </p:cNvSpPr>
           <p:nvPr>
             <p:ph type="dt" idx="10"/>
@@ -1519,11 +1318,11 @@
         </p:nvSpPr>
         <p:spPr/>
         <p:txBody>
-          <a:bodyPr xmlns:a="http://schemas.openxmlformats.org/drawingml/2006/main"/>
-          <a:lstStyle xmlns:a="http://schemas.openxmlformats.org/drawingml/2006/main"/>
-          <a:p xmlns:a="http://schemas.openxmlformats.org/drawingml/2006/main">
+          <a:bodyPr/>
+          <a:lstStyle/>
+          <a:p>
             <a:fld id="{EDB99004-FBBF-4BCC-9BC3-88F554ADE514}" type="datetimeFigureOut">
-              <a:t>09/10/2026</a:t>
+              <a:t>15-Oct-26</a:t>
             </a:fld>
             <a:endParaRPr/>
           </a:p>
@@ -1532,14 +1331,14 @@
       <p:sp>
         <p:nvSpPr>
           <p:cNvPr id="5" name="Footer Placeholder 4">
-            <a:extLst xmlns:a="http://schemas.openxmlformats.org/drawingml/2006/main">
+            <a:extLst>
               <a:ext uri="{FF2B5EF4-FFF2-40B4-BE49-F238E27FC236}">
                 <a16:creationId xmlns:a16="http://schemas.microsoft.com/office/drawing/2014/main" id="{F9E748BA-3A52-EFDE-3B83-2A4BC456874D}"/>
               </a:ext>
             </a:extLst>
           </p:cNvPr>
           <p:cNvSpPr>
-            <a:spLocks xmlns:a="http://schemas.openxmlformats.org/drawingml/2006/main" noGrp="1"/>
+            <a:spLocks noGrp="1"/>
           </p:cNvSpPr>
           <p:nvPr>
             <p:ph type="ftr" idx="11"/>
@@ -1547,9 +1346,9 @@
         </p:nvSpPr>
         <p:spPr/>
         <p:txBody>
-          <a:bodyPr xmlns:a="http://schemas.openxmlformats.org/drawingml/2006/main"/>
-          <a:lstStyle xmlns:a="http://schemas.openxmlformats.org/drawingml/2006/main"/>
-          <a:p xmlns:a="http://schemas.openxmlformats.org/drawingml/2006/main">
+          <a:bodyPr/>
+          <a:lstStyle/>
+          <a:p>
             <a:endParaRPr/>
           </a:p>
         </p:txBody>
@@ -1557,14 +1356,14 @@
       <p:sp>
         <p:nvSpPr>
           <p:cNvPr id="6" name="Slide Number Placeholder 5">
-            <a:extLst xmlns:a="http://schemas.openxmlformats.org/drawingml/2006/main">
+            <a:extLst>
               <a:ext uri="{FF2B5EF4-FFF2-40B4-BE49-F238E27FC236}">
                 <a16:creationId xmlns:a16="http://schemas.microsoft.com/office/drawing/2014/main" id="{11D26422-6EB7-6DF1-340C-059F62421668}"/>
               </a:ext>
             </a:extLst>
           </p:cNvPr>
           <p:cNvSpPr>
-            <a:spLocks xmlns:a="http://schemas.openxmlformats.org/drawingml/2006/main" noGrp="1"/>
+            <a:spLocks noGrp="1"/>
           </p:cNvSpPr>
           <p:nvPr>
             <p:ph type="sldNum" idx="12"/>
@@ -1572,9 +1371,9 @@
         </p:nvSpPr>
         <p:spPr/>
         <p:txBody>
-          <a:bodyPr xmlns:a="http://schemas.openxmlformats.org/drawingml/2006/main"/>
-          <a:lstStyle xmlns:a="http://schemas.openxmlformats.org/drawingml/2006/main"/>
-          <a:p xmlns:a="http://schemas.openxmlformats.org/drawingml/2006/main">
+          <a:bodyPr/>
+          <a:lstStyle/>
+          <a:p>
             <a:fld id="{3721C89F-AE7A-4C3B-889F-FA429D0A7F97}" type="slidenum">
               <a:t>‹#›</a:t>
             </a:fld>
@@ -1584,11 +1383,14 @@
       </p:sp>
     </p:spTree>
   </p:cSld>
+  <p:clrMapOvr>
+    <a:masterClrMapping/>
+  </p:clrMapOvr>
 </p:sldLayout>
 </file>
 
 <file path=ppt/slideLayouts/slideLayout2.xml><?xml version="1.0" encoding="utf-8"?>
-<p:sldLayout xmlns:p="http://schemas.openxmlformats.org/presentationml/2006/main" type="obj" preserve="1">
+<p:sldLayout xmlns:a="http://schemas.openxmlformats.org/drawingml/2006/main" xmlns:r="http://schemas.openxmlformats.org/officeDocument/2006/relationships" xmlns:p="http://schemas.openxmlformats.org/presentationml/2006/main" type="obj" preserve="1">
   <p:cSld name="Title and Content">
     <p:spTree>
       <p:nvGrpSpPr>
@@ -1597,47 +1399,51 @@
         <p:nvPr/>
       </p:nvGrpSpPr>
       <p:grpSpPr>
-        <a:xfrm xmlns:a="http://schemas.openxmlformats.org/drawingml/2006/main"/>
+        <a:xfrm>
+          <a:off x="0" y="0"/>
+          <a:ext cx="0" cy="0"/>
+          <a:chOff x="0" y="0"/>
+          <a:chExt cx="0" cy="0"/>
+        </a:xfrm>
       </p:grpSpPr>
       <p:sp>
         <p:nvSpPr>
           <p:cNvPr id="2" name="Title 1">
-            <a:extLst xmlns:a="http://schemas.openxmlformats.org/drawingml/2006/main">
+            <a:extLst>
               <a:ext uri="{FF2B5EF4-FFF2-40B4-BE49-F238E27FC236}">
                 <a16:creationId xmlns:a16="http://schemas.microsoft.com/office/drawing/2014/main" id="{49D58505-B11D-1416-6D6F-42532E02D9F3}"/>
               </a:ext>
             </a:extLst>
           </p:cNvPr>
           <p:cNvSpPr>
-            <a:spLocks xmlns:a="http://schemas.openxmlformats.org/drawingml/2006/main" noGrp="1"/>
-          </p:cNvSpPr>
-          <p:nvPr>
-            <p:ph type="title" idx="0"/>
+            <a:spLocks noGrp="1"/>
+          </p:cNvSpPr>
+          <p:nvPr>
+            <p:ph type="title"/>
           </p:nvPr>
         </p:nvSpPr>
         <p:spPr/>
         <p:txBody>
-          <a:bodyPr xmlns:a="http://schemas.openxmlformats.org/drawingml/2006/main"/>
-          <a:lstStyle xmlns:a="http://schemas.openxmlformats.org/drawingml/2006/main"/>
-          <a:p xmlns:a="http://schemas.openxmlformats.org/drawingml/2006/main">
+          <a:bodyPr/>
+          <a:lstStyle/>
+          <a:p>
             <a:r>
               <a:t>Click to edit Master title style</a:t>
             </a:r>
-            <a:endParaRPr/>
           </a:p>
         </p:txBody>
       </p:sp>
       <p:sp>
         <p:nvSpPr>
           <p:cNvPr id="3" name="Content Placeholder 2">
-            <a:extLst xmlns:a="http://schemas.openxmlformats.org/drawingml/2006/main">
+            <a:extLst>
               <a:ext uri="{FF2B5EF4-FFF2-40B4-BE49-F238E27FC236}">
                 <a16:creationId xmlns:a16="http://schemas.microsoft.com/office/drawing/2014/main" id="{C8E57602-7C8E-F65F-3DCB-CA7DA659D752}"/>
               </a:ext>
             </a:extLst>
           </p:cNvPr>
           <p:cNvSpPr>
-            <a:spLocks xmlns:a="http://schemas.openxmlformats.org/drawingml/2006/main" noGrp="1"/>
+            <a:spLocks noGrp="1"/>
           </p:cNvSpPr>
           <p:nvPr>
             <p:ph idx="1"/>
@@ -1645,9 +1451,9 @@
         </p:nvSpPr>
         <p:spPr/>
         <p:txBody>
-          <a:bodyPr xmlns:a="http://schemas.openxmlformats.org/drawingml/2006/main"/>
-          <a:lstStyle xmlns:a="http://schemas.openxmlformats.org/drawingml/2006/main"/>
-          <a:p xmlns:a="http://schemas.openxmlformats.org/drawingml/2006/main">
+          <a:bodyPr/>
+          <a:lstStyle/>
+          <a:p>
             <a:pPr lvl="0">
               <a:buNone/>
             </a:pPr>
@@ -1655,7 +1461,7 @@
               <a:t>Click to edit Master text styles</a:t>
             </a:r>
           </a:p>
-          <a:p xmlns:a="http://schemas.openxmlformats.org/drawingml/2006/main">
+          <a:p>
             <a:pPr lvl="1">
               <a:buNone/>
             </a:pPr>
@@ -1663,7 +1469,7 @@
               <a:t>Second level</a:t>
             </a:r>
           </a:p>
-          <a:p xmlns:a="http://schemas.openxmlformats.org/drawingml/2006/main">
+          <a:p>
             <a:pPr lvl="2">
               <a:buNone/>
             </a:pPr>
@@ -1671,7 +1477,7 @@
               <a:t>Third level</a:t>
             </a:r>
           </a:p>
-          <a:p xmlns:a="http://schemas.openxmlformats.org/drawingml/2006/main">
+          <a:p>
             <a:pPr lvl="3">
               <a:buNone/>
             </a:pPr>
@@ -1679,28 +1485,27 @@
               <a:t>Fourth level</a:t>
             </a:r>
           </a:p>
-          <a:p xmlns:a="http://schemas.openxmlformats.org/drawingml/2006/main">
+          <a:p>
             <a:pPr lvl="4">
               <a:buNone/>
             </a:pPr>
             <a:r>
               <a:t>Fifth level</a:t>
             </a:r>
-            <a:endParaRPr/>
           </a:p>
         </p:txBody>
       </p:sp>
       <p:sp>
         <p:nvSpPr>
           <p:cNvPr id="4" name="Date Placeholder 3">
-            <a:extLst xmlns:a="http://schemas.openxmlformats.org/drawingml/2006/main">
+            <a:extLst>
               <a:ext uri="{FF2B5EF4-FFF2-40B4-BE49-F238E27FC236}">
                 <a16:creationId xmlns:a16="http://schemas.microsoft.com/office/drawing/2014/main" id="{B8E13BDD-A3BD-F0FA-C970-7CE1AFD2115B}"/>
               </a:ext>
             </a:extLst>
           </p:cNvPr>
           <p:cNvSpPr>
-            <a:spLocks xmlns:a="http://schemas.openxmlformats.org/drawingml/2006/main" noGrp="1"/>
+            <a:spLocks noGrp="1"/>
           </p:cNvSpPr>
           <p:nvPr>
             <p:ph type="dt" idx="10"/>
@@ -1708,11 +1513,11 @@
         </p:nvSpPr>
         <p:spPr/>
         <p:txBody>
-          <a:bodyPr xmlns:a="http://schemas.openxmlformats.org/drawingml/2006/main"/>
-          <a:lstStyle xmlns:a="http://schemas.openxmlformats.org/drawingml/2006/main"/>
-          <a:p xmlns:a="http://schemas.openxmlformats.org/drawingml/2006/main">
+          <a:bodyPr/>
+          <a:lstStyle/>
+          <a:p>
             <a:fld id="{EDB99004-FBBF-4BCC-9BC3-88F554ADE514}" type="datetimeFigureOut">
-              <a:t>09/10/2026</a:t>
+              <a:t>15-Oct-26</a:t>
             </a:fld>
             <a:endParaRPr/>
           </a:p>
@@ -1721,14 +1526,14 @@
       <p:sp>
         <p:nvSpPr>
           <p:cNvPr id="5" name="Footer Placeholder 4">
-            <a:extLst xmlns:a="http://schemas.openxmlformats.org/drawingml/2006/main">
+            <a:extLst>
               <a:ext uri="{FF2B5EF4-FFF2-40B4-BE49-F238E27FC236}">
                 <a16:creationId xmlns:a16="http://schemas.microsoft.com/office/drawing/2014/main" id="{839A8432-C7E6-45F5-17B8-825C34C7B69E}"/>
               </a:ext>
             </a:extLst>
           </p:cNvPr>
           <p:cNvSpPr>
-            <a:spLocks xmlns:a="http://schemas.openxmlformats.org/drawingml/2006/main" noGrp="1"/>
+            <a:spLocks noGrp="1"/>
           </p:cNvSpPr>
           <p:nvPr>
             <p:ph type="ftr" idx="11"/>
@@ -1736,9 +1541,9 @@
         </p:nvSpPr>
         <p:spPr/>
         <p:txBody>
-          <a:bodyPr xmlns:a="http://schemas.openxmlformats.org/drawingml/2006/main"/>
-          <a:lstStyle xmlns:a="http://schemas.openxmlformats.org/drawingml/2006/main"/>
-          <a:p xmlns:a="http://schemas.openxmlformats.org/drawingml/2006/main">
+          <a:bodyPr/>
+          <a:lstStyle/>
+          <a:p>
             <a:endParaRPr/>
           </a:p>
         </p:txBody>
@@ -1746,14 +1551,14 @@
       <p:sp>
         <p:nvSpPr>
           <p:cNvPr id="6" name="Slide Number Placeholder 5">
-            <a:extLst xmlns:a="http://schemas.openxmlformats.org/drawingml/2006/main">
+            <a:extLst>
               <a:ext uri="{FF2B5EF4-FFF2-40B4-BE49-F238E27FC236}">
                 <a16:creationId xmlns:a16="http://schemas.microsoft.com/office/drawing/2014/main" id="{432DBF15-3DC3-0F8C-B5EC-8D7DEA727DBD}"/>
               </a:ext>
             </a:extLst>
           </p:cNvPr>
           <p:cNvSpPr>
-            <a:spLocks xmlns:a="http://schemas.openxmlformats.org/drawingml/2006/main" noGrp="1"/>
+            <a:spLocks noGrp="1"/>
           </p:cNvSpPr>
           <p:nvPr>
             <p:ph type="sldNum" idx="12"/>
@@ -1761,9 +1566,9 @@
         </p:nvSpPr>
         <p:spPr/>
         <p:txBody>
-          <a:bodyPr xmlns:a="http://schemas.openxmlformats.org/drawingml/2006/main"/>
-          <a:lstStyle xmlns:a="http://schemas.openxmlformats.org/drawingml/2006/main"/>
-          <a:p xmlns:a="http://schemas.openxmlformats.org/drawingml/2006/main">
+          <a:bodyPr/>
+          <a:lstStyle/>
+          <a:p>
             <a:fld id="{3721C89F-AE7A-4C3B-889F-FA429D0A7F97}" type="slidenum">
               <a:t>‹#›</a:t>
             </a:fld>
@@ -1773,11 +1578,14 @@
       </p:sp>
     </p:spTree>
   </p:cSld>
+  <p:clrMapOvr>
+    <a:masterClrMapping/>
+  </p:clrMapOvr>
 </p:sldLayout>
 </file>
 
 <file path=ppt/slideLayouts/slideLayout3.xml><?xml version="1.0" encoding="utf-8"?>
-<p:sldLayout xmlns:p="http://schemas.openxmlformats.org/presentationml/2006/main" type="secHead" preserve="1">
+<p:sldLayout xmlns:a="http://schemas.openxmlformats.org/drawingml/2006/main" xmlns:r="http://schemas.openxmlformats.org/officeDocument/2006/relationships" xmlns:p="http://schemas.openxmlformats.org/presentationml/2006/main" type="secHead" preserve="1">
   <p:cSld name="Section Header">
     <p:spTree>
       <p:nvGrpSpPr>
@@ -1786,71 +1594,75 @@
         <p:nvPr/>
       </p:nvGrpSpPr>
       <p:grpSpPr>
-        <a:xfrm xmlns:a="http://schemas.openxmlformats.org/drawingml/2006/main"/>
+        <a:xfrm>
+          <a:off x="0" y="0"/>
+          <a:ext cx="0" cy="0"/>
+          <a:chOff x="0" y="0"/>
+          <a:chExt cx="0" cy="0"/>
+        </a:xfrm>
       </p:grpSpPr>
       <p:sp>
         <p:nvSpPr>
           <p:cNvPr id="2" name="Title 1">
-            <a:extLst xmlns:a="http://schemas.openxmlformats.org/drawingml/2006/main">
+            <a:extLst>
               <a:ext uri="{FF2B5EF4-FFF2-40B4-BE49-F238E27FC236}">
                 <a16:creationId xmlns:a16="http://schemas.microsoft.com/office/drawing/2014/main" id="{85A48EAB-F365-E770-1C52-96B2FFEDBA19}"/>
               </a:ext>
             </a:extLst>
           </p:cNvPr>
           <p:cNvSpPr>
-            <a:spLocks xmlns:a="http://schemas.openxmlformats.org/drawingml/2006/main" noGrp="1"/>
-          </p:cNvSpPr>
-          <p:nvPr>
-            <p:ph type="title" idx="0"/>
+            <a:spLocks noGrp="1"/>
+          </p:cNvSpPr>
+          <p:nvPr>
+            <p:ph type="title"/>
           </p:nvPr>
         </p:nvSpPr>
         <p:spPr>
-          <a:xfrm xmlns:a="http://schemas.openxmlformats.org/drawingml/2006/main">
+          <a:xfrm>
             <a:off x="831850" y="1709738"/>
             <a:ext cx="10515600" cy="2852737"/>
           </a:xfrm>
         </p:spPr>
         <p:txBody>
-          <a:bodyPr xmlns:a="http://schemas.openxmlformats.org/drawingml/2006/main" anchor="b"/>
-          <a:lstStyle xmlns:a="http://schemas.openxmlformats.org/drawingml/2006/main">
+          <a:bodyPr anchor="b"/>
+          <a:lstStyle>
             <a:lvl1pPr>
               <a:buNone/>
               <a:defRPr sz="6000"/>
             </a:lvl1pPr>
           </a:lstStyle>
-          <a:p xmlns:a="http://schemas.openxmlformats.org/drawingml/2006/main">
+          <a:p>
             <a:r>
               <a:t>Click to edit Master title style</a:t>
             </a:r>
-            <a:endParaRPr/>
           </a:p>
         </p:txBody>
       </p:sp>
       <p:sp>
         <p:nvSpPr>
           <p:cNvPr id="3" name="Text Placeholder 2">
-            <a:extLst xmlns:a="http://schemas.openxmlformats.org/drawingml/2006/main">
+            <a:extLst>
               <a:ext uri="{FF2B5EF4-FFF2-40B4-BE49-F238E27FC236}">
                 <a16:creationId xmlns:a16="http://schemas.microsoft.com/office/drawing/2014/main" id="{F95EF05D-0555-A1C8-D595-C855A03CE56D}"/>
               </a:ext>
             </a:extLst>
           </p:cNvPr>
           <p:cNvSpPr>
-            <a:spLocks xmlns:a="http://schemas.openxmlformats.org/drawingml/2006/main" noGrp="1"/>
+            <a:spLocks noGrp="1"/>
           </p:cNvSpPr>
           <p:nvPr>
             <p:ph type="body" idx="1"/>
           </p:nvPr>
         </p:nvSpPr>
         <p:spPr>
-          <a:xfrm xmlns:a="http://schemas.openxmlformats.org/drawingml/2006/main">
+          <a:xfrm>
             <a:off x="831850" y="4589463"/>
             <a:ext cx="10515600" cy="1500187"/>
           </a:xfrm>
         </p:spPr>
         <p:txBody>
-          <a:bodyPr xmlns:a="http://schemas.openxmlformats.org/drawingml/2006/main"/>
-          <a:lstStyle xmlns:a="http://schemas.openxmlformats.org/drawingml/2006/main">
+          <a:bodyPr/>
+          <a:lstStyle>
             <a:lvl1pPr marL="0" indent="0">
               <a:buNone/>
               <a:defRPr sz="2400">
@@ -1942,7 +1754,7 @@
               </a:defRPr>
             </a:lvl9pPr>
           </a:lstStyle>
-          <a:p xmlns:a="http://schemas.openxmlformats.org/drawingml/2006/main">
+          <a:p>
             <a:pPr lvl="0">
               <a:buNone/>
             </a:pPr>
@@ -1955,14 +1767,14 @@
       <p:sp>
         <p:nvSpPr>
           <p:cNvPr id="4" name="Date Placeholder 3">
-            <a:extLst xmlns:a="http://schemas.openxmlformats.org/drawingml/2006/main">
+            <a:extLst>
               <a:ext uri="{FF2B5EF4-FFF2-40B4-BE49-F238E27FC236}">
                 <a16:creationId xmlns:a16="http://schemas.microsoft.com/office/drawing/2014/main" id="{2EC5151F-7E9E-AD94-792E-FA61FDA2DA6E}"/>
               </a:ext>
             </a:extLst>
           </p:cNvPr>
           <p:cNvSpPr>
-            <a:spLocks xmlns:a="http://schemas.openxmlformats.org/drawingml/2006/main" noGrp="1"/>
+            <a:spLocks noGrp="1"/>
           </p:cNvSpPr>
           <p:nvPr>
             <p:ph type="dt" idx="10"/>
@@ -1970,11 +1782,11 @@
         </p:nvSpPr>
         <p:spPr/>
         <p:txBody>
-          <a:bodyPr xmlns:a="http://schemas.openxmlformats.org/drawingml/2006/main"/>
-          <a:lstStyle xmlns:a="http://schemas.openxmlformats.org/drawingml/2006/main"/>
-          <a:p xmlns:a="http://schemas.openxmlformats.org/drawingml/2006/main">
+          <a:bodyPr/>
+          <a:lstStyle/>
+          <a:p>
             <a:fld id="{EDB99004-FBBF-4BCC-9BC3-88F554ADE514}" type="datetimeFigureOut">
-              <a:t>09/10/2026</a:t>
+              <a:t>15-Oct-26</a:t>
             </a:fld>
             <a:endParaRPr/>
           </a:p>
@@ -1983,14 +1795,14 @@
       <p:sp>
         <p:nvSpPr>
           <p:cNvPr id="5" name="Footer Placeholder 4">
-            <a:extLst xmlns:a="http://schemas.openxmlformats.org/drawingml/2006/main">
+            <a:extLst>
               <a:ext uri="{FF2B5EF4-FFF2-40B4-BE49-F238E27FC236}">
                 <a16:creationId xmlns:a16="http://schemas.microsoft.com/office/drawing/2014/main" id="{55AE9C9E-7194-E1C7-7588-B038C3405E62}"/>
               </a:ext>
             </a:extLst>
           </p:cNvPr>
           <p:cNvSpPr>
-            <a:spLocks xmlns:a="http://schemas.openxmlformats.org/drawingml/2006/main" noGrp="1"/>
+            <a:spLocks noGrp="1"/>
           </p:cNvSpPr>
           <p:nvPr>
             <p:ph type="ftr" idx="11"/>
@@ -1998,9 +1810,9 @@
         </p:nvSpPr>
         <p:spPr/>
         <p:txBody>
-          <a:bodyPr xmlns:a="http://schemas.openxmlformats.org/drawingml/2006/main"/>
-          <a:lstStyle xmlns:a="http://schemas.openxmlformats.org/drawingml/2006/main"/>
-          <a:p xmlns:a="http://schemas.openxmlformats.org/drawingml/2006/main">
+          <a:bodyPr/>
+          <a:lstStyle/>
+          <a:p>
             <a:endParaRPr/>
           </a:p>
         </p:txBody>
@@ -2008,14 +1820,14 @@
       <p:sp>
         <p:nvSpPr>
           <p:cNvPr id="6" name="Slide Number Placeholder 5">
-            <a:extLst xmlns:a="http://schemas.openxmlformats.org/drawingml/2006/main">
+            <a:extLst>
               <a:ext uri="{FF2B5EF4-FFF2-40B4-BE49-F238E27FC236}">
                 <a16:creationId xmlns:a16="http://schemas.microsoft.com/office/drawing/2014/main" id="{E468C605-454F-8B7B-3D33-D05911EDD86A}"/>
               </a:ext>
             </a:extLst>
           </p:cNvPr>
           <p:cNvSpPr>
-            <a:spLocks xmlns:a="http://schemas.openxmlformats.org/drawingml/2006/main" noGrp="1"/>
+            <a:spLocks noGrp="1"/>
           </p:cNvSpPr>
           <p:nvPr>
             <p:ph type="sldNum" idx="12"/>
@@ -2023,9 +1835,9 @@
         </p:nvSpPr>
         <p:spPr/>
         <p:txBody>
-          <a:bodyPr xmlns:a="http://schemas.openxmlformats.org/drawingml/2006/main"/>
-          <a:lstStyle xmlns:a="http://schemas.openxmlformats.org/drawingml/2006/main"/>
-          <a:p xmlns:a="http://schemas.openxmlformats.org/drawingml/2006/main">
+          <a:bodyPr/>
+          <a:lstStyle/>
+          <a:p>
             <a:fld id="{3721C89F-AE7A-4C3B-889F-FA429D0A7F97}" type="slidenum">
               <a:t>‹#›</a:t>
             </a:fld>
@@ -2035,11 +1847,14 @@
       </p:sp>
     </p:spTree>
   </p:cSld>
+  <p:clrMapOvr>
+    <a:masterClrMapping/>
+  </p:clrMapOvr>
 </p:sldLayout>
 </file>
 
 <file path=ppt/slideLayouts/slideLayout4.xml><?xml version="1.0" encoding="utf-8"?>
-<p:sldLayout xmlns:p="http://schemas.openxmlformats.org/presentationml/2006/main" type="twoObj" preserve="1">
+<p:sldLayout xmlns:a="http://schemas.openxmlformats.org/drawingml/2006/main" xmlns:r="http://schemas.openxmlformats.org/officeDocument/2006/relationships" xmlns:p="http://schemas.openxmlformats.org/presentationml/2006/main" type="twoObj" preserve="1">
   <p:cSld name="Two Content">
     <p:spTree>
       <p:nvGrpSpPr>
@@ -2048,62 +1863,66 @@
         <p:nvPr/>
       </p:nvGrpSpPr>
       <p:grpSpPr>
-        <a:xfrm xmlns:a="http://schemas.openxmlformats.org/drawingml/2006/main"/>
+        <a:xfrm>
+          <a:off x="0" y="0"/>
+          <a:ext cx="0" cy="0"/>
+          <a:chOff x="0" y="0"/>
+          <a:chExt cx="0" cy="0"/>
+        </a:xfrm>
       </p:grpSpPr>
       <p:sp>
         <p:nvSpPr>
           <p:cNvPr id="2" name="Title 1">
-            <a:extLst xmlns:a="http://schemas.openxmlformats.org/drawingml/2006/main">
+            <a:extLst>
               <a:ext uri="{FF2B5EF4-FFF2-40B4-BE49-F238E27FC236}">
                 <a16:creationId xmlns:a16="http://schemas.microsoft.com/office/drawing/2014/main" id="{7A305F7B-A0AC-1293-82D4-9C86467F10C8}"/>
               </a:ext>
             </a:extLst>
           </p:cNvPr>
           <p:cNvSpPr>
-            <a:spLocks xmlns:a="http://schemas.openxmlformats.org/drawingml/2006/main" noGrp="1"/>
-          </p:cNvSpPr>
-          <p:nvPr>
-            <p:ph type="title" idx="0"/>
+            <a:spLocks noGrp="1"/>
+          </p:cNvSpPr>
+          <p:nvPr>
+            <p:ph type="title"/>
           </p:nvPr>
         </p:nvSpPr>
         <p:spPr/>
         <p:txBody>
-          <a:bodyPr xmlns:a="http://schemas.openxmlformats.org/drawingml/2006/main"/>
-          <a:lstStyle xmlns:a="http://schemas.openxmlformats.org/drawingml/2006/main"/>
-          <a:p xmlns:a="http://schemas.openxmlformats.org/drawingml/2006/main">
+          <a:bodyPr/>
+          <a:lstStyle/>
+          <a:p>
             <a:r>
               <a:t>Click to edit Master title style</a:t>
             </a:r>
-            <a:endParaRPr/>
           </a:p>
         </p:txBody>
       </p:sp>
       <p:sp>
         <p:nvSpPr>
           <p:cNvPr id="3" name="Content Placeholder 2">
-            <a:extLst xmlns:a="http://schemas.openxmlformats.org/drawingml/2006/main">
+            <a:extLst>
               <a:ext uri="{FF2B5EF4-FFF2-40B4-BE49-F238E27FC236}">
                 <a16:creationId xmlns:a16="http://schemas.microsoft.com/office/drawing/2014/main" id="{BE3EC535-A3DE-99E7-ABC8-9CC4CE6E3DCE}"/>
               </a:ext>
             </a:extLst>
           </p:cNvPr>
           <p:cNvSpPr>
-            <a:spLocks xmlns:a="http://schemas.openxmlformats.org/drawingml/2006/main" noGrp="1"/>
+            <a:spLocks noGrp="1"/>
           </p:cNvSpPr>
           <p:nvPr>
             <p:ph idx="1"/>
           </p:nvPr>
         </p:nvSpPr>
         <p:spPr>
-          <a:xfrm xmlns:a="http://schemas.openxmlformats.org/drawingml/2006/main">
+          <a:xfrm>
             <a:off x="838200" y="1825625"/>
             <a:ext cx="5181600" cy="4351338"/>
           </a:xfrm>
         </p:spPr>
         <p:txBody>
-          <a:bodyPr xmlns:a="http://schemas.openxmlformats.org/drawingml/2006/main"/>
-          <a:lstStyle xmlns:a="http://schemas.openxmlformats.org/drawingml/2006/main"/>
-          <a:p xmlns:a="http://schemas.openxmlformats.org/drawingml/2006/main">
+          <a:bodyPr/>
+          <a:lstStyle/>
+          <a:p>
             <a:pPr lvl="0">
               <a:buNone/>
             </a:pPr>
@@ -2111,7 +1930,7 @@
               <a:t>Click to edit Master text styles</a:t>
             </a:r>
           </a:p>
-          <a:p xmlns:a="http://schemas.openxmlformats.org/drawingml/2006/main">
+          <a:p>
             <a:pPr lvl="1">
               <a:buNone/>
             </a:pPr>
@@ -2119,7 +1938,7 @@
               <a:t>Second level</a:t>
             </a:r>
           </a:p>
-          <a:p xmlns:a="http://schemas.openxmlformats.org/drawingml/2006/main">
+          <a:p>
             <a:pPr lvl="2">
               <a:buNone/>
             </a:pPr>
@@ -2127,7 +1946,7 @@
               <a:t>Third level</a:t>
             </a:r>
           </a:p>
-          <a:p xmlns:a="http://schemas.openxmlformats.org/drawingml/2006/main">
+          <a:p>
             <a:pPr lvl="3">
               <a:buNone/>
             </a:pPr>
@@ -2135,43 +1954,42 @@
               <a:t>Fourth level</a:t>
             </a:r>
           </a:p>
-          <a:p xmlns:a="http://schemas.openxmlformats.org/drawingml/2006/main">
+          <a:p>
             <a:pPr lvl="4">
               <a:buNone/>
             </a:pPr>
             <a:r>
               <a:t>Fifth level</a:t>
             </a:r>
-            <a:endParaRPr/>
           </a:p>
         </p:txBody>
       </p:sp>
       <p:sp>
         <p:nvSpPr>
           <p:cNvPr id="4" name="Content Placeholder 3">
-            <a:extLst xmlns:a="http://schemas.openxmlformats.org/drawingml/2006/main">
+            <a:extLst>
               <a:ext uri="{FF2B5EF4-FFF2-40B4-BE49-F238E27FC236}">
                 <a16:creationId xmlns:a16="http://schemas.microsoft.com/office/drawing/2014/main" id="{D2EDD5AB-35E0-87E1-275F-04606C697E97}"/>
               </a:ext>
             </a:extLst>
           </p:cNvPr>
           <p:cNvSpPr>
-            <a:spLocks xmlns:a="http://schemas.openxmlformats.org/drawingml/2006/main" noGrp="1"/>
+            <a:spLocks noGrp="1"/>
           </p:cNvSpPr>
           <p:nvPr>
             <p:ph idx="2"/>
           </p:nvPr>
         </p:nvSpPr>
         <p:spPr>
-          <a:xfrm xmlns:a="http://schemas.openxmlformats.org/drawingml/2006/main">
+          <a:xfrm>
             <a:off x="6172200" y="1825625"/>
             <a:ext cx="5181600" cy="4351338"/>
           </a:xfrm>
         </p:spPr>
         <p:txBody>
-          <a:bodyPr xmlns:a="http://schemas.openxmlformats.org/drawingml/2006/main"/>
-          <a:lstStyle xmlns:a="http://schemas.openxmlformats.org/drawingml/2006/main"/>
-          <a:p xmlns:a="http://schemas.openxmlformats.org/drawingml/2006/main">
+          <a:bodyPr/>
+          <a:lstStyle/>
+          <a:p>
             <a:pPr lvl="0">
               <a:buNone/>
             </a:pPr>
@@ -2179,7 +1997,7 @@
               <a:t>Click to edit Master text styles</a:t>
             </a:r>
           </a:p>
-          <a:p xmlns:a="http://schemas.openxmlformats.org/drawingml/2006/main">
+          <a:p>
             <a:pPr lvl="1">
               <a:buNone/>
             </a:pPr>
@@ -2187,7 +2005,7 @@
               <a:t>Second level</a:t>
             </a:r>
           </a:p>
-          <a:p xmlns:a="http://schemas.openxmlformats.org/drawingml/2006/main">
+          <a:p>
             <a:pPr lvl="2">
               <a:buNone/>
             </a:pPr>
@@ -2195,7 +2013,7 @@
               <a:t>Third level</a:t>
             </a:r>
           </a:p>
-          <a:p xmlns:a="http://schemas.openxmlformats.org/drawingml/2006/main">
+          <a:p>
             <a:pPr lvl="3">
               <a:buNone/>
             </a:pPr>
@@ -2203,28 +2021,27 @@
               <a:t>Fourth level</a:t>
             </a:r>
           </a:p>
-          <a:p xmlns:a="http://schemas.openxmlformats.org/drawingml/2006/main">
+          <a:p>
             <a:pPr lvl="4">
               <a:buNone/>
             </a:pPr>
             <a:r>
               <a:t>Fifth level</a:t>
             </a:r>
-            <a:endParaRPr/>
           </a:p>
         </p:txBody>
       </p:sp>
       <p:sp>
         <p:nvSpPr>
           <p:cNvPr id="5" name="Date Placeholder 4">
-            <a:extLst xmlns:a="http://schemas.openxmlformats.org/drawingml/2006/main">
+            <a:extLst>
               <a:ext uri="{FF2B5EF4-FFF2-40B4-BE49-F238E27FC236}">
                 <a16:creationId xmlns:a16="http://schemas.microsoft.com/office/drawing/2014/main" id="{EB510989-7939-77EB-0752-100DC7AFE1E7}"/>
               </a:ext>
             </a:extLst>
           </p:cNvPr>
           <p:cNvSpPr>
-            <a:spLocks xmlns:a="http://schemas.openxmlformats.org/drawingml/2006/main" noGrp="1"/>
+            <a:spLocks noGrp="1"/>
           </p:cNvSpPr>
           <p:nvPr>
             <p:ph type="dt" idx="10"/>
@@ -2232,11 +2049,11 @@
         </p:nvSpPr>
         <p:spPr/>
         <p:txBody>
-          <a:bodyPr xmlns:a="http://schemas.openxmlformats.org/drawingml/2006/main"/>
-          <a:lstStyle xmlns:a="http://schemas.openxmlformats.org/drawingml/2006/main"/>
-          <a:p xmlns:a="http://schemas.openxmlformats.org/drawingml/2006/main">
+          <a:bodyPr/>
+          <a:lstStyle/>
+          <a:p>
             <a:fld id="{EDB99004-FBBF-4BCC-9BC3-88F554ADE514}" type="datetimeFigureOut">
-              <a:t>09/10/2026</a:t>
+              <a:t>15-Oct-26</a:t>
             </a:fld>
             <a:endParaRPr/>
           </a:p>
@@ -2245,14 +2062,14 @@
       <p:sp>
         <p:nvSpPr>
           <p:cNvPr id="6" name="Footer Placeholder 5">
-            <a:extLst xmlns:a="http://schemas.openxmlformats.org/drawingml/2006/main">
+            <a:extLst>
               <a:ext uri="{FF2B5EF4-FFF2-40B4-BE49-F238E27FC236}">
                 <a16:creationId xmlns:a16="http://schemas.microsoft.com/office/drawing/2014/main" id="{E7AA337F-EF84-36B2-1842-7E5CFCFDF360}"/>
               </a:ext>
             </a:extLst>
           </p:cNvPr>
           <p:cNvSpPr>
-            <a:spLocks xmlns:a="http://schemas.openxmlformats.org/drawingml/2006/main" noGrp="1"/>
+            <a:spLocks noGrp="1"/>
           </p:cNvSpPr>
           <p:nvPr>
             <p:ph type="ftr" idx="11"/>
@@ -2260,9 +2077,9 @@
         </p:nvSpPr>
         <p:spPr/>
         <p:txBody>
-          <a:bodyPr xmlns:a="http://schemas.openxmlformats.org/drawingml/2006/main"/>
-          <a:lstStyle xmlns:a="http://schemas.openxmlformats.org/drawingml/2006/main"/>
-          <a:p xmlns:a="http://schemas.openxmlformats.org/drawingml/2006/main">
+          <a:bodyPr/>
+          <a:lstStyle/>
+          <a:p>
             <a:endParaRPr/>
           </a:p>
         </p:txBody>
@@ -2270,14 +2087,14 @@
       <p:sp>
         <p:nvSpPr>
           <p:cNvPr id="7" name="Slide Number Placeholder 6">
-            <a:extLst xmlns:a="http://schemas.openxmlformats.org/drawingml/2006/main">
+            <a:extLst>
               <a:ext uri="{FF2B5EF4-FFF2-40B4-BE49-F238E27FC236}">
                 <a16:creationId xmlns:a16="http://schemas.microsoft.com/office/drawing/2014/main" id="{2F313D7F-1250-5155-CC8F-1D7F74BF58BE}"/>
               </a:ext>
             </a:extLst>
           </p:cNvPr>
           <p:cNvSpPr>
-            <a:spLocks xmlns:a="http://schemas.openxmlformats.org/drawingml/2006/main" noGrp="1"/>
+            <a:spLocks noGrp="1"/>
           </p:cNvSpPr>
           <p:nvPr>
             <p:ph type="sldNum" idx="12"/>
@@ -2285,9 +2102,9 @@
         </p:nvSpPr>
         <p:spPr/>
         <p:txBody>
-          <a:bodyPr xmlns:a="http://schemas.openxmlformats.org/drawingml/2006/main"/>
-          <a:lstStyle xmlns:a="http://schemas.openxmlformats.org/drawingml/2006/main"/>
-          <a:p xmlns:a="http://schemas.openxmlformats.org/drawingml/2006/main">
+          <a:bodyPr/>
+          <a:lstStyle/>
+          <a:p>
             <a:fld id="{3721C89F-AE7A-4C3B-889F-FA429D0A7F97}" type="slidenum">
               <a:t>‹#›</a:t>
             </a:fld>
@@ -2297,11 +2114,14 @@
       </p:sp>
     </p:spTree>
   </p:cSld>
+  <p:clrMapOvr>
+    <a:masterClrMapping/>
+  </p:clrMapOvr>
 </p:sldLayout>
 </file>
 
 <file path=ppt/slideLayouts/slideLayout5.xml><?xml version="1.0" encoding="utf-8"?>
-<p:sldLayout xmlns:p="http://schemas.openxmlformats.org/presentationml/2006/main" type="twoTxTwoObj" preserve="1">
+<p:sldLayout xmlns:a="http://schemas.openxmlformats.org/drawingml/2006/main" xmlns:r="http://schemas.openxmlformats.org/officeDocument/2006/relationships" xmlns:p="http://schemas.openxmlformats.org/presentationml/2006/main" type="twoTxTwoObj" preserve="1">
   <p:cSld name="Comparison">
     <p:spTree>
       <p:nvGrpSpPr>
@@ -2310,66 +2130,70 @@
         <p:nvPr/>
       </p:nvGrpSpPr>
       <p:grpSpPr>
-        <a:xfrm xmlns:a="http://schemas.openxmlformats.org/drawingml/2006/main"/>
+        <a:xfrm>
+          <a:off x="0" y="0"/>
+          <a:ext cx="0" cy="0"/>
+          <a:chOff x="0" y="0"/>
+          <a:chExt cx="0" cy="0"/>
+        </a:xfrm>
       </p:grpSpPr>
       <p:sp>
         <p:nvSpPr>
           <p:cNvPr id="2" name="Title 1">
-            <a:extLst xmlns:a="http://schemas.openxmlformats.org/drawingml/2006/main">
+            <a:extLst>
               <a:ext uri="{FF2B5EF4-FFF2-40B4-BE49-F238E27FC236}">
                 <a16:creationId xmlns:a16="http://schemas.microsoft.com/office/drawing/2014/main" id="{50BF6333-8C0F-A01D-5F86-7F6CB2076CCD}"/>
               </a:ext>
             </a:extLst>
           </p:cNvPr>
           <p:cNvSpPr>
-            <a:spLocks xmlns:a="http://schemas.openxmlformats.org/drawingml/2006/main" noGrp="1"/>
-          </p:cNvSpPr>
-          <p:nvPr>
-            <p:ph type="title" idx="0"/>
+            <a:spLocks noGrp="1"/>
+          </p:cNvSpPr>
+          <p:nvPr>
+            <p:ph type="title"/>
           </p:nvPr>
         </p:nvSpPr>
         <p:spPr>
-          <a:xfrm xmlns:a="http://schemas.openxmlformats.org/drawingml/2006/main">
+          <a:xfrm>
             <a:off x="839788" y="365125"/>
             <a:ext cx="10515600" cy="1325563"/>
           </a:xfrm>
         </p:spPr>
         <p:txBody>
-          <a:bodyPr xmlns:a="http://schemas.openxmlformats.org/drawingml/2006/main"/>
-          <a:lstStyle xmlns:a="http://schemas.openxmlformats.org/drawingml/2006/main"/>
-          <a:p xmlns:a="http://schemas.openxmlformats.org/drawingml/2006/main">
+          <a:bodyPr/>
+          <a:lstStyle/>
+          <a:p>
             <a:r>
               <a:t>Click to edit Master title style</a:t>
             </a:r>
-            <a:endParaRPr/>
           </a:p>
         </p:txBody>
       </p:sp>
       <p:sp>
         <p:nvSpPr>
           <p:cNvPr id="3" name="Text Placeholder 2">
-            <a:extLst xmlns:a="http://schemas.openxmlformats.org/drawingml/2006/main">
+            <a:extLst>
               <a:ext uri="{FF2B5EF4-FFF2-40B4-BE49-F238E27FC236}">
                 <a16:creationId xmlns:a16="http://schemas.microsoft.com/office/drawing/2014/main" id="{38B0F6EB-5092-BB38-AE7A-D8A53CBE1282}"/>
               </a:ext>
             </a:extLst>
           </p:cNvPr>
           <p:cNvSpPr>
-            <a:spLocks xmlns:a="http://schemas.openxmlformats.org/drawingml/2006/main" noGrp="1"/>
+            <a:spLocks noGrp="1"/>
           </p:cNvSpPr>
           <p:nvPr>
             <p:ph type="body" idx="1"/>
           </p:nvPr>
         </p:nvSpPr>
         <p:spPr>
-          <a:xfrm xmlns:a="http://schemas.openxmlformats.org/drawingml/2006/main">
+          <a:xfrm>
             <a:off x="839788" y="1681163"/>
             <a:ext cx="5157787" cy="823912"/>
           </a:xfrm>
         </p:spPr>
         <p:txBody>
-          <a:bodyPr xmlns:a="http://schemas.openxmlformats.org/drawingml/2006/main" anchor="b"/>
-          <a:lstStyle xmlns:a="http://schemas.openxmlformats.org/drawingml/2006/main">
+          <a:bodyPr anchor="b"/>
+          <a:lstStyle>
             <a:lvl1pPr marL="0" indent="0">
               <a:buNone/>
               <a:defRPr sz="2400" b="1"/>
@@ -2407,7 +2231,7 @@
               <a:defRPr sz="1600" b="1"/>
             </a:lvl9pPr>
           </a:lstStyle>
-          <a:p xmlns:a="http://schemas.openxmlformats.org/drawingml/2006/main">
+          <a:p>
             <a:pPr lvl="0">
               <a:buNone/>
             </a:pPr>
@@ -2420,29 +2244,29 @@
       <p:sp>
         <p:nvSpPr>
           <p:cNvPr id="4" name="Content Placeholder 3">
-            <a:extLst xmlns:a="http://schemas.openxmlformats.org/drawingml/2006/main">
+            <a:extLst>
               <a:ext uri="{FF2B5EF4-FFF2-40B4-BE49-F238E27FC236}">
                 <a16:creationId xmlns:a16="http://schemas.microsoft.com/office/drawing/2014/main" id="{A62B800C-4EB4-5C42-1D78-6D44443DC87B}"/>
               </a:ext>
             </a:extLst>
           </p:cNvPr>
           <p:cNvSpPr>
-            <a:spLocks xmlns:a="http://schemas.openxmlformats.org/drawingml/2006/main" noGrp="1"/>
+            <a:spLocks noGrp="1"/>
           </p:cNvSpPr>
           <p:nvPr>
             <p:ph idx="2"/>
           </p:nvPr>
         </p:nvSpPr>
         <p:spPr>
-          <a:xfrm xmlns:a="http://schemas.openxmlformats.org/drawingml/2006/main">
+          <a:xfrm>
             <a:off x="839788" y="2505075"/>
             <a:ext cx="5157787" cy="3684588"/>
           </a:xfrm>
         </p:spPr>
         <p:txBody>
-          <a:bodyPr xmlns:a="http://schemas.openxmlformats.org/drawingml/2006/main"/>
-          <a:lstStyle xmlns:a="http://schemas.openxmlformats.org/drawingml/2006/main"/>
-          <a:p xmlns:a="http://schemas.openxmlformats.org/drawingml/2006/main">
+          <a:bodyPr/>
+          <a:lstStyle/>
+          <a:p>
             <a:pPr lvl="0">
               <a:buNone/>
             </a:pPr>
@@ -2450,7 +2274,7 @@
               <a:t>Click to edit Master text styles</a:t>
             </a:r>
           </a:p>
-          <a:p xmlns:a="http://schemas.openxmlformats.org/drawingml/2006/main">
+          <a:p>
             <a:pPr lvl="1">
               <a:buNone/>
             </a:pPr>
@@ -2458,7 +2282,7 @@
               <a:t>Second level</a:t>
             </a:r>
           </a:p>
-          <a:p xmlns:a="http://schemas.openxmlformats.org/drawingml/2006/main">
+          <a:p>
             <a:pPr lvl="2">
               <a:buNone/>
             </a:pPr>
@@ -2466,7 +2290,7 @@
               <a:t>Third level</a:t>
             </a:r>
           </a:p>
-          <a:p xmlns:a="http://schemas.openxmlformats.org/drawingml/2006/main">
+          <a:p>
             <a:pPr lvl="3">
               <a:buNone/>
             </a:pPr>
@@ -2474,42 +2298,41 @@
               <a:t>Fourth level</a:t>
             </a:r>
           </a:p>
-          <a:p xmlns:a="http://schemas.openxmlformats.org/drawingml/2006/main">
+          <a:p>
             <a:pPr lvl="4">
               <a:buNone/>
             </a:pPr>
             <a:r>
               <a:t>Fifth level</a:t>
             </a:r>
-            <a:endParaRPr/>
           </a:p>
         </p:txBody>
       </p:sp>
       <p:sp>
         <p:nvSpPr>
           <p:cNvPr id="5" name="Text Placeholder 4">
-            <a:extLst xmlns:a="http://schemas.openxmlformats.org/drawingml/2006/main">
+            <a:extLst>
               <a:ext uri="{FF2B5EF4-FFF2-40B4-BE49-F238E27FC236}">
                 <a16:creationId xmlns:a16="http://schemas.microsoft.com/office/drawing/2014/main" id="{80E5F6E3-A638-F3AA-A0D8-8243AE1143A5}"/>
               </a:ext>
             </a:extLst>
           </p:cNvPr>
           <p:cNvSpPr>
-            <a:spLocks xmlns:a="http://schemas.openxmlformats.org/drawingml/2006/main" noGrp="1"/>
+            <a:spLocks noGrp="1"/>
           </p:cNvSpPr>
           <p:nvPr>
             <p:ph type="body" idx="3"/>
           </p:nvPr>
         </p:nvSpPr>
         <p:spPr>
-          <a:xfrm xmlns:a="http://schemas.openxmlformats.org/drawingml/2006/main">
+          <a:xfrm>
             <a:off x="6172200" y="1681163"/>
             <a:ext cx="5183188" cy="823912"/>
           </a:xfrm>
         </p:spPr>
         <p:txBody>
-          <a:bodyPr xmlns:a="http://schemas.openxmlformats.org/drawingml/2006/main" anchor="b"/>
-          <a:lstStyle xmlns:a="http://schemas.openxmlformats.org/drawingml/2006/main">
+          <a:bodyPr anchor="b"/>
+          <a:lstStyle>
             <a:lvl1pPr marL="0" indent="0">
               <a:buNone/>
               <a:defRPr sz="2400" b="1"/>
@@ -2547,7 +2370,7 @@
               <a:defRPr sz="1600" b="1"/>
             </a:lvl9pPr>
           </a:lstStyle>
-          <a:p xmlns:a="http://schemas.openxmlformats.org/drawingml/2006/main">
+          <a:p>
             <a:pPr lvl="0">
               <a:buNone/>
             </a:pPr>
@@ -2560,29 +2383,29 @@
       <p:sp>
         <p:nvSpPr>
           <p:cNvPr id="6" name="Content Placeholder 5">
-            <a:extLst xmlns:a="http://schemas.openxmlformats.org/drawingml/2006/main">
+            <a:extLst>
               <a:ext uri="{FF2B5EF4-FFF2-40B4-BE49-F238E27FC236}">
                 <a16:creationId xmlns:a16="http://schemas.microsoft.com/office/drawing/2014/main" id="{32606B9C-947E-6E0E-3FB7-6409CA1AA08B}"/>
               </a:ext>
             </a:extLst>
           </p:cNvPr>
           <p:cNvSpPr>
-            <a:spLocks xmlns:a="http://schemas.openxmlformats.org/drawingml/2006/main" noGrp="1"/>
+            <a:spLocks noGrp="1"/>
           </p:cNvSpPr>
           <p:nvPr>
             <p:ph idx="4"/>
           </p:nvPr>
         </p:nvSpPr>
         <p:spPr>
-          <a:xfrm xmlns:a="http://schemas.openxmlformats.org/drawingml/2006/main">
+          <a:xfrm>
             <a:off x="6172200" y="2505075"/>
             <a:ext cx="5183188" cy="3684588"/>
           </a:xfrm>
         </p:spPr>
         <p:txBody>
-          <a:bodyPr xmlns:a="http://schemas.openxmlformats.org/drawingml/2006/main"/>
-          <a:lstStyle xmlns:a="http://schemas.openxmlformats.org/drawingml/2006/main"/>
-          <a:p xmlns:a="http://schemas.openxmlformats.org/drawingml/2006/main">
+          <a:bodyPr/>
+          <a:lstStyle/>
+          <a:p>
             <a:pPr lvl="0">
               <a:buNone/>
             </a:pPr>
@@ -2590,7 +2413,7 @@
               <a:t>Click to edit Master text styles</a:t>
             </a:r>
           </a:p>
-          <a:p xmlns:a="http://schemas.openxmlformats.org/drawingml/2006/main">
+          <a:p>
             <a:pPr lvl="1">
               <a:buNone/>
             </a:pPr>
@@ -2598,7 +2421,7 @@
               <a:t>Second level</a:t>
             </a:r>
           </a:p>
-          <a:p xmlns:a="http://schemas.openxmlformats.org/drawingml/2006/main">
+          <a:p>
             <a:pPr lvl="2">
               <a:buNone/>
             </a:pPr>
@@ -2606,7 +2429,7 @@
               <a:t>Third level</a:t>
             </a:r>
           </a:p>
-          <a:p xmlns:a="http://schemas.openxmlformats.org/drawingml/2006/main">
+          <a:p>
             <a:pPr lvl="3">
               <a:buNone/>
             </a:pPr>
@@ -2614,28 +2437,27 @@
               <a:t>Fourth level</a:t>
             </a:r>
           </a:p>
-          <a:p xmlns:a="http://schemas.openxmlformats.org/drawingml/2006/main">
+          <a:p>
             <a:pPr lvl="4">
               <a:buNone/>
             </a:pPr>
             <a:r>
               <a:t>Fifth level</a:t>
             </a:r>
-            <a:endParaRPr/>
           </a:p>
         </p:txBody>
       </p:sp>
       <p:sp>
         <p:nvSpPr>
           <p:cNvPr id="7" name="Date Placeholder 6">
-            <a:extLst xmlns:a="http://schemas.openxmlformats.org/drawingml/2006/main">
+            <a:extLst>
               <a:ext uri="{FF2B5EF4-FFF2-40B4-BE49-F238E27FC236}">
                 <a16:creationId xmlns:a16="http://schemas.microsoft.com/office/drawing/2014/main" id="{B749EA02-9727-20CE-6F2F-AEE777190319}"/>
               </a:ext>
             </a:extLst>
           </p:cNvPr>
           <p:cNvSpPr>
-            <a:spLocks xmlns:a="http://schemas.openxmlformats.org/drawingml/2006/main" noGrp="1"/>
+            <a:spLocks noGrp="1"/>
           </p:cNvSpPr>
           <p:nvPr>
             <p:ph type="dt" idx="10"/>
@@ -2643,11 +2465,11 @@
         </p:nvSpPr>
         <p:spPr/>
         <p:txBody>
-          <a:bodyPr xmlns:a="http://schemas.openxmlformats.org/drawingml/2006/main"/>
-          <a:lstStyle xmlns:a="http://schemas.openxmlformats.org/drawingml/2006/main"/>
-          <a:p xmlns:a="http://schemas.openxmlformats.org/drawingml/2006/main">
+          <a:bodyPr/>
+          <a:lstStyle/>
+          <a:p>
             <a:fld id="{EDB99004-FBBF-4BCC-9BC3-88F554ADE514}" type="datetimeFigureOut">
-              <a:t>09/10/2026</a:t>
+              <a:t>15-Oct-26</a:t>
             </a:fld>
             <a:endParaRPr/>
           </a:p>
@@ -2656,14 +2478,14 @@
       <p:sp>
         <p:nvSpPr>
           <p:cNvPr id="8" name="Footer Placeholder 7">
-            <a:extLst xmlns:a="http://schemas.openxmlformats.org/drawingml/2006/main">
+            <a:extLst>
               <a:ext uri="{FF2B5EF4-FFF2-40B4-BE49-F238E27FC236}">
                 <a16:creationId xmlns:a16="http://schemas.microsoft.com/office/drawing/2014/main" id="{40455506-EB11-CC08-A287-4C40A1068BE4}"/>
               </a:ext>
             </a:extLst>
           </p:cNvPr>
           <p:cNvSpPr>
-            <a:spLocks xmlns:a="http://schemas.openxmlformats.org/drawingml/2006/main" noGrp="1"/>
+            <a:spLocks noGrp="1"/>
           </p:cNvSpPr>
           <p:nvPr>
             <p:ph type="ftr" idx="11"/>
@@ -2671,9 +2493,9 @@
         </p:nvSpPr>
         <p:spPr/>
         <p:txBody>
-          <a:bodyPr xmlns:a="http://schemas.openxmlformats.org/drawingml/2006/main"/>
-          <a:lstStyle xmlns:a="http://schemas.openxmlformats.org/drawingml/2006/main"/>
-          <a:p xmlns:a="http://schemas.openxmlformats.org/drawingml/2006/main">
+          <a:bodyPr/>
+          <a:lstStyle/>
+          <a:p>
             <a:endParaRPr/>
           </a:p>
         </p:txBody>
@@ -2681,14 +2503,14 @@
       <p:sp>
         <p:nvSpPr>
           <p:cNvPr id="9" name="Slide Number Placeholder 8">
-            <a:extLst xmlns:a="http://schemas.openxmlformats.org/drawingml/2006/main">
+            <a:extLst>
               <a:ext uri="{FF2B5EF4-FFF2-40B4-BE49-F238E27FC236}">
                 <a16:creationId xmlns:a16="http://schemas.microsoft.com/office/drawing/2014/main" id="{9729B98D-1ABA-F8A4-E267-33AA94C81478}"/>
               </a:ext>
             </a:extLst>
           </p:cNvPr>
           <p:cNvSpPr>
-            <a:spLocks xmlns:a="http://schemas.openxmlformats.org/drawingml/2006/main" noGrp="1"/>
+            <a:spLocks noGrp="1"/>
           </p:cNvSpPr>
           <p:nvPr>
             <p:ph type="sldNum" idx="12"/>
@@ -2696,9 +2518,9 @@
         </p:nvSpPr>
         <p:spPr/>
         <p:txBody>
-          <a:bodyPr xmlns:a="http://schemas.openxmlformats.org/drawingml/2006/main"/>
-          <a:lstStyle xmlns:a="http://schemas.openxmlformats.org/drawingml/2006/main"/>
-          <a:p xmlns:a="http://schemas.openxmlformats.org/drawingml/2006/main">
+          <a:bodyPr/>
+          <a:lstStyle/>
+          <a:p>
             <a:fld id="{3721C89F-AE7A-4C3B-889F-FA429D0A7F97}" type="slidenum">
               <a:t>‹#›</a:t>
             </a:fld>
@@ -2708,11 +2530,14 @@
       </p:sp>
     </p:spTree>
   </p:cSld>
+  <p:clrMapOvr>
+    <a:masterClrMapping/>
+  </p:clrMapOvr>
 </p:sldLayout>
 </file>
 
 <file path=ppt/slideLayouts/slideLayout6.xml><?xml version="1.0" encoding="utf-8"?>
-<p:sldLayout xmlns:p="http://schemas.openxmlformats.org/presentationml/2006/main" type="titleOnly" preserve="1">
+<p:sldLayout xmlns:a="http://schemas.openxmlformats.org/drawingml/2006/main" xmlns:r="http://schemas.openxmlformats.org/officeDocument/2006/relationships" xmlns:p="http://schemas.openxmlformats.org/presentationml/2006/main" type="titleOnly" preserve="1">
   <p:cSld name="Title Only">
     <p:spTree>
       <p:nvGrpSpPr>
@@ -2721,47 +2546,51 @@
         <p:nvPr/>
       </p:nvGrpSpPr>
       <p:grpSpPr>
-        <a:xfrm xmlns:a="http://schemas.openxmlformats.org/drawingml/2006/main"/>
+        <a:xfrm>
+          <a:off x="0" y="0"/>
+          <a:ext cx="0" cy="0"/>
+          <a:chOff x="0" y="0"/>
+          <a:chExt cx="0" cy="0"/>
+        </a:xfrm>
       </p:grpSpPr>
       <p:sp>
         <p:nvSpPr>
           <p:cNvPr id="2" name="Title 1">
-            <a:extLst xmlns:a="http://schemas.openxmlformats.org/drawingml/2006/main">
+            <a:extLst>
               <a:ext uri="{FF2B5EF4-FFF2-40B4-BE49-F238E27FC236}">
                 <a16:creationId xmlns:a16="http://schemas.microsoft.com/office/drawing/2014/main" id="{9DC44A6F-AB0F-F2C2-8460-CD823A4D0309}"/>
               </a:ext>
             </a:extLst>
           </p:cNvPr>
           <p:cNvSpPr>
-            <a:spLocks xmlns:a="http://schemas.openxmlformats.org/drawingml/2006/main" noGrp="1"/>
-          </p:cNvSpPr>
-          <p:nvPr>
-            <p:ph type="title" idx="0"/>
+            <a:spLocks noGrp="1"/>
+          </p:cNvSpPr>
+          <p:nvPr>
+            <p:ph type="title"/>
           </p:nvPr>
         </p:nvSpPr>
         <p:spPr/>
         <p:txBody>
-          <a:bodyPr xmlns:a="http://schemas.openxmlformats.org/drawingml/2006/main"/>
-          <a:lstStyle xmlns:a="http://schemas.openxmlformats.org/drawingml/2006/main"/>
-          <a:p xmlns:a="http://schemas.openxmlformats.org/drawingml/2006/main">
+          <a:bodyPr/>
+          <a:lstStyle/>
+          <a:p>
             <a:r>
               <a:t>Click to edit Master title style</a:t>
             </a:r>
-            <a:endParaRPr/>
           </a:p>
         </p:txBody>
       </p:sp>
       <p:sp>
         <p:nvSpPr>
           <p:cNvPr id="3" name="Date Placeholder 2">
-            <a:extLst xmlns:a="http://schemas.openxmlformats.org/drawingml/2006/main">
+            <a:extLst>
               <a:ext uri="{FF2B5EF4-FFF2-40B4-BE49-F238E27FC236}">
                 <a16:creationId xmlns:a16="http://schemas.microsoft.com/office/drawing/2014/main" id="{AABB32F1-CA42-21EF-BB3D-FD9E4BF810F5}"/>
               </a:ext>
             </a:extLst>
           </p:cNvPr>
           <p:cNvSpPr>
-            <a:spLocks xmlns:a="http://schemas.openxmlformats.org/drawingml/2006/main" noGrp="1"/>
+            <a:spLocks noGrp="1"/>
           </p:cNvSpPr>
           <p:nvPr>
             <p:ph type="dt" idx="10"/>
@@ -2769,11 +2598,11 @@
         </p:nvSpPr>
         <p:spPr/>
         <p:txBody>
-          <a:bodyPr xmlns:a="http://schemas.openxmlformats.org/drawingml/2006/main"/>
-          <a:lstStyle xmlns:a="http://schemas.openxmlformats.org/drawingml/2006/main"/>
-          <a:p xmlns:a="http://schemas.openxmlformats.org/drawingml/2006/main">
+          <a:bodyPr/>
+          <a:lstStyle/>
+          <a:p>
             <a:fld id="{EDB99004-FBBF-4BCC-9BC3-88F554ADE514}" type="datetimeFigureOut">
-              <a:t>09/10/2026</a:t>
+              <a:t>15-Oct-26</a:t>
             </a:fld>
             <a:endParaRPr/>
           </a:p>
@@ -2782,14 +2611,14 @@
       <p:sp>
         <p:nvSpPr>
           <p:cNvPr id="4" name="Footer Placeholder 3">
-            <a:extLst xmlns:a="http://schemas.openxmlformats.org/drawingml/2006/main">
+            <a:extLst>
               <a:ext uri="{FF2B5EF4-FFF2-40B4-BE49-F238E27FC236}">
                 <a16:creationId xmlns:a16="http://schemas.microsoft.com/office/drawing/2014/main" id="{58D18139-25BA-A607-F49E-FAC8B9FF80F4}"/>
               </a:ext>
             </a:extLst>
           </p:cNvPr>
           <p:cNvSpPr>
-            <a:spLocks xmlns:a="http://schemas.openxmlformats.org/drawingml/2006/main" noGrp="1"/>
+            <a:spLocks noGrp="1"/>
           </p:cNvSpPr>
           <p:nvPr>
             <p:ph type="ftr" idx="11"/>
@@ -2797,9 +2626,9 @@
         </p:nvSpPr>
         <p:spPr/>
         <p:txBody>
-          <a:bodyPr xmlns:a="http://schemas.openxmlformats.org/drawingml/2006/main"/>
-          <a:lstStyle xmlns:a="http://schemas.openxmlformats.org/drawingml/2006/main"/>
-          <a:p xmlns:a="http://schemas.openxmlformats.org/drawingml/2006/main">
+          <a:bodyPr/>
+          <a:lstStyle/>
+          <a:p>
             <a:endParaRPr/>
           </a:p>
         </p:txBody>
@@ -2807,14 +2636,14 @@
       <p:sp>
         <p:nvSpPr>
           <p:cNvPr id="5" name="Slide Number Placeholder 4">
-            <a:extLst xmlns:a="http://schemas.openxmlformats.org/drawingml/2006/main">
+            <a:extLst>
               <a:ext uri="{FF2B5EF4-FFF2-40B4-BE49-F238E27FC236}">
                 <a16:creationId xmlns:a16="http://schemas.microsoft.com/office/drawing/2014/main" id="{AB1A14D5-22B8-8B31-2F15-3327A9172AE8}"/>
               </a:ext>
             </a:extLst>
           </p:cNvPr>
           <p:cNvSpPr>
-            <a:spLocks xmlns:a="http://schemas.openxmlformats.org/drawingml/2006/main" noGrp="1"/>
+            <a:spLocks noGrp="1"/>
           </p:cNvSpPr>
           <p:nvPr>
             <p:ph type="sldNum" idx="12"/>
@@ -2822,9 +2651,9 @@
         </p:nvSpPr>
         <p:spPr/>
         <p:txBody>
-          <a:bodyPr xmlns:a="http://schemas.openxmlformats.org/drawingml/2006/main"/>
-          <a:lstStyle xmlns:a="http://schemas.openxmlformats.org/drawingml/2006/main"/>
-          <a:p xmlns:a="http://schemas.openxmlformats.org/drawingml/2006/main">
+          <a:bodyPr/>
+          <a:lstStyle/>
+          <a:p>
             <a:fld id="{3721C89F-AE7A-4C3B-889F-FA429D0A7F97}" type="slidenum">
               <a:t>‹#›</a:t>
             </a:fld>
@@ -2834,11 +2663,14 @@
       </p:sp>
     </p:spTree>
   </p:cSld>
+  <p:clrMapOvr>
+    <a:masterClrMapping/>
+  </p:clrMapOvr>
 </p:sldLayout>
 </file>
 
 <file path=ppt/slideLayouts/slideLayout7.xml><?xml version="1.0" encoding="utf-8"?>
-<p:sldLayout xmlns:p="http://schemas.openxmlformats.org/presentationml/2006/main" type="blank" preserve="1">
+<p:sldLayout xmlns:a="http://schemas.openxmlformats.org/drawingml/2006/main" xmlns:r="http://schemas.openxmlformats.org/officeDocument/2006/relationships" xmlns:p="http://schemas.openxmlformats.org/presentationml/2006/main" type="blank" preserve="1">
   <p:cSld name="Blank">
     <p:spTree>
       <p:nvGrpSpPr>
@@ -2847,19 +2679,24 @@
         <p:nvPr/>
       </p:nvGrpSpPr>
       <p:grpSpPr>
-        <a:xfrm xmlns:a="http://schemas.openxmlformats.org/drawingml/2006/main"/>
+        <a:xfrm>
+          <a:off x="0" y="0"/>
+          <a:ext cx="0" cy="0"/>
+          <a:chOff x="0" y="0"/>
+          <a:chExt cx="0" cy="0"/>
+        </a:xfrm>
       </p:grpSpPr>
       <p:sp>
         <p:nvSpPr>
           <p:cNvPr id="2" name="Date Placeholder 1">
-            <a:extLst xmlns:a="http://schemas.openxmlformats.org/drawingml/2006/main">
+            <a:extLst>
               <a:ext uri="{FF2B5EF4-FFF2-40B4-BE49-F238E27FC236}">
                 <a16:creationId xmlns:a16="http://schemas.microsoft.com/office/drawing/2014/main" id="{EF651FDA-FADC-718F-3679-DD1D82038C7D}"/>
               </a:ext>
             </a:extLst>
           </p:cNvPr>
           <p:cNvSpPr>
-            <a:spLocks xmlns:a="http://schemas.openxmlformats.org/drawingml/2006/main" noGrp="1"/>
+            <a:spLocks noGrp="1"/>
           </p:cNvSpPr>
           <p:nvPr>
             <p:ph type="dt" idx="10"/>
@@ -2867,11 +2704,11 @@
         </p:nvSpPr>
         <p:spPr/>
         <p:txBody>
-          <a:bodyPr xmlns:a="http://schemas.openxmlformats.org/drawingml/2006/main"/>
-          <a:lstStyle xmlns:a="http://schemas.openxmlformats.org/drawingml/2006/main"/>
-          <a:p xmlns:a="http://schemas.openxmlformats.org/drawingml/2006/main">
+          <a:bodyPr/>
+          <a:lstStyle/>
+          <a:p>
             <a:fld id="{EDB99004-FBBF-4BCC-9BC3-88F554ADE514}" type="datetimeFigureOut">
-              <a:t>09/10/2026</a:t>
+              <a:t>15-Oct-26</a:t>
             </a:fld>
             <a:endParaRPr/>
           </a:p>
@@ -2880,14 +2717,14 @@
       <p:sp>
         <p:nvSpPr>
           <p:cNvPr id="3" name="Footer Placeholder 2">
-            <a:extLst xmlns:a="http://schemas.openxmlformats.org/drawingml/2006/main">
+            <a:extLst>
               <a:ext uri="{FF2B5EF4-FFF2-40B4-BE49-F238E27FC236}">
                 <a16:creationId xmlns:a16="http://schemas.microsoft.com/office/drawing/2014/main" id="{9B6CFA23-F762-DAC7-F055-34BBBEEA1BED}"/>
               </a:ext>
             </a:extLst>
           </p:cNvPr>
           <p:cNvSpPr>
-            <a:spLocks xmlns:a="http://schemas.openxmlformats.org/drawingml/2006/main" noGrp="1"/>
+            <a:spLocks noGrp="1"/>
           </p:cNvSpPr>
           <p:nvPr>
             <p:ph type="ftr" idx="11"/>
@@ -2895,9 +2732,9 @@
         </p:nvSpPr>
         <p:spPr/>
         <p:txBody>
-          <a:bodyPr xmlns:a="http://schemas.openxmlformats.org/drawingml/2006/main"/>
-          <a:lstStyle xmlns:a="http://schemas.openxmlformats.org/drawingml/2006/main"/>
-          <a:p xmlns:a="http://schemas.openxmlformats.org/drawingml/2006/main">
+          <a:bodyPr/>
+          <a:lstStyle/>
+          <a:p>
             <a:endParaRPr/>
           </a:p>
         </p:txBody>
@@ -2905,14 +2742,14 @@
       <p:sp>
         <p:nvSpPr>
           <p:cNvPr id="4" name="Slide Number Placeholder 3">
-            <a:extLst xmlns:a="http://schemas.openxmlformats.org/drawingml/2006/main">
+            <a:extLst>
               <a:ext uri="{FF2B5EF4-FFF2-40B4-BE49-F238E27FC236}">
                 <a16:creationId xmlns:a16="http://schemas.microsoft.com/office/drawing/2014/main" id="{0EE4845E-D252-E586-D35F-F6971F010B7E}"/>
               </a:ext>
             </a:extLst>
           </p:cNvPr>
           <p:cNvSpPr>
-            <a:spLocks xmlns:a="http://schemas.openxmlformats.org/drawingml/2006/main" noGrp="1"/>
+            <a:spLocks noGrp="1"/>
           </p:cNvSpPr>
           <p:nvPr>
             <p:ph type="sldNum" idx="12"/>
@@ -2920,9 +2757,9 @@
         </p:nvSpPr>
         <p:spPr/>
         <p:txBody>
-          <a:bodyPr xmlns:a="http://schemas.openxmlformats.org/drawingml/2006/main"/>
-          <a:lstStyle xmlns:a="http://schemas.openxmlformats.org/drawingml/2006/main"/>
-          <a:p xmlns:a="http://schemas.openxmlformats.org/drawingml/2006/main">
+          <a:bodyPr/>
+          <a:lstStyle/>
+          <a:p>
             <a:fld id="{3721C89F-AE7A-4C3B-889F-FA429D0A7F97}" type="slidenum">
               <a:t>‹#›</a:t>
             </a:fld>
@@ -2932,11 +2769,14 @@
       </p:sp>
     </p:spTree>
   </p:cSld>
+  <p:clrMapOvr>
+    <a:masterClrMapping/>
+  </p:clrMapOvr>
 </p:sldLayout>
 </file>
 
 <file path=ppt/slideLayouts/slideLayout8.xml><?xml version="1.0" encoding="utf-8"?>
-<p:sldLayout xmlns:p="http://schemas.openxmlformats.org/presentationml/2006/main" type="objTx" preserve="1">
+<p:sldLayout xmlns:a="http://schemas.openxmlformats.org/drawingml/2006/main" xmlns:r="http://schemas.openxmlformats.org/officeDocument/2006/relationships" xmlns:p="http://schemas.openxmlformats.org/presentationml/2006/main" type="objTx" preserve="1">
   <p:cSld name="Content with Caption">
     <p:spTree>
       <p:nvGrpSpPr>
@@ -2945,71 +2785,75 @@
         <p:nvPr/>
       </p:nvGrpSpPr>
       <p:grpSpPr>
-        <a:xfrm xmlns:a="http://schemas.openxmlformats.org/drawingml/2006/main"/>
+        <a:xfrm>
+          <a:off x="0" y="0"/>
+          <a:ext cx="0" cy="0"/>
+          <a:chOff x="0" y="0"/>
+          <a:chExt cx="0" cy="0"/>
+        </a:xfrm>
       </p:grpSpPr>
       <p:sp>
         <p:nvSpPr>
           <p:cNvPr id="2" name="Title 1">
-            <a:extLst xmlns:a="http://schemas.openxmlformats.org/drawingml/2006/main">
+            <a:extLst>
               <a:ext uri="{FF2B5EF4-FFF2-40B4-BE49-F238E27FC236}">
                 <a16:creationId xmlns:a16="http://schemas.microsoft.com/office/drawing/2014/main" id="{3F3CC88C-4219-7229-D578-F248CEBE55E1}"/>
               </a:ext>
             </a:extLst>
           </p:cNvPr>
           <p:cNvSpPr>
-            <a:spLocks xmlns:a="http://schemas.openxmlformats.org/drawingml/2006/main" noGrp="1"/>
-          </p:cNvSpPr>
-          <p:nvPr>
-            <p:ph type="title" idx="0"/>
+            <a:spLocks noGrp="1"/>
+          </p:cNvSpPr>
+          <p:nvPr>
+            <p:ph type="title"/>
           </p:nvPr>
         </p:nvSpPr>
         <p:spPr>
-          <a:xfrm xmlns:a="http://schemas.openxmlformats.org/drawingml/2006/main">
+          <a:xfrm>
             <a:off x="839788" y="457200"/>
             <a:ext cx="3932237" cy="1600200"/>
           </a:xfrm>
         </p:spPr>
         <p:txBody>
-          <a:bodyPr xmlns:a="http://schemas.openxmlformats.org/drawingml/2006/main" anchor="b"/>
-          <a:lstStyle xmlns:a="http://schemas.openxmlformats.org/drawingml/2006/main">
+          <a:bodyPr anchor="b"/>
+          <a:lstStyle>
             <a:lvl1pPr>
               <a:buNone/>
               <a:defRPr sz="3200"/>
             </a:lvl1pPr>
           </a:lstStyle>
-          <a:p xmlns:a="http://schemas.openxmlformats.org/drawingml/2006/main">
+          <a:p>
             <a:r>
               <a:t>Click to edit Master title style</a:t>
             </a:r>
-            <a:endParaRPr/>
           </a:p>
         </p:txBody>
       </p:sp>
       <p:sp>
         <p:nvSpPr>
           <p:cNvPr id="3" name="Content Placeholder 2">
-            <a:extLst xmlns:a="http://schemas.openxmlformats.org/drawingml/2006/main">
+            <a:extLst>
               <a:ext uri="{FF2B5EF4-FFF2-40B4-BE49-F238E27FC236}">
                 <a16:creationId xmlns:a16="http://schemas.microsoft.com/office/drawing/2014/main" id="{778FCADE-8154-624B-6907-062ADFA184E2}"/>
               </a:ext>
             </a:extLst>
           </p:cNvPr>
           <p:cNvSpPr>
-            <a:spLocks xmlns:a="http://schemas.openxmlformats.org/drawingml/2006/main" noGrp="1"/>
+            <a:spLocks noGrp="1"/>
           </p:cNvSpPr>
           <p:nvPr>
             <p:ph idx="1"/>
           </p:nvPr>
         </p:nvSpPr>
         <p:spPr>
-          <a:xfrm xmlns:a="http://schemas.openxmlformats.org/drawingml/2006/main">
+          <a:xfrm>
             <a:off x="5183188" y="987425"/>
             <a:ext cx="6172200" cy="4873625"/>
           </a:xfrm>
         </p:spPr>
         <p:txBody>
-          <a:bodyPr xmlns:a="http://schemas.openxmlformats.org/drawingml/2006/main"/>
-          <a:lstStyle xmlns:a="http://schemas.openxmlformats.org/drawingml/2006/main">
+          <a:bodyPr/>
+          <a:lstStyle>
             <a:lvl1pPr>
               <a:buNone/>
               <a:defRPr sz="3200"/>
@@ -3047,7 +2891,7 @@
               <a:defRPr sz="2000"/>
             </a:lvl9pPr>
           </a:lstStyle>
-          <a:p xmlns:a="http://schemas.openxmlformats.org/drawingml/2006/main">
+          <a:p>
             <a:pPr lvl="0">
               <a:buNone/>
             </a:pPr>
@@ -3055,7 +2899,7 @@
               <a:t>Click to edit Master text styles</a:t>
             </a:r>
           </a:p>
-          <a:p xmlns:a="http://schemas.openxmlformats.org/drawingml/2006/main">
+          <a:p>
             <a:pPr lvl="1">
               <a:buNone/>
             </a:pPr>
@@ -3063,7 +2907,7 @@
               <a:t>Second level</a:t>
             </a:r>
           </a:p>
-          <a:p xmlns:a="http://schemas.openxmlformats.org/drawingml/2006/main">
+          <a:p>
             <a:pPr lvl="2">
               <a:buNone/>
             </a:pPr>
@@ -3071,7 +2915,7 @@
               <a:t>Third level</a:t>
             </a:r>
           </a:p>
-          <a:p xmlns:a="http://schemas.openxmlformats.org/drawingml/2006/main">
+          <a:p>
             <a:pPr lvl="3">
               <a:buNone/>
             </a:pPr>
@@ -3079,42 +2923,41 @@
               <a:t>Fourth level</a:t>
             </a:r>
           </a:p>
-          <a:p xmlns:a="http://schemas.openxmlformats.org/drawingml/2006/main">
+          <a:p>
             <a:pPr lvl="4">
               <a:buNone/>
             </a:pPr>
             <a:r>
               <a:t>Fifth level</a:t>
             </a:r>
-            <a:endParaRPr/>
           </a:p>
         </p:txBody>
       </p:sp>
       <p:sp>
         <p:nvSpPr>
           <p:cNvPr id="4" name="Text Placeholder 3">
-            <a:extLst xmlns:a="http://schemas.openxmlformats.org/drawingml/2006/main">
+            <a:extLst>
               <a:ext uri="{FF2B5EF4-FFF2-40B4-BE49-F238E27FC236}">
                 <a16:creationId xmlns:a16="http://schemas.microsoft.com/office/drawing/2014/main" id="{DF788E2C-3D70-2723-B03E-3E54F428E714}"/>
               </a:ext>
             </a:extLst>
           </p:cNvPr>
           <p:cNvSpPr>
-            <a:spLocks xmlns:a="http://schemas.openxmlformats.org/drawingml/2006/main" noGrp="1"/>
+            <a:spLocks noGrp="1"/>
           </p:cNvSpPr>
           <p:nvPr>
             <p:ph type="body" idx="2"/>
           </p:nvPr>
         </p:nvSpPr>
         <p:spPr>
-          <a:xfrm xmlns:a="http://schemas.openxmlformats.org/drawingml/2006/main">
+          <a:xfrm>
             <a:off x="839788" y="2057400"/>
             <a:ext cx="3932237" cy="3811588"/>
           </a:xfrm>
         </p:spPr>
         <p:txBody>
-          <a:bodyPr xmlns:a="http://schemas.openxmlformats.org/drawingml/2006/main"/>
-          <a:lstStyle xmlns:a="http://schemas.openxmlformats.org/drawingml/2006/main">
+          <a:bodyPr/>
+          <a:lstStyle>
             <a:lvl1pPr marL="0" indent="0">
               <a:buNone/>
               <a:defRPr sz="1600"/>
@@ -3152,7 +2995,7 @@
               <a:defRPr sz="1000"/>
             </a:lvl9pPr>
           </a:lstStyle>
-          <a:p xmlns:a="http://schemas.openxmlformats.org/drawingml/2006/main">
+          <a:p>
             <a:pPr lvl="0">
               <a:buNone/>
             </a:pPr>
@@ -3165,14 +3008,14 @@
       <p:sp>
         <p:nvSpPr>
           <p:cNvPr id="5" name="Date Placeholder 4">
-            <a:extLst xmlns:a="http://schemas.openxmlformats.org/drawingml/2006/main">
+            <a:extLst>
               <a:ext uri="{FF2B5EF4-FFF2-40B4-BE49-F238E27FC236}">
                 <a16:creationId xmlns:a16="http://schemas.microsoft.com/office/drawing/2014/main" id="{CDF4CF5D-DB9F-46BD-AA7E-99259ABBDFB6}"/>
               </a:ext>
             </a:extLst>
           </p:cNvPr>
           <p:cNvSpPr>
-            <a:spLocks xmlns:a="http://schemas.openxmlformats.org/drawingml/2006/main" noGrp="1"/>
+            <a:spLocks noGrp="1"/>
           </p:cNvSpPr>
           <p:nvPr>
             <p:ph type="dt" idx="10"/>
@@ -3180,11 +3023,11 @@
         </p:nvSpPr>
         <p:spPr/>
         <p:txBody>
-          <a:bodyPr xmlns:a="http://schemas.openxmlformats.org/drawingml/2006/main"/>
-          <a:lstStyle xmlns:a="http://schemas.openxmlformats.org/drawingml/2006/main"/>
-          <a:p xmlns:a="http://schemas.openxmlformats.org/drawingml/2006/main">
+          <a:bodyPr/>
+          <a:lstStyle/>
+          <a:p>
             <a:fld id="{EDB99004-FBBF-4BCC-9BC3-88F554ADE514}" type="datetimeFigureOut">
-              <a:t>09/10/2026</a:t>
+              <a:t>15-Oct-26</a:t>
             </a:fld>
             <a:endParaRPr/>
           </a:p>
@@ -3193,14 +3036,14 @@
       <p:sp>
         <p:nvSpPr>
           <p:cNvPr id="6" name="Footer Placeholder 5">
-            <a:extLst xmlns:a="http://schemas.openxmlformats.org/drawingml/2006/main">
+            <a:extLst>
               <a:ext uri="{FF2B5EF4-FFF2-40B4-BE49-F238E27FC236}">
                 <a16:creationId xmlns:a16="http://schemas.microsoft.com/office/drawing/2014/main" id="{BDD966BC-122D-0C34-66A6-82641A0F33C0}"/>
               </a:ext>
             </a:extLst>
           </p:cNvPr>
           <p:cNvSpPr>
-            <a:spLocks xmlns:a="http://schemas.openxmlformats.org/drawingml/2006/main" noGrp="1"/>
+            <a:spLocks noGrp="1"/>
           </p:cNvSpPr>
           <p:nvPr>
             <p:ph type="ftr" idx="11"/>
@@ -3208,9 +3051,9 @@
         </p:nvSpPr>
         <p:spPr/>
         <p:txBody>
-          <a:bodyPr xmlns:a="http://schemas.openxmlformats.org/drawingml/2006/main"/>
-          <a:lstStyle xmlns:a="http://schemas.openxmlformats.org/drawingml/2006/main"/>
-          <a:p xmlns:a="http://schemas.openxmlformats.org/drawingml/2006/main">
+          <a:bodyPr/>
+          <a:lstStyle/>
+          <a:p>
             <a:endParaRPr/>
           </a:p>
         </p:txBody>
@@ -3218,14 +3061,14 @@
       <p:sp>
         <p:nvSpPr>
           <p:cNvPr id="7" name="Slide Number Placeholder 6">
-            <a:extLst xmlns:a="http://schemas.openxmlformats.org/drawingml/2006/main">
+            <a:extLst>
               <a:ext uri="{FF2B5EF4-FFF2-40B4-BE49-F238E27FC236}">
                 <a16:creationId xmlns:a16="http://schemas.microsoft.com/office/drawing/2014/main" id="{E30D53ED-CC38-27CB-CE75-0363724E29C7}"/>
               </a:ext>
             </a:extLst>
           </p:cNvPr>
           <p:cNvSpPr>
-            <a:spLocks xmlns:a="http://schemas.openxmlformats.org/drawingml/2006/main" noGrp="1"/>
+            <a:spLocks noGrp="1"/>
           </p:cNvSpPr>
           <p:nvPr>
             <p:ph type="sldNum" idx="12"/>
@@ -3233,9 +3076,9 @@
         </p:nvSpPr>
         <p:spPr/>
         <p:txBody>
-          <a:bodyPr xmlns:a="http://schemas.openxmlformats.org/drawingml/2006/main"/>
-          <a:lstStyle xmlns:a="http://schemas.openxmlformats.org/drawingml/2006/main"/>
-          <a:p xmlns:a="http://schemas.openxmlformats.org/drawingml/2006/main">
+          <a:bodyPr/>
+          <a:lstStyle/>
+          <a:p>
             <a:fld id="{3721C89F-AE7A-4C3B-889F-FA429D0A7F97}" type="slidenum">
               <a:t>‹#›</a:t>
             </a:fld>
@@ -3245,11 +3088,14 @@
       </p:sp>
     </p:spTree>
   </p:cSld>
+  <p:clrMapOvr>
+    <a:masterClrMapping/>
+  </p:clrMapOvr>
 </p:sldLayout>
 </file>
 
 <file path=ppt/slideLayouts/slideLayout9.xml><?xml version="1.0" encoding="utf-8"?>
-<p:sldLayout xmlns:p="http://schemas.openxmlformats.org/presentationml/2006/main" type="picTx" preserve="1">
+<p:sldLayout xmlns:a="http://schemas.openxmlformats.org/drawingml/2006/main" xmlns:r="http://schemas.openxmlformats.org/officeDocument/2006/relationships" xmlns:p="http://schemas.openxmlformats.org/presentationml/2006/main" type="picTx" preserve="1">
   <p:cSld name="Picture with Caption">
     <p:spTree>
       <p:nvGrpSpPr>
@@ -3258,71 +3104,75 @@
         <p:nvPr/>
       </p:nvGrpSpPr>
       <p:grpSpPr>
-        <a:xfrm xmlns:a="http://schemas.openxmlformats.org/drawingml/2006/main"/>
+        <a:xfrm>
+          <a:off x="0" y="0"/>
+          <a:ext cx="0" cy="0"/>
+          <a:chOff x="0" y="0"/>
+          <a:chExt cx="0" cy="0"/>
+        </a:xfrm>
       </p:grpSpPr>
       <p:sp>
         <p:nvSpPr>
           <p:cNvPr id="2" name="Title 1">
-            <a:extLst xmlns:a="http://schemas.openxmlformats.org/drawingml/2006/main">
+            <a:extLst>
               <a:ext uri="{FF2B5EF4-FFF2-40B4-BE49-F238E27FC236}">
                 <a16:creationId xmlns:a16="http://schemas.microsoft.com/office/drawing/2014/main" id="{ED3D30A6-B84A-5729-409B-EECAD253844D}"/>
               </a:ext>
             </a:extLst>
           </p:cNvPr>
           <p:cNvSpPr>
-            <a:spLocks xmlns:a="http://schemas.openxmlformats.org/drawingml/2006/main" noGrp="1"/>
-          </p:cNvSpPr>
-          <p:nvPr>
-            <p:ph type="title" idx="0"/>
+            <a:spLocks noGrp="1"/>
+          </p:cNvSpPr>
+          <p:nvPr>
+            <p:ph type="title"/>
           </p:nvPr>
         </p:nvSpPr>
         <p:spPr>
-          <a:xfrm xmlns:a="http://schemas.openxmlformats.org/drawingml/2006/main">
+          <a:xfrm>
             <a:off x="839788" y="457200"/>
             <a:ext cx="3932237" cy="1600200"/>
           </a:xfrm>
         </p:spPr>
         <p:txBody>
-          <a:bodyPr xmlns:a="http://schemas.openxmlformats.org/drawingml/2006/main" anchor="b"/>
-          <a:lstStyle xmlns:a="http://schemas.openxmlformats.org/drawingml/2006/main">
+          <a:bodyPr anchor="b"/>
+          <a:lstStyle>
             <a:lvl1pPr>
               <a:buNone/>
               <a:defRPr sz="3200"/>
             </a:lvl1pPr>
           </a:lstStyle>
-          <a:p xmlns:a="http://schemas.openxmlformats.org/drawingml/2006/main">
+          <a:p>
             <a:r>
               <a:t>Click to edit Master title style</a:t>
             </a:r>
-            <a:endParaRPr/>
           </a:p>
         </p:txBody>
       </p:sp>
       <p:sp>
         <p:nvSpPr>
           <p:cNvPr id="3" name="Picture Placeholder 2">
-            <a:extLst xmlns:a="http://schemas.openxmlformats.org/drawingml/2006/main">
+            <a:extLst>
               <a:ext uri="{FF2B5EF4-FFF2-40B4-BE49-F238E27FC236}">
                 <a16:creationId xmlns:a16="http://schemas.microsoft.com/office/drawing/2014/main" id="{D18942B2-A346-D722-B157-F50399986B7A}"/>
               </a:ext>
             </a:extLst>
           </p:cNvPr>
           <p:cNvSpPr>
-            <a:spLocks xmlns:a="http://schemas.openxmlformats.org/drawingml/2006/main" noGrp="1"/>
+            <a:spLocks noGrp="1"/>
           </p:cNvSpPr>
           <p:nvPr>
             <p:ph type="pic" idx="1"/>
           </p:nvPr>
         </p:nvSpPr>
         <p:spPr>
-          <a:xfrm xmlns:a="http://schemas.openxmlformats.org/drawingml/2006/main">
+          <a:xfrm>
             <a:off x="5183188" y="987425"/>
             <a:ext cx="6172200" cy="4873625"/>
           </a:xfrm>
         </p:spPr>
         <p:txBody>
-          <a:bodyPr xmlns:a="http://schemas.openxmlformats.org/drawingml/2006/main"/>
-          <a:lstStyle xmlns:a="http://schemas.openxmlformats.org/drawingml/2006/main">
+          <a:bodyPr/>
+          <a:lstStyle>
             <a:lvl1pPr marL="0" indent="0">
               <a:buNone/>
               <a:defRPr sz="3200"/>
@@ -3360,7 +3210,7 @@
               <a:defRPr sz="2000"/>
             </a:lvl9pPr>
           </a:lstStyle>
-          <a:p xmlns:a="http://schemas.openxmlformats.org/drawingml/2006/main">
+          <a:p>
             <a:endParaRPr/>
           </a:p>
         </p:txBody>
@@ -3368,28 +3218,28 @@
       <p:sp>
         <p:nvSpPr>
           <p:cNvPr id="4" name="Text Placeholder 3">
-            <a:extLst xmlns:a="http://schemas.openxmlformats.org/drawingml/2006/main">
+            <a:extLst>
               <a:ext uri="{FF2B5EF4-FFF2-40B4-BE49-F238E27FC236}">
                 <a16:creationId xmlns:a16="http://schemas.microsoft.com/office/drawing/2014/main" id="{B4D48F45-61CA-44E0-DBAE-9D36F6365D33}"/>
               </a:ext>
             </a:extLst>
           </p:cNvPr>
           <p:cNvSpPr>
-            <a:spLocks xmlns:a="http://schemas.openxmlformats.org/drawingml/2006/main" noGrp="1"/>
+            <a:spLocks noGrp="1"/>
           </p:cNvSpPr>
           <p:nvPr>
             <p:ph type="body" idx="2"/>
           </p:nvPr>
         </p:nvSpPr>
         <p:spPr>
-          <a:xfrm xmlns:a="http://schemas.openxmlformats.org/drawingml/2006/main">
+          <a:xfrm>
             <a:off x="839788" y="2057400"/>
             <a:ext cx="3932237" cy="3811588"/>
           </a:xfrm>
         </p:spPr>
         <p:txBody>
-          <a:bodyPr xmlns:a="http://schemas.openxmlformats.org/drawingml/2006/main"/>
-          <a:lstStyle xmlns:a="http://schemas.openxmlformats.org/drawingml/2006/main">
+          <a:bodyPr/>
+          <a:lstStyle>
             <a:lvl1pPr marL="0" indent="0">
               <a:buNone/>
               <a:defRPr sz="1600"/>
@@ -3427,7 +3277,7 @@
               <a:defRPr sz="1000"/>
             </a:lvl9pPr>
           </a:lstStyle>
-          <a:p xmlns:a="http://schemas.openxmlformats.org/drawingml/2006/main">
+          <a:p>
             <a:pPr lvl="0">
               <a:buNone/>
             </a:pPr>
@@ -3440,14 +3290,14 @@
       <p:sp>
         <p:nvSpPr>
           <p:cNvPr id="5" name="Date Placeholder 4">
-            <a:extLst xmlns:a="http://schemas.openxmlformats.org/drawingml/2006/main">
+            <a:extLst>
               <a:ext uri="{FF2B5EF4-FFF2-40B4-BE49-F238E27FC236}">
                 <a16:creationId xmlns:a16="http://schemas.microsoft.com/office/drawing/2014/main" id="{F87F642F-E08C-B0D6-DCF9-FC1121C3A7D2}"/>
               </a:ext>
             </a:extLst>
           </p:cNvPr>
           <p:cNvSpPr>
-            <a:spLocks xmlns:a="http://schemas.openxmlformats.org/drawingml/2006/main" noGrp="1"/>
+            <a:spLocks noGrp="1"/>
           </p:cNvSpPr>
           <p:nvPr>
             <p:ph type="dt" idx="10"/>
@@ -3455,11 +3305,11 @@
         </p:nvSpPr>
         <p:spPr/>
         <p:txBody>
-          <a:bodyPr xmlns:a="http://schemas.openxmlformats.org/drawingml/2006/main"/>
-          <a:lstStyle xmlns:a="http://schemas.openxmlformats.org/drawingml/2006/main"/>
-          <a:p xmlns:a="http://schemas.openxmlformats.org/drawingml/2006/main">
+          <a:bodyPr/>
+          <a:lstStyle/>
+          <a:p>
             <a:fld id="{EDB99004-FBBF-4BCC-9BC3-88F554ADE514}" type="datetimeFigureOut">
-              <a:t>09/10/2026</a:t>
+              <a:t>15-Oct-26</a:t>
             </a:fld>
             <a:endParaRPr/>
           </a:p>
@@ -3468,14 +3318,14 @@
       <p:sp>
         <p:nvSpPr>
           <p:cNvPr id="6" name="Footer Placeholder 5">
-            <a:extLst xmlns:a="http://schemas.openxmlformats.org/drawingml/2006/main">
+            <a:extLst>
               <a:ext uri="{FF2B5EF4-FFF2-40B4-BE49-F238E27FC236}">
                 <a16:creationId xmlns:a16="http://schemas.microsoft.com/office/drawing/2014/main" id="{615CD439-5831-B89F-A032-126BDC3BCCD4}"/>
               </a:ext>
             </a:extLst>
           </p:cNvPr>
           <p:cNvSpPr>
-            <a:spLocks xmlns:a="http://schemas.openxmlformats.org/drawingml/2006/main" noGrp="1"/>
+            <a:spLocks noGrp="1"/>
           </p:cNvSpPr>
           <p:nvPr>
             <p:ph type="ftr" idx="11"/>
@@ -3483,9 +3333,9 @@
         </p:nvSpPr>
         <p:spPr/>
         <p:txBody>
-          <a:bodyPr xmlns:a="http://schemas.openxmlformats.org/drawingml/2006/main"/>
-          <a:lstStyle xmlns:a="http://schemas.openxmlformats.org/drawingml/2006/main"/>
-          <a:p xmlns:a="http://schemas.openxmlformats.org/drawingml/2006/main">
+          <a:bodyPr/>
+          <a:lstStyle/>
+          <a:p>
             <a:endParaRPr/>
           </a:p>
         </p:txBody>
@@ -3493,14 +3343,14 @@
       <p:sp>
         <p:nvSpPr>
           <p:cNvPr id="7" name="Slide Number Placeholder 6">
-            <a:extLst xmlns:a="http://schemas.openxmlformats.org/drawingml/2006/main">
+            <a:extLst>
               <a:ext uri="{FF2B5EF4-FFF2-40B4-BE49-F238E27FC236}">
                 <a16:creationId xmlns:a16="http://schemas.microsoft.com/office/drawing/2014/main" id="{ACF8F52A-1268-BF36-C904-53855E60D1CE}"/>
               </a:ext>
             </a:extLst>
           </p:cNvPr>
           <p:cNvSpPr>
-            <a:spLocks xmlns:a="http://schemas.openxmlformats.org/drawingml/2006/main" noGrp="1"/>
+            <a:spLocks noGrp="1"/>
           </p:cNvSpPr>
           <p:nvPr>
             <p:ph type="sldNum" idx="12"/>
@@ -3508,9 +3358,9 @@
         </p:nvSpPr>
         <p:spPr/>
         <p:txBody>
-          <a:bodyPr xmlns:a="http://schemas.openxmlformats.org/drawingml/2006/main"/>
-          <a:lstStyle xmlns:a="http://schemas.openxmlformats.org/drawingml/2006/main"/>
-          <a:p xmlns:a="http://schemas.openxmlformats.org/drawingml/2006/main">
+          <a:bodyPr/>
+          <a:lstStyle/>
+          <a:p>
             <a:fld id="{3721C89F-AE7A-4C3B-889F-FA429D0A7F97}" type="slidenum">
               <a:t>‹#›</a:t>
             </a:fld>
@@ -3520,15 +3370,18 @@
       </p:sp>
     </p:spTree>
   </p:cSld>
+  <p:clrMapOvr>
+    <a:masterClrMapping/>
+  </p:clrMapOvr>
 </p:sldLayout>
 </file>
 
 <file path=ppt/slideMasters/slideMaster1.xml><?xml version="1.0" encoding="utf-8"?>
-<p:sldMaster xmlns:p="http://schemas.openxmlformats.org/presentationml/2006/main">
+<p:sldMaster xmlns:a="http://schemas.openxmlformats.org/drawingml/2006/main" xmlns:r="http://schemas.openxmlformats.org/officeDocument/2006/relationships" xmlns:p="http://schemas.openxmlformats.org/presentationml/2006/main">
   <p:cSld>
     <p:bg>
       <p:bgRef idx="1001">
-        <a:schemeClr xmlns:a="http://schemas.openxmlformats.org/drawingml/2006/main" val="bg1"/>
+        <a:schemeClr val="bg1"/>
       </p:bgRef>
     </p:bg>
     <p:spTree>
@@ -3538,77 +3391,81 @@
         <p:nvPr/>
       </p:nvGrpSpPr>
       <p:grpSpPr>
-        <a:xfrm xmlns:a="http://schemas.openxmlformats.org/drawingml/2006/main"/>
+        <a:xfrm>
+          <a:off x="0" y="0"/>
+          <a:ext cx="0" cy="0"/>
+          <a:chOff x="0" y="0"/>
+          <a:chExt cx="0" cy="0"/>
+        </a:xfrm>
       </p:grpSpPr>
       <p:sp>
         <p:nvSpPr>
           <p:cNvPr id="2" name="Title Placeholder 1">
-            <a:extLst xmlns:a="http://schemas.openxmlformats.org/drawingml/2006/main">
+            <a:extLst>
               <a:ext uri="{FF2B5EF4-FFF2-40B4-BE49-F238E27FC236}">
                 <a16:creationId xmlns:a16="http://schemas.microsoft.com/office/drawing/2014/main" id="{07F3D97B-511D-E64B-9F91-7097B8212017}"/>
               </a:ext>
             </a:extLst>
           </p:cNvPr>
           <p:cNvSpPr>
-            <a:spLocks xmlns:a="http://schemas.openxmlformats.org/drawingml/2006/main" noGrp="1"/>
-          </p:cNvSpPr>
-          <p:nvPr>
-            <p:ph type="title" idx="0"/>
+            <a:spLocks noGrp="1"/>
+          </p:cNvSpPr>
+          <p:nvPr>
+            <p:ph type="title"/>
           </p:nvPr>
         </p:nvSpPr>
         <p:spPr>
-          <a:xfrm xmlns:a="http://schemas.openxmlformats.org/drawingml/2006/main">
+          <a:xfrm>
             <a:off x="838200" y="365125"/>
             <a:ext cx="10515600" cy="1325563"/>
           </a:xfrm>
-          <a:prstGeom xmlns:a="http://schemas.openxmlformats.org/drawingml/2006/main" prst="rect">
+          <a:prstGeom prst="rect">
             <a:avLst/>
           </a:prstGeom>
         </p:spPr>
         <p:txBody>
-          <a:bodyPr xmlns:a="http://schemas.openxmlformats.org/drawingml/2006/main" vert="horz" lIns="91440" tIns="45720" rIns="91440" bIns="45720" anchor="ctr">
+          <a:bodyPr vert="horz" lIns="91440" tIns="45720" rIns="91440" bIns="45720" anchor="ctr">
             <a:normAutofit/>
           </a:bodyPr>
-          <a:lstStyle xmlns:a="http://schemas.openxmlformats.org/drawingml/2006/main"/>
-          <a:p xmlns:a="http://schemas.openxmlformats.org/drawingml/2006/main">
+          <a:lstStyle/>
+          <a:p>
             <a:r>
               <a:t>Click to edit Master title style</a:t>
             </a:r>
-            <a:endParaRPr/>
           </a:p>
         </p:txBody>
       </p:sp>
       <p:sp>
         <p:nvSpPr>
           <p:cNvPr id="3" name="Text Placeholder 2">
-            <a:extLst xmlns:a="http://schemas.openxmlformats.org/drawingml/2006/main">
+            <a:extLst>
               <a:ext uri="{FF2B5EF4-FFF2-40B4-BE49-F238E27FC236}">
                 <a16:creationId xmlns:a16="http://schemas.microsoft.com/office/drawing/2014/main" id="{7D5744D8-7A9E-E0ED-82DF-9733866DDA60}"/>
               </a:ext>
             </a:extLst>
           </p:cNvPr>
           <p:cNvSpPr>
-            <a:spLocks xmlns:a="http://schemas.openxmlformats.org/drawingml/2006/main" noGrp="1"/>
+            <a:spLocks noGrp="1"/>
           </p:cNvSpPr>
           <p:nvPr>
             <p:ph type="body" idx="1"/>
           </p:nvPr>
         </p:nvSpPr>
         <p:spPr>
-          <a:xfrm xmlns:a="http://schemas.openxmlformats.org/drawingml/2006/main">
+          <a:xfrm>
             <a:off x="838200" y="1825625"/>
             <a:ext cx="10515600" cy="4351338"/>
           </a:xfrm>
-          <a:prstGeom xmlns:a="http://schemas.openxmlformats.org/drawingml/2006/main" prst="rect">
+          <a:prstGeom prst="rect">
             <a:avLst/>
           </a:prstGeom>
         </p:spPr>
         <p:txBody>
-          <a:bodyPr xmlns:a="http://schemas.openxmlformats.org/drawingml/2006/main" vert="horz" lIns="91440" tIns="45720" rIns="91440" bIns="45720">
+          <a:bodyPr vert="horz" lIns="91440" tIns="45720" rIns="91440" bIns="45720">
             <a:normAutofit/>
           </a:bodyPr>
-          <a:lstStyle xmlns:a="http://schemas.openxmlformats.org/drawingml/2006/main"/>
-          <a:p xmlns:a="http://schemas.openxmlformats.org/drawingml/2006/main">
+          <a:lstStyle/>
+          <a:p>
             <a:pPr lvl="0">
               <a:buNone/>
             </a:pPr>
@@ -3616,7 +3473,7 @@
               <a:t>Click to edit Master text styles</a:t>
             </a:r>
           </a:p>
-          <a:p xmlns:a="http://schemas.openxmlformats.org/drawingml/2006/main">
+          <a:p>
             <a:pPr lvl="1">
               <a:buNone/>
             </a:pPr>
@@ -3624,7 +3481,7 @@
               <a:t>Second level</a:t>
             </a:r>
           </a:p>
-          <a:p xmlns:a="http://schemas.openxmlformats.org/drawingml/2006/main">
+          <a:p>
             <a:pPr lvl="2">
               <a:buNone/>
             </a:pPr>
@@ -3632,7 +3489,7 @@
               <a:t>Third level</a:t>
             </a:r>
           </a:p>
-          <a:p xmlns:a="http://schemas.openxmlformats.org/drawingml/2006/main">
+          <a:p>
             <a:pPr lvl="3">
               <a:buNone/>
             </a:pPr>
@@ -3640,45 +3497,44 @@
               <a:t>Fourth level</a:t>
             </a:r>
           </a:p>
-          <a:p xmlns:a="http://schemas.openxmlformats.org/drawingml/2006/main">
+          <a:p>
             <a:pPr lvl="4">
               <a:buNone/>
             </a:pPr>
             <a:r>
               <a:t>Fifth level</a:t>
             </a:r>
-            <a:endParaRPr/>
           </a:p>
         </p:txBody>
       </p:sp>
       <p:sp>
         <p:nvSpPr>
           <p:cNvPr id="4" name="Date Placeholder 3">
-            <a:extLst xmlns:a="http://schemas.openxmlformats.org/drawingml/2006/main">
+            <a:extLst>
               <a:ext uri="{FF2B5EF4-FFF2-40B4-BE49-F238E27FC236}">
                 <a16:creationId xmlns:a16="http://schemas.microsoft.com/office/drawing/2014/main" id="{EDF6EFA3-0111-31E5-4E51-7B8F9DEA332C}"/>
               </a:ext>
             </a:extLst>
           </p:cNvPr>
           <p:cNvSpPr>
-            <a:spLocks xmlns:a="http://schemas.openxmlformats.org/drawingml/2006/main" noGrp="1"/>
+            <a:spLocks noGrp="1"/>
           </p:cNvSpPr>
           <p:nvPr>
             <p:ph type="dt" idx="2"/>
           </p:nvPr>
         </p:nvSpPr>
         <p:spPr>
-          <a:xfrm xmlns:a="http://schemas.openxmlformats.org/drawingml/2006/main">
+          <a:xfrm>
             <a:off x="838200" y="6356350"/>
             <a:ext cx="2743200" cy="365125"/>
           </a:xfrm>
-          <a:prstGeom xmlns:a="http://schemas.openxmlformats.org/drawingml/2006/main" prst="rect">
+          <a:prstGeom prst="rect">
             <a:avLst/>
           </a:prstGeom>
         </p:spPr>
         <p:txBody>
-          <a:bodyPr xmlns:a="http://schemas.openxmlformats.org/drawingml/2006/main" vert="horz" lIns="91440" tIns="45720" rIns="91440" bIns="45720" anchor="ctr"/>
-          <a:lstStyle xmlns:a="http://schemas.openxmlformats.org/drawingml/2006/main">
+          <a:bodyPr vert="horz" lIns="91440" tIns="45720" rIns="91440" bIns="45720" anchor="ctr"/>
+          <a:lstStyle>
             <a:lvl1pPr algn="l">
               <a:buNone/>
               <a:defRPr sz="1200">
@@ -3690,9 +3546,9 @@
               </a:defRPr>
             </a:lvl1pPr>
           </a:lstStyle>
-          <a:p xmlns:a="http://schemas.openxmlformats.org/drawingml/2006/main">
+          <a:p>
             <a:fld id="{EDB99004-FBBF-4BCC-9BC3-88F554ADE514}" type="datetimeFigureOut">
-              <a:t>09/10/2026</a:t>
+              <a:t>15-Oct-26</a:t>
             </a:fld>
             <a:endParaRPr/>
           </a:p>
@@ -3701,31 +3557,31 @@
       <p:sp>
         <p:nvSpPr>
           <p:cNvPr id="5" name="Footer Placeholder 4">
-            <a:extLst xmlns:a="http://schemas.openxmlformats.org/drawingml/2006/main">
+            <a:extLst>
               <a:ext uri="{FF2B5EF4-FFF2-40B4-BE49-F238E27FC236}">
                 <a16:creationId xmlns:a16="http://schemas.microsoft.com/office/drawing/2014/main" id="{C3804E89-7CB4-43E2-759A-8B18BC095A8F}"/>
               </a:ext>
             </a:extLst>
           </p:cNvPr>
           <p:cNvSpPr>
-            <a:spLocks xmlns:a="http://schemas.openxmlformats.org/drawingml/2006/main" noGrp="1"/>
+            <a:spLocks noGrp="1"/>
           </p:cNvSpPr>
           <p:nvPr>
             <p:ph type="ftr" idx="3"/>
           </p:nvPr>
         </p:nvSpPr>
         <p:spPr>
-          <a:xfrm xmlns:a="http://schemas.openxmlformats.org/drawingml/2006/main">
+          <a:xfrm>
             <a:off x="4038600" y="6356350"/>
             <a:ext cx="4114800" cy="365125"/>
           </a:xfrm>
-          <a:prstGeom xmlns:a="http://schemas.openxmlformats.org/drawingml/2006/main" prst="rect">
+          <a:prstGeom prst="rect">
             <a:avLst/>
           </a:prstGeom>
         </p:spPr>
         <p:txBody>
-          <a:bodyPr xmlns:a="http://schemas.openxmlformats.org/drawingml/2006/main" vert="horz" lIns="91440" tIns="45720" rIns="91440" bIns="45720" anchor="ctr"/>
-          <a:lstStyle xmlns:a="http://schemas.openxmlformats.org/drawingml/2006/main">
+          <a:bodyPr vert="horz" lIns="91440" tIns="45720" rIns="91440" bIns="45720" anchor="ctr"/>
+          <a:lstStyle>
             <a:lvl1pPr algn="ctr">
               <a:buNone/>
               <a:defRPr sz="1200">
@@ -3737,7 +3593,7 @@
               </a:defRPr>
             </a:lvl1pPr>
           </a:lstStyle>
-          <a:p xmlns:a="http://schemas.openxmlformats.org/drawingml/2006/main">
+          <a:p>
             <a:endParaRPr/>
           </a:p>
         </p:txBody>
@@ -3745,31 +3601,31 @@
       <p:sp>
         <p:nvSpPr>
           <p:cNvPr id="6" name="Slide Number Placeholder 5">
-            <a:extLst xmlns:a="http://schemas.openxmlformats.org/drawingml/2006/main">
+            <a:extLst>
               <a:ext uri="{FF2B5EF4-FFF2-40B4-BE49-F238E27FC236}">
                 <a16:creationId xmlns:a16="http://schemas.microsoft.com/office/drawing/2014/main" id="{013A3C9D-A059-CF8F-49C2-BF85966941AF}"/>
               </a:ext>
             </a:extLst>
           </p:cNvPr>
           <p:cNvSpPr>
-            <a:spLocks xmlns:a="http://schemas.openxmlformats.org/drawingml/2006/main" noGrp="1"/>
+            <a:spLocks noGrp="1"/>
           </p:cNvSpPr>
           <p:nvPr>
             <p:ph type="sldNum" idx="4"/>
           </p:nvPr>
         </p:nvSpPr>
         <p:spPr>
-          <a:xfrm xmlns:a="http://schemas.openxmlformats.org/drawingml/2006/main">
+          <a:xfrm>
             <a:off x="8610600" y="6356350"/>
             <a:ext cx="2743200" cy="365125"/>
           </a:xfrm>
-          <a:prstGeom xmlns:a="http://schemas.openxmlformats.org/drawingml/2006/main" prst="rect">
+          <a:prstGeom prst="rect">
             <a:avLst/>
           </a:prstGeom>
         </p:spPr>
         <p:txBody>
-          <a:bodyPr xmlns:a="http://schemas.openxmlformats.org/drawingml/2006/main" vert="horz" lIns="91440" tIns="45720" rIns="91440" bIns="45720" anchor="ctr"/>
-          <a:lstStyle xmlns:a="http://schemas.openxmlformats.org/drawingml/2006/main">
+          <a:bodyPr vert="horz" lIns="91440" tIns="45720" rIns="91440" bIns="45720" anchor="ctr"/>
+          <a:lstStyle>
             <a:lvl1pPr algn="r">
               <a:buNone/>
               <a:defRPr sz="1200">
@@ -3781,7 +3637,7 @@
               </a:defRPr>
             </a:lvl1pPr>
           </a:lstStyle>
-          <a:p xmlns:a="http://schemas.openxmlformats.org/drawingml/2006/main">
+          <a:p>
             <a:fld id="{3721C89F-AE7A-4C3B-889F-FA429D0A7F97}" type="slidenum">
               <a:t>‹#›</a:t>
             </a:fld>
@@ -3793,21 +3649,21 @@
   </p:cSld>
   <p:clrMap bg1="lt1" tx1="dk1" bg2="lt2" tx2="dk2" accent1="accent1" accent2="accent2" accent3="accent3" accent4="accent4" accent5="accent5" accent6="accent6" hlink="hlink" folHlink="folHlink"/>
   <p:sldLayoutIdLst>
-    <p:sldLayoutId xmlns:r="http://schemas.openxmlformats.org/officeDocument/2006/relationships" id="2147483649" r:id="R6bd529c95f5b4c0f"/>
-    <p:sldLayoutId xmlns:r="http://schemas.openxmlformats.org/officeDocument/2006/relationships" id="2147483650" r:id="R9cfa10d9c13d40fe"/>
-    <p:sldLayoutId xmlns:r="http://schemas.openxmlformats.org/officeDocument/2006/relationships" id="2147483651" r:id="R112dffe97caf4319"/>
-    <p:sldLayoutId xmlns:r="http://schemas.openxmlformats.org/officeDocument/2006/relationships" id="2147483652" r:id="R877a0f3e5ab84f84"/>
-    <p:sldLayoutId xmlns:r="http://schemas.openxmlformats.org/officeDocument/2006/relationships" id="2147483653" r:id="Rd7f3e64cb09a42f7"/>
-    <p:sldLayoutId xmlns:r="http://schemas.openxmlformats.org/officeDocument/2006/relationships" id="2147483654" r:id="Rbcdc0e0bc59c484f"/>
-    <p:sldLayoutId xmlns:r="http://schemas.openxmlformats.org/officeDocument/2006/relationships" id="2147483655" r:id="Rff9fd20f84434f40"/>
-    <p:sldLayoutId xmlns:r="http://schemas.openxmlformats.org/officeDocument/2006/relationships" id="2147483656" r:id="Rfa96d75651bd491f"/>
-    <p:sldLayoutId xmlns:r="http://schemas.openxmlformats.org/officeDocument/2006/relationships" id="2147483657" r:id="Rfd046b1242f24a11"/>
-    <p:sldLayoutId xmlns:r="http://schemas.openxmlformats.org/officeDocument/2006/relationships" id="2147483658" r:id="R359cf2f2606c468f"/>
-    <p:sldLayoutId xmlns:r="http://schemas.openxmlformats.org/officeDocument/2006/relationships" id="2147483659" r:id="R8342f8a9a760458e"/>
+    <p:sldLayoutId id="2147483649" r:id="rId1"/>
+    <p:sldLayoutId id="2147483650" r:id="rId2"/>
+    <p:sldLayoutId id="2147483651" r:id="rId3"/>
+    <p:sldLayoutId id="2147483652" r:id="rId4"/>
+    <p:sldLayoutId id="2147483653" r:id="rId5"/>
+    <p:sldLayoutId id="2147483654" r:id="rId6"/>
+    <p:sldLayoutId id="2147483655" r:id="rId7"/>
+    <p:sldLayoutId id="2147483656" r:id="rId8"/>
+    <p:sldLayoutId id="2147483657" r:id="rId9"/>
+    <p:sldLayoutId id="2147483658" r:id="rId10"/>
+    <p:sldLayoutId id="2147483659" r:id="rId11"/>
   </p:sldLayoutIdLst>
   <p:txStyles>
     <p:titleStyle>
-      <a:lvl1pPr xmlns:a="http://schemas.openxmlformats.org/drawingml/2006/main" algn="l" defTabSz="914400">
+      <a:lvl1pPr algn="l" defTabSz="914400">
         <a:lnSpc>
           <a:spcPct val="90000"/>
         </a:lnSpc>
@@ -3826,7 +3682,7 @@
       </a:lvl1pPr>
     </p:titleStyle>
     <p:bodyStyle>
-      <a:lvl1pPr xmlns:a="http://schemas.openxmlformats.org/drawingml/2006/main" marL="228600" indent="-228600" algn="l" defTabSz="914400">
+      <a:lvl1pPr marL="228600" indent="-228600" algn="l" defTabSz="914400">
         <a:lnSpc>
           <a:spcPct val="90000"/>
         </a:lnSpc>
@@ -3844,7 +3700,7 @@
           <a:cs typeface="+mn-lt"/>
         </a:defRPr>
       </a:lvl1pPr>
-      <a:lvl2pPr xmlns:a="http://schemas.openxmlformats.org/drawingml/2006/main" marL="685800" indent="-228600" algn="l" defTabSz="914400">
+      <a:lvl2pPr marL="685800" indent="-228600" algn="l" defTabSz="914400">
         <a:lnSpc>
           <a:spcPct val="90000"/>
         </a:lnSpc>
@@ -3862,7 +3718,7 @@
           <a:cs typeface="+mn-lt"/>
         </a:defRPr>
       </a:lvl2pPr>
-      <a:lvl3pPr xmlns:a="http://schemas.openxmlformats.org/drawingml/2006/main" marL="1143000" indent="-228600" algn="l" defTabSz="914400">
+      <a:lvl3pPr marL="1143000" indent="-228600" algn="l" defTabSz="914400">
         <a:lnSpc>
           <a:spcPct val="90000"/>
         </a:lnSpc>
@@ -3880,7 +3736,7 @@
           <a:cs typeface="+mn-lt"/>
         </a:defRPr>
       </a:lvl3pPr>
-      <a:lvl4pPr xmlns:a="http://schemas.openxmlformats.org/drawingml/2006/main" marL="1600200" indent="-228600" algn="l" defTabSz="914400">
+      <a:lvl4pPr marL="1600200" indent="-228600" algn="l" defTabSz="914400">
         <a:lnSpc>
           <a:spcPct val="90000"/>
         </a:lnSpc>
@@ -3898,7 +3754,7 @@
           <a:cs typeface="+mn-lt"/>
         </a:defRPr>
       </a:lvl4pPr>
-      <a:lvl5pPr xmlns:a="http://schemas.openxmlformats.org/drawingml/2006/main" marL="2057400" indent="-228600" algn="l" defTabSz="914400">
+      <a:lvl5pPr marL="2057400" indent="-228600" algn="l" defTabSz="914400">
         <a:lnSpc>
           <a:spcPct val="90000"/>
         </a:lnSpc>
@@ -3916,7 +3772,7 @@
           <a:cs typeface="+mn-lt"/>
         </a:defRPr>
       </a:lvl5pPr>
-      <a:lvl6pPr xmlns:a="http://schemas.openxmlformats.org/drawingml/2006/main" marL="2514600" indent="-228600" algn="l" defTabSz="914400">
+      <a:lvl6pPr marL="2514600" indent="-228600" algn="l" defTabSz="914400">
         <a:lnSpc>
           <a:spcPct val="90000"/>
         </a:lnSpc>
@@ -3934,7 +3790,7 @@
           <a:cs typeface="+mn-lt"/>
         </a:defRPr>
       </a:lvl6pPr>
-      <a:lvl7pPr xmlns:a="http://schemas.openxmlformats.org/drawingml/2006/main" marL="2971800" indent="-228600" algn="l" defTabSz="914400">
+      <a:lvl7pPr marL="2971800" indent="-228600" algn="l" defTabSz="914400">
         <a:lnSpc>
           <a:spcPct val="90000"/>
         </a:lnSpc>
@@ -3952,7 +3808,7 @@
           <a:cs typeface="+mn-lt"/>
         </a:defRPr>
       </a:lvl7pPr>
-      <a:lvl8pPr xmlns:a="http://schemas.openxmlformats.org/drawingml/2006/main" marL="3429000" indent="-228600" algn="l" defTabSz="914400">
+      <a:lvl8pPr marL="3429000" indent="-228600" algn="l" defTabSz="914400">
         <a:lnSpc>
           <a:spcPct val="90000"/>
         </a:lnSpc>
@@ -3970,7 +3826,7 @@
           <a:cs typeface="+mn-lt"/>
         </a:defRPr>
       </a:lvl8pPr>
-      <a:lvl9pPr xmlns:a="http://schemas.openxmlformats.org/drawingml/2006/main" marL="3886200" indent="-228600" algn="l" defTabSz="914400">
+      <a:lvl9pPr marL="3886200" indent="-228600" algn="l" defTabSz="914400">
         <a:lnSpc>
           <a:spcPct val="90000"/>
         </a:lnSpc>
@@ -3990,7 +3846,7 @@
       </a:lvl9pPr>
     </p:bodyStyle>
     <p:otherStyle>
-      <a:lvl1pPr xmlns:a="http://schemas.openxmlformats.org/drawingml/2006/main" marL="0" algn="l" defTabSz="914400">
+      <a:lvl1pPr marL="0" algn="l" defTabSz="914400">
         <a:buNone/>
         <a:defRPr sz="1800" kern="1200">
           <a:solidFill>
@@ -4001,7 +3857,7 @@
           <a:cs typeface="+mn-lt"/>
         </a:defRPr>
       </a:lvl1pPr>
-      <a:lvl2pPr xmlns:a="http://schemas.openxmlformats.org/drawingml/2006/main" marL="457200" algn="l" defTabSz="914400">
+      <a:lvl2pPr marL="457200" algn="l" defTabSz="914400">
         <a:buNone/>
         <a:defRPr sz="1800" kern="1200">
           <a:solidFill>
@@ -4012,7 +3868,7 @@
           <a:cs typeface="+mn-lt"/>
         </a:defRPr>
       </a:lvl2pPr>
-      <a:lvl3pPr xmlns:a="http://schemas.openxmlformats.org/drawingml/2006/main" marL="914400" algn="l" defTabSz="914400">
+      <a:lvl3pPr marL="914400" algn="l" defTabSz="914400">
         <a:buNone/>
         <a:defRPr sz="1800" kern="1200">
           <a:solidFill>
@@ -4023,7 +3879,7 @@
           <a:cs typeface="+mn-lt"/>
         </a:defRPr>
       </a:lvl3pPr>
-      <a:lvl4pPr xmlns:a="http://schemas.openxmlformats.org/drawingml/2006/main" marL="1371600" algn="l" defTabSz="914400">
+      <a:lvl4pPr marL="1371600" algn="l" defTabSz="914400">
         <a:buNone/>
         <a:defRPr sz="1800" kern="1200">
           <a:solidFill>
@@ -4034,7 +3890,7 @@
           <a:cs typeface="+mn-lt"/>
         </a:defRPr>
       </a:lvl4pPr>
-      <a:lvl5pPr xmlns:a="http://schemas.openxmlformats.org/drawingml/2006/main" marL="1828800" algn="l" defTabSz="914400">
+      <a:lvl5pPr marL="1828800" algn="l" defTabSz="914400">
         <a:buNone/>
         <a:defRPr sz="1800" kern="1200">
           <a:solidFill>
@@ -4045,7 +3901,7 @@
           <a:cs typeface="+mn-lt"/>
         </a:defRPr>
       </a:lvl5pPr>
-      <a:lvl6pPr xmlns:a="http://schemas.openxmlformats.org/drawingml/2006/main" marL="2286000" algn="l" defTabSz="914400">
+      <a:lvl6pPr marL="2286000" algn="l" defTabSz="914400">
         <a:buNone/>
         <a:defRPr sz="1800" kern="1200">
           <a:solidFill>
@@ -4056,7 +3912,7 @@
           <a:cs typeface="+mn-lt"/>
         </a:defRPr>
       </a:lvl6pPr>
-      <a:lvl7pPr xmlns:a="http://schemas.openxmlformats.org/drawingml/2006/main" marL="2743200" algn="l" defTabSz="914400">
+      <a:lvl7pPr marL="2743200" algn="l" defTabSz="914400">
         <a:buNone/>
         <a:defRPr sz="1800" kern="1200">
           <a:solidFill>
@@ -4067,7 +3923,7 @@
           <a:cs typeface="+mn-lt"/>
         </a:defRPr>
       </a:lvl7pPr>
-      <a:lvl8pPr xmlns:a="http://schemas.openxmlformats.org/drawingml/2006/main" marL="3200400" algn="l" defTabSz="914400">
+      <a:lvl8pPr marL="3200400" algn="l" defTabSz="914400">
         <a:buNone/>
         <a:defRPr sz="1800" kern="1200">
           <a:solidFill>
@@ -4078,7 +3934,7 @@
           <a:cs typeface="+mn-lt"/>
         </a:defRPr>
       </a:lvl8pPr>
-      <a:lvl9pPr xmlns:a="http://schemas.openxmlformats.org/drawingml/2006/main" marL="3657600" algn="l" defTabSz="914400">
+      <a:lvl9pPr marL="3657600" algn="l" defTabSz="914400">
         <a:buNone/>
         <a:defRPr sz="1800" kern="1200">
           <a:solidFill>
@@ -4094,299 +3950,15 @@
 </p:sldMaster>
 </file>
 
-<file path=ppt/slideMasters/theme/theme2.xml><?xml version="1.0" encoding="utf-8"?>
-<a:theme xmlns:a="http://schemas.openxmlformats.org/drawingml/2006/main" name="Office Theme">
-  <a:themeElements>
-    <a:clrScheme name="Red Violet">
-      <a:dk1>
-        <a:sysClr val="windowText" lastClr="000000"/>
-      </a:dk1>
-      <a:lt1>
-        <a:sysClr val="window" lastClr="FFFFFF"/>
-      </a:lt1>
-      <a:dk2>
-        <a:srgbClr val="454551"/>
-      </a:dk2>
-      <a:lt2>
-        <a:srgbClr val="D8D9DC"/>
-      </a:lt2>
-      <a:accent1>
-        <a:srgbClr val="E32D91"/>
-      </a:accent1>
-      <a:accent2>
-        <a:srgbClr val="C830CC"/>
-      </a:accent2>
-      <a:accent3>
-        <a:srgbClr val="4EA6DC"/>
-      </a:accent3>
-      <a:accent4>
-        <a:srgbClr val="4775E7"/>
-      </a:accent4>
-      <a:accent5>
-        <a:srgbClr val="8971E1"/>
-      </a:accent5>
-      <a:accent6>
-        <a:srgbClr val="D54773"/>
-      </a:accent6>
-      <a:hlink>
-        <a:srgbClr val="6B9F25"/>
-      </a:hlink>
-      <a:folHlink>
-        <a:srgbClr val="8C8C8C"/>
-      </a:folHlink>
-    </a:clrScheme>
-    <a:fontScheme name="Office">
-      <a:majorFont>
-        <a:latin typeface="Calibri Light"/>
-        <a:ea typeface=""/>
-        <a:cs typeface=""/>
-        <a:font script="Jpan" typeface="游ゴシック Light"/>
-        <a:font script="Hang" typeface="맑은 고딕"/>
-        <a:font script="Hans" typeface="等线 Light"/>
-        <a:font script="Hant" typeface="新細明體"/>
-        <a:font script="Arab" typeface="Times New Roman"/>
-        <a:font script="Hebr" typeface="Times New Roman"/>
-        <a:font script="Thai" typeface="Angsana New"/>
-        <a:font script="Ethi" typeface="Nyala"/>
-        <a:font script="Beng" typeface="Vrinda"/>
-        <a:font script="Gujr" typeface="Shruti"/>
-        <a:font script="Khmr" typeface="MoolBoran"/>
-        <a:font script="Knda" typeface="Tunga"/>
-        <a:font script="Guru" typeface="Raavi"/>
-        <a:font script="Cans" typeface="Euphemia"/>
-        <a:font script="Cher" typeface="Plantagenet Cherokee"/>
-        <a:font script="Yiii" typeface="Microsoft Yi Baiti"/>
-        <a:font script="Tibt" typeface="Microsoft Himalaya"/>
-        <a:font script="Thaa" typeface="MV Boli"/>
-        <a:font script="Deva" typeface="Mangal"/>
-        <a:font script="Telu" typeface="Gautami"/>
-        <a:font script="Taml" typeface="Latha"/>
-        <a:font script="Syrc" typeface="Estrangelo Edessa"/>
-        <a:font script="Orya" typeface="Kalinga"/>
-        <a:font script="Mlym" typeface="Kartika"/>
-        <a:font script="Laoo" typeface="DokChampa"/>
-        <a:font script="Sinh" typeface="Iskoola Pota"/>
-        <a:font script="Mong" typeface="Mongolian Baiti"/>
-        <a:font script="Viet" typeface="Times New Roman"/>
-        <a:font script="Uigh" typeface="Microsoft Uighur"/>
-        <a:font script="Geor" typeface="Sylfaen"/>
-        <a:font script="Armn" typeface="Arial"/>
-        <a:font script="Bugi" typeface="Leelawadee UI"/>
-        <a:font script="Bopo" typeface="Microsoft JhengHei"/>
-        <a:font script="Java" typeface="Javanese Text"/>
-        <a:font script="Lisu" typeface="Segoe UI"/>
-        <a:font script="Mymr" typeface="Myanmar Text"/>
-        <a:font script="Nkoo" typeface="Ebrima"/>
-        <a:font script="Olck" typeface="Nirmala UI"/>
-        <a:font script="Osma" typeface="Ebrima"/>
-        <a:font script="Phag" typeface="Phagspa"/>
-        <a:font script="Syrn" typeface="Estrangelo Edessa"/>
-        <a:font script="Syrj" typeface="Estrangelo Edessa"/>
-        <a:font script="Syre" typeface="Estrangelo Edessa"/>
-        <a:font script="Sora" typeface="Nirmala UI"/>
-        <a:font script="Tale" typeface="Microsoft Tai Le"/>
-        <a:font script="Talu" typeface="Microsoft New Tai Lue"/>
-        <a:font script="Tfng" typeface="Ebrima"/>
-      </a:majorFont>
-      <a:minorFont>
-        <a:latin typeface="Calibri"/>
-        <a:ea typeface=""/>
-        <a:cs typeface=""/>
-        <a:font script="Jpan" typeface="游ゴシック"/>
-        <a:font script="Hang" typeface="맑은 고딕"/>
-        <a:font script="Hans" typeface="等线"/>
-        <a:font script="Hant" typeface="新細明體"/>
-        <a:font script="Arab" typeface="Arial"/>
-        <a:font script="Hebr" typeface="Arial"/>
-        <a:font script="Thai" typeface="Cordia New"/>
-        <a:font script="Ethi" typeface="Nyala"/>
-        <a:font script="Beng" typeface="Vrinda"/>
-        <a:font script="Gujr" typeface="Shruti"/>
-        <a:font script="Khmr" typeface="DaunPenh"/>
-        <a:font script="Knda" typeface="Tunga"/>
-        <a:font script="Guru" typeface="Raavi"/>
-        <a:font script="Cans" typeface="Euphemia"/>
-        <a:font script="Cher" typeface="Plantagenet Cherokee"/>
-        <a:font script="Yiii" typeface="Microsoft Yi Baiti"/>
-        <a:font script="Tibt" typeface="Microsoft Himalaya"/>
-        <a:font script="Thaa" typeface="MV Boli"/>
-        <a:font script="Deva" typeface="Mangal"/>
-        <a:font script="Telu" typeface="Gautami"/>
-        <a:font script="Taml" typeface="Latha"/>
-        <a:font script="Syrc" typeface="Estrangelo Edessa"/>
-        <a:font script="Orya" typeface="Kalinga"/>
-        <a:font script="Mlym" typeface="Kartika"/>
-        <a:font script="Laoo" typeface="DokChampa"/>
-        <a:font script="Sinh" typeface="Iskoola Pota"/>
-        <a:font script="Mong" typeface="Mongolian Baiti"/>
-        <a:font script="Viet" typeface="Arial"/>
-        <a:font script="Uigh" typeface="Microsoft Uighur"/>
-        <a:font script="Geor" typeface="Sylfaen"/>
-        <a:font script="Armn" typeface="Arial"/>
-        <a:font script="Bugi" typeface="Leelawadee UI"/>
-        <a:font script="Bopo" typeface="Microsoft JhengHei"/>
-        <a:font script="Java" typeface="Javanese Text"/>
-        <a:font script="Lisu" typeface="Segoe UI"/>
-        <a:font script="Mymr" typeface="Myanmar Text"/>
-        <a:font script="Nkoo" typeface="Ebrima"/>
-        <a:font script="Olck" typeface="Nirmala UI"/>
-        <a:font script="Osma" typeface="Ebrima"/>
-        <a:font script="Phag" typeface="Phagspa"/>
-        <a:font script="Syrn" typeface="Estrangelo Edessa"/>
-        <a:font script="Syrj" typeface="Estrangelo Edessa"/>
-        <a:font script="Syre" typeface="Estrangelo Edessa"/>
-        <a:font script="Sora" typeface="Nirmala UI"/>
-        <a:font script="Tale" typeface="Microsoft Tai Le"/>
-        <a:font script="Talu" typeface="Microsoft New Tai Lue"/>
-        <a:font script="Tfng" typeface="Ebrima"/>
-      </a:minorFont>
-    </a:fontScheme>
-    <a:fmtScheme name="Red Violet">
-      <a:fillStyleLst>
-        <a:solidFill>
-          <a:schemeClr val="phClr"/>
-        </a:solidFill>
-        <a:gradFill rotWithShape="1">
-          <a:gsLst>
-            <a:gs pos="0">
-              <a:schemeClr val="phClr">
-                <a:tint val="67000"/>
-                <a:lumMod val="110000"/>
-                <a:satMod val="105000"/>
-              </a:schemeClr>
-            </a:gs>
-            <a:gs pos="50000">
-              <a:schemeClr val="phClr">
-                <a:tint val="73000"/>
-                <a:lumMod val="105000"/>
-                <a:satMod val="103000"/>
-              </a:schemeClr>
-            </a:gs>
-            <a:gs pos="100000">
-              <a:schemeClr val="phClr">
-                <a:tint val="81000"/>
-                <a:lumMod val="105000"/>
-                <a:satMod val="109000"/>
-              </a:schemeClr>
-            </a:gs>
-          </a:gsLst>
-          <a:lin ang="5400000" scaled="0"/>
-        </a:gradFill>
-        <a:gradFill rotWithShape="1">
-          <a:gsLst>
-            <a:gs pos="0">
-              <a:schemeClr val="phClr">
-                <a:tint val="94000"/>
-                <a:lumMod val="102000"/>
-                <a:satMod val="103000"/>
-              </a:schemeClr>
-            </a:gs>
-            <a:gs pos="50000">
-              <a:schemeClr val="phClr">
-                <a:shade val="100000"/>
-                <a:lumMod val="100000"/>
-                <a:satMod val="110000"/>
-              </a:schemeClr>
-            </a:gs>
-            <a:gs pos="100000">
-              <a:schemeClr val="phClr">
-                <a:shade val="78000"/>
-                <a:lumMod val="99000"/>
-                <a:satMod val="120000"/>
-              </a:schemeClr>
-            </a:gs>
-          </a:gsLst>
-          <a:lin ang="5400000" scaled="0"/>
-        </a:gradFill>
-      </a:fillStyleLst>
-      <a:lnStyleLst>
-        <a:ln w="6350">
-          <a:solidFill>
-            <a:schemeClr val="phClr"/>
-          </a:solidFill>
-          <a:prstDash val="solid"/>
-        </a:ln>
-        <a:ln w="12700">
-          <a:solidFill>
-            <a:schemeClr val="phClr"/>
-          </a:solidFill>
-          <a:prstDash val="solid"/>
-        </a:ln>
-        <a:ln w="19050">
-          <a:solidFill>
-            <a:schemeClr val="phClr"/>
-          </a:solidFill>
-          <a:prstDash val="solid"/>
-        </a:ln>
-      </a:lnStyleLst>
-      <a:effectStyleLst>
-        <a:effectStyle>
-          <a:effectLst/>
-        </a:effectStyle>
-        <a:effectStyle>
-          <a:effectLst/>
-        </a:effectStyle>
-        <a:effectStyle>
-          <a:effectLst>
-            <a:outerShdw blurRad="57150" dist="19050" dir="5400000" algn="ctr" rotWithShape="0">
-              <a:srgbClr val="000000">
-                <a:alpha val="63000"/>
-              </a:srgbClr>
-            </a:outerShdw>
-          </a:effectLst>
-        </a:effectStyle>
-      </a:effectStyleLst>
-      <a:bgFillStyleLst>
-        <a:solidFill>
-          <a:schemeClr val="phClr"/>
-        </a:solidFill>
-        <a:solidFill>
-          <a:schemeClr val="phClr">
-            <a:tint val="95000"/>
-            <a:satMod val="170000"/>
-          </a:schemeClr>
-        </a:solidFill>
-        <a:gradFill rotWithShape="1">
-          <a:gsLst>
-            <a:gs pos="0">
-              <a:schemeClr val="phClr">
-                <a:tint val="93000"/>
-                <a:shade val="98000"/>
-                <a:lumMod val="102000"/>
-                <a:satMod val="150000"/>
-              </a:schemeClr>
-            </a:gs>
-            <a:gs pos="50000">
-              <a:schemeClr val="phClr">
-                <a:tint val="98000"/>
-                <a:shade val="90000"/>
-                <a:lumMod val="103000"/>
-                <a:satMod val="130000"/>
-              </a:schemeClr>
-            </a:gs>
-            <a:gs pos="100000">
-              <a:schemeClr val="phClr">
-                <a:shade val="63000"/>
-                <a:satMod val="120000"/>
-              </a:schemeClr>
-            </a:gs>
-          </a:gsLst>
-          <a:lin ang="5400000" scaled="0"/>
-        </a:gradFill>
-      </a:bgFillStyleLst>
-    </a:fmtScheme>
-  </a:themeElements>
-</a:theme>
-</file>
-
 <file path=ppt/slides/slide1.xml><?xml version="1.0" encoding="utf-8"?>
-<p:sld xmlns:p="http://schemas.openxmlformats.org/presentationml/2006/main">
+<p:sld xmlns:a="http://schemas.openxmlformats.org/drawingml/2006/main" xmlns:r="http://schemas.openxmlformats.org/officeDocument/2006/relationships" xmlns:p="http://schemas.openxmlformats.org/presentationml/2006/main">
   <p:cSld>
     <p:bg>
       <p:bgPr>
-        <a:solidFill xmlns:a="http://schemas.openxmlformats.org/drawingml/2006/main">
+        <a:solidFill>
           <a:schemeClr val="bg1"/>
         </a:solidFill>
+        <a:effectLst/>
       </p:bgPr>
     </p:bg>
     <p:spTree>
@@ -4396,54 +3968,59 @@
         <p:nvPr/>
       </p:nvGrpSpPr>
       <p:grpSpPr>
-        <a:xfrm xmlns:a="http://schemas.openxmlformats.org/drawingml/2006/main"/>
+        <a:xfrm>
+          <a:off x="0" y="0"/>
+          <a:ext cx="0" cy="0"/>
+          <a:chOff x="0" y="0"/>
+          <a:chExt cx="0" cy="0"/>
+        </a:xfrm>
       </p:grpSpPr>
       <p:sp useBgFill="1">
         <p:nvSpPr>
           <p:cNvPr id="8" name="Rectangle 7">
-            <a:extLst xmlns:a="http://schemas.openxmlformats.org/drawingml/2006/main">
+            <a:extLst>
               <a:ext uri="{FF2B5EF4-FFF2-40B4-BE49-F238E27FC236}">
                 <a16:creationId xmlns:a16="http://schemas.microsoft.com/office/drawing/2014/main" id="{4522B21E-B2B9-4C72-9A71-C87EFD137480}"/>
               </a:ext>
             </a:extLst>
           </p:cNvPr>
           <p:cNvSpPr>
-            <a:spLocks xmlns:a="http://schemas.openxmlformats.org/drawingml/2006/main" noGrp="1"/>
+            <a:spLocks noGrp="1"/>
           </p:cNvSpPr>
           <p:nvPr/>
         </p:nvSpPr>
         <p:spPr>
-          <a:xfrm xmlns:a="http://schemas.openxmlformats.org/drawingml/2006/main">
+          <a:xfrm>
             <a:off x="0" y="0"/>
             <a:ext cx="12191999" cy="6857365"/>
           </a:xfrm>
-          <a:prstGeom xmlns:a="http://schemas.openxmlformats.org/drawingml/2006/main" prst="rect">
+          <a:prstGeom prst="rect">
             <a:avLst/>
           </a:prstGeom>
-          <a:ln xmlns:a="http://schemas.openxmlformats.org/drawingml/2006/main">
+          <a:ln>
             <a:noFill/>
           </a:ln>
         </p:spPr>
         <p:style>
-          <a:lnRef xmlns:a="http://schemas.openxmlformats.org/drawingml/2006/main" idx="2">
+          <a:lnRef idx="2">
             <a:schemeClr val="accent1">
               <a:shade val="50000"/>
             </a:schemeClr>
           </a:lnRef>
-          <a:fillRef xmlns:a="http://schemas.openxmlformats.org/drawingml/2006/main" idx="1">
+          <a:fillRef idx="1">
             <a:schemeClr val="accent1"/>
           </a:fillRef>
-          <a:effectRef xmlns:a="http://schemas.openxmlformats.org/drawingml/2006/main" idx="0">
+          <a:effectRef idx="0">
             <a:schemeClr val="accent1"/>
           </a:effectRef>
-          <a:fontRef xmlns:a="http://schemas.openxmlformats.org/drawingml/2006/main" idx="minor">
+          <a:fontRef idx="minor">
             <a:schemeClr val="lt1"/>
           </a:fontRef>
         </p:style>
         <p:txBody>
-          <a:bodyPr xmlns:a="http://schemas.openxmlformats.org/drawingml/2006/main" anchor="ctr"/>
-          <a:lstStyle xmlns:a="http://schemas.openxmlformats.org/drawingml/2006/main"/>
-          <a:p xmlns:a="http://schemas.openxmlformats.org/drawingml/2006/main">
+          <a:bodyPr anchor="ctr"/>
+          <a:lstStyle/>
+          <a:p>
             <a:pPr algn="ctr">
               <a:buNone/>
             </a:pPr>
@@ -4454,52 +4031,52 @@
       <p:sp>
         <p:nvSpPr>
           <p:cNvPr id="10" name="Rectangle 9">
-            <a:extLst xmlns:a="http://schemas.openxmlformats.org/drawingml/2006/main">
+            <a:extLst>
               <a:ext uri="{FF2B5EF4-FFF2-40B4-BE49-F238E27FC236}">
                 <a16:creationId xmlns:a16="http://schemas.microsoft.com/office/drawing/2014/main" id="{5EB7D2A2-F448-44D4-938C-DC84CBCB3B1E}"/>
               </a:ext>
             </a:extLst>
           </p:cNvPr>
           <p:cNvSpPr>
-            <a:spLocks xmlns:a="http://schemas.openxmlformats.org/drawingml/2006/main" noGrp="1"/>
+            <a:spLocks noGrp="1"/>
           </p:cNvSpPr>
           <p:nvPr/>
         </p:nvSpPr>
         <p:spPr>
-          <a:xfrm xmlns:a="http://schemas.openxmlformats.org/drawingml/2006/main">
+          <a:xfrm>
             <a:off x="0" y="2"/>
             <a:ext cx="12192000" cy="4412583"/>
           </a:xfrm>
-          <a:prstGeom xmlns:a="http://schemas.openxmlformats.org/drawingml/2006/main" prst="rect">
+          <a:prstGeom prst="rect">
             <a:avLst/>
           </a:prstGeom>
-          <a:solidFill xmlns:a="http://schemas.openxmlformats.org/drawingml/2006/main">
+          <a:solidFill>
             <a:schemeClr val="accent4"/>
           </a:solidFill>
-          <a:ln xmlns:a="http://schemas.openxmlformats.org/drawingml/2006/main">
+          <a:ln>
             <a:noFill/>
           </a:ln>
         </p:spPr>
         <p:style>
-          <a:lnRef xmlns:a="http://schemas.openxmlformats.org/drawingml/2006/main" idx="2">
+          <a:lnRef idx="2">
             <a:schemeClr val="accent1">
               <a:shade val="50000"/>
             </a:schemeClr>
           </a:lnRef>
-          <a:fillRef xmlns:a="http://schemas.openxmlformats.org/drawingml/2006/main" idx="1">
+          <a:fillRef idx="1">
             <a:schemeClr val="accent1"/>
           </a:fillRef>
-          <a:effectRef xmlns:a="http://schemas.openxmlformats.org/drawingml/2006/main" idx="0">
+          <a:effectRef idx="0">
             <a:schemeClr val="accent1"/>
           </a:effectRef>
-          <a:fontRef xmlns:a="http://schemas.openxmlformats.org/drawingml/2006/main" idx="minor">
+          <a:fontRef idx="minor">
             <a:schemeClr val="lt1"/>
           </a:fontRef>
         </p:style>
         <p:txBody>
-          <a:bodyPr xmlns:a="http://schemas.openxmlformats.org/drawingml/2006/main" anchor="ctr"/>
-          <a:lstStyle xmlns:a="http://schemas.openxmlformats.org/drawingml/2006/main"/>
-          <a:p xmlns:a="http://schemas.openxmlformats.org/drawingml/2006/main">
+          <a:bodyPr anchor="ctr"/>
+          <a:lstStyle/>
+          <a:p>
             <a:pPr algn="ctr">
               <a:buNone/>
             </a:pPr>
@@ -4510,32 +4087,32 @@
       <p:sp>
         <p:nvSpPr>
           <p:cNvPr id="12" name="Rectangle 11">
-            <a:extLst xmlns:a="http://schemas.openxmlformats.org/drawingml/2006/main">
+            <a:extLst>
               <a:ext uri="{FF2B5EF4-FFF2-40B4-BE49-F238E27FC236}">
                 <a16:creationId xmlns:a16="http://schemas.microsoft.com/office/drawing/2014/main" id="{871AEA07-1E14-44B4-8E55-64EF049CD66F}"/>
               </a:ext>
             </a:extLst>
           </p:cNvPr>
           <p:cNvSpPr>
-            <a:spLocks xmlns:a="http://schemas.openxmlformats.org/drawingml/2006/main" noGrp="1"/>
+            <a:spLocks noGrp="1"/>
           </p:cNvSpPr>
           <p:nvPr/>
         </p:nvSpPr>
         <p:spPr>
-          <a:xfrm xmlns:a="http://schemas.openxmlformats.org/drawingml/2006/main">
+          <a:xfrm>
             <a:off x="596464" y="551962"/>
             <a:ext cx="10999072" cy="4618549"/>
           </a:xfrm>
-          <a:prstGeom xmlns:a="http://schemas.openxmlformats.org/drawingml/2006/main" prst="rect">
+          <a:prstGeom prst="rect">
             <a:avLst/>
           </a:prstGeom>
-          <a:solidFill xmlns:a="http://schemas.openxmlformats.org/drawingml/2006/main">
+          <a:solidFill>
             <a:schemeClr val="bg1"/>
           </a:solidFill>
-          <a:ln xmlns:a="http://schemas.openxmlformats.org/drawingml/2006/main">
+          <a:ln>
             <a:noFill/>
           </a:ln>
-          <a:effectLst xmlns:a="http://schemas.openxmlformats.org/drawingml/2006/main">
+          <a:effectLst>
             <a:outerShdw blurRad="139700" dist="127000" dir="5400000" algn="t" rotWithShape="0">
               <a:prstClr val="black">
                 <a:alpha val="15000"/>
@@ -4544,25 +4121,25 @@
           </a:effectLst>
         </p:spPr>
         <p:style>
-          <a:lnRef xmlns:a="http://schemas.openxmlformats.org/drawingml/2006/main" idx="2">
+          <a:lnRef idx="2">
             <a:schemeClr val="accent1">
               <a:shade val="50000"/>
             </a:schemeClr>
           </a:lnRef>
-          <a:fillRef xmlns:a="http://schemas.openxmlformats.org/drawingml/2006/main" idx="1">
+          <a:fillRef idx="1">
             <a:schemeClr val="accent1"/>
           </a:fillRef>
-          <a:effectRef xmlns:a="http://schemas.openxmlformats.org/drawingml/2006/main" idx="0">
+          <a:effectRef idx="0">
             <a:schemeClr val="accent1"/>
           </a:effectRef>
-          <a:fontRef xmlns:a="http://schemas.openxmlformats.org/drawingml/2006/main" idx="minor">
+          <a:fontRef idx="minor">
             <a:schemeClr val="lt1"/>
           </a:fontRef>
         </p:style>
         <p:txBody>
-          <a:bodyPr xmlns:a="http://schemas.openxmlformats.org/drawingml/2006/main" anchor="ctr"/>
-          <a:lstStyle xmlns:a="http://schemas.openxmlformats.org/drawingml/2006/main"/>
-          <a:p xmlns:a="http://schemas.openxmlformats.org/drawingml/2006/main">
+          <a:bodyPr anchor="ctr"/>
+          <a:lstStyle/>
+          <a:p>
             <a:pPr algn="ctr">
               <a:buNone/>
             </a:pPr>
@@ -4573,31 +4150,31 @@
       <p:sp>
         <p:nvSpPr>
           <p:cNvPr id="2" name="Title 1">
-            <a:extLst xmlns:a="http://schemas.openxmlformats.org/drawingml/2006/main">
+            <a:extLst>
               <a:ext uri="{FF2B5EF4-FFF2-40B4-BE49-F238E27FC236}">
                 <a16:creationId xmlns:a16="http://schemas.microsoft.com/office/drawing/2014/main" id="{36571B63-82A4-FC3D-9860-20F38F123861}"/>
               </a:ext>
             </a:extLst>
           </p:cNvPr>
           <p:cNvSpPr>
-            <a:spLocks xmlns:a="http://schemas.openxmlformats.org/drawingml/2006/main" noGrp="1"/>
-          </p:cNvSpPr>
-          <p:nvPr>
-            <p:ph type="ctrTitle" idx="0"/>
+            <a:spLocks noGrp="1"/>
+          </p:cNvSpPr>
+          <p:nvPr>
+            <p:ph type="ctrTitle"/>
           </p:nvPr>
         </p:nvSpPr>
         <p:spPr>
-          <a:xfrm xmlns:a="http://schemas.openxmlformats.org/drawingml/2006/main">
+          <a:xfrm>
             <a:off x="1524000" y="1293338"/>
             <a:ext cx="9144000" cy="3274592"/>
           </a:xfrm>
         </p:spPr>
         <p:txBody>
-          <a:bodyPr xmlns:a="http://schemas.openxmlformats.org/drawingml/2006/main" anchor="ctr">
-            <a:normAutofit fontScale="100000"/>
+          <a:bodyPr anchor="ctr">
+            <a:normAutofit/>
           </a:bodyPr>
-          <a:lstStyle xmlns:a="http://schemas.openxmlformats.org/drawingml/2006/main"/>
-          <a:p xmlns:a="http://schemas.openxmlformats.org/drawingml/2006/main">
+          <a:lstStyle/>
+          <a:p>
             <a:pPr>
               <a:defRPr sz="3825">
                 <a:solidFill>
@@ -4627,7 +4204,7 @@
               </a:solidFill>
             </a:endParaRPr>
           </a:p>
-          <a:p xmlns:a="http://schemas.openxmlformats.org/drawingml/2006/main">
+          <a:p>
             <a:pPr>
               <a:defRPr sz="3825">
                 <a:solidFill>
@@ -4662,31 +4239,31 @@
       <p:sp>
         <p:nvSpPr>
           <p:cNvPr id="3" name="Subtitle 2">
-            <a:extLst xmlns:a="http://schemas.openxmlformats.org/drawingml/2006/main">
+            <a:extLst>
               <a:ext uri="{FF2B5EF4-FFF2-40B4-BE49-F238E27FC236}">
                 <a16:creationId xmlns:a16="http://schemas.microsoft.com/office/drawing/2014/main" id="{4101352E-A170-144A-523B-B61C8AE33873}"/>
               </a:ext>
             </a:extLst>
           </p:cNvPr>
           <p:cNvSpPr>
-            <a:spLocks xmlns:a="http://schemas.openxmlformats.org/drawingml/2006/main" noGrp="1"/>
+            <a:spLocks noGrp="1"/>
           </p:cNvSpPr>
           <p:nvPr>
             <p:ph type="subTitle" idx="1"/>
           </p:nvPr>
         </p:nvSpPr>
         <p:spPr>
-          <a:xfrm xmlns:a="http://schemas.openxmlformats.org/drawingml/2006/main">
+          <a:xfrm>
             <a:off x="1524000" y="5514052"/>
             <a:ext cx="9144000" cy="651910"/>
           </a:xfrm>
         </p:spPr>
         <p:txBody>
-          <a:bodyPr xmlns:a="http://schemas.openxmlformats.org/drawingml/2006/main" anchor="ctr">
+          <a:bodyPr anchor="ctr">
             <a:normAutofit/>
           </a:bodyPr>
-          <a:lstStyle xmlns:a="http://schemas.openxmlformats.org/drawingml/2006/main"/>
-          <a:p xmlns:a="http://schemas.openxmlformats.org/drawingml/2006/main">
+          <a:lstStyle/>
+          <a:p>
             <a:endParaRPr/>
           </a:p>
         </p:txBody>
@@ -4694,45 +4271,52 @@
       <p:sp>
         <p:nvSpPr>
           <p:cNvPr id="14" name="Straight Connector 13">
-            <a:extLst xmlns:a="http://schemas.openxmlformats.org/drawingml/2006/main">
+            <a:extLst>
               <a:ext uri="{FF2B5EF4-FFF2-40B4-BE49-F238E27FC236}">
                 <a16:creationId xmlns:a16="http://schemas.microsoft.com/office/drawing/2014/main" id="{A1AC1523-E1AC-4F39-9B08-B5CD71D4B0FD}"/>
               </a:ext>
             </a:extLst>
           </p:cNvPr>
           <p:cNvSpPr>
-            <a:spLocks xmlns:a="http://schemas.openxmlformats.org/drawingml/2006/main" noGrp="1"/>
+            <a:spLocks noGrp="1"/>
           </p:cNvSpPr>
           <p:nvPr/>
         </p:nvSpPr>
         <p:spPr>
-          <a:xfrm xmlns:a="http://schemas.openxmlformats.org/drawingml/2006/main" flipH="1">
+          <a:xfrm flipH="1">
             <a:off x="596464" y="6354708"/>
             <a:ext cx="11000232" cy="0"/>
           </a:xfrm>
-          <a:prstGeom xmlns:a="http://schemas.openxmlformats.org/drawingml/2006/main" prst="line">
+          <a:prstGeom prst="line">
             <a:avLst/>
           </a:prstGeom>
-          <a:ln xmlns:a="http://schemas.openxmlformats.org/drawingml/2006/main" w="101600">
+          <a:ln w="101600">
             <a:solidFill>
               <a:schemeClr val="accent4"/>
             </a:solidFill>
           </a:ln>
         </p:spPr>
         <p:style>
-          <a:lnRef xmlns:a="http://schemas.openxmlformats.org/drawingml/2006/main" idx="1">
+          <a:lnRef idx="1">
             <a:schemeClr val="accent1"/>
           </a:lnRef>
-          <a:fillRef xmlns:a="http://schemas.openxmlformats.org/drawingml/2006/main" idx="0">
+          <a:fillRef idx="0">
             <a:schemeClr val="accent1"/>
           </a:fillRef>
-          <a:effectRef xmlns:a="http://schemas.openxmlformats.org/drawingml/2006/main" idx="0">
+          <a:effectRef idx="0">
             <a:schemeClr val="accent1"/>
           </a:effectRef>
-          <a:fontRef xmlns:a="http://schemas.openxmlformats.org/drawingml/2006/main" idx="minor">
+          <a:fontRef idx="minor">
             <a:schemeClr val="tx1"/>
           </a:fontRef>
         </p:style>
+        <p:txBody>
+          <a:bodyPr/>
+          <a:lstStyle/>
+          <a:p>
+            <a:endParaRPr lang="en-GB"/>
+          </a:p>
+        </p:txBody>
       </p:sp>
     </p:spTree>
     <p:extLst>
@@ -4741,11 +4325,14 @@
       </p:ext>
     </p:extLst>
   </p:cSld>
+  <p:clrMapOvr>
+    <a:masterClrMapping/>
+  </p:clrMapOvr>
 </p:sld>
 </file>
 
 <file path=ppt/slides/slide2.xml><?xml version="1.0" encoding="utf-8"?>
-<p:sld xmlns:p="http://schemas.openxmlformats.org/presentationml/2006/main">
+<p:sld xmlns:a="http://schemas.openxmlformats.org/drawingml/2006/main" xmlns:r="http://schemas.openxmlformats.org/officeDocument/2006/relationships" xmlns:p="http://schemas.openxmlformats.org/presentationml/2006/main">
   <p:cSld>
     <p:spTree>
       <p:nvGrpSpPr>
@@ -4754,41 +4341,46 @@
         <p:nvPr/>
       </p:nvGrpSpPr>
       <p:grpSpPr>
-        <a:xfrm xmlns:a="http://schemas.openxmlformats.org/drawingml/2006/main"/>
+        <a:xfrm>
+          <a:off x="0" y="0"/>
+          <a:ext cx="0" cy="0"/>
+          <a:chOff x="0" y="0"/>
+          <a:chExt cx="0" cy="0"/>
+        </a:xfrm>
       </p:grpSpPr>
       <p:sp>
         <p:nvSpPr>
-          <p:cNvPr id="6" name="">
-            <a:extLst xmlns:a="http://schemas.openxmlformats.org/drawingml/2006/main">
+          <p:cNvPr id="6" name="Rectangle 5">
+            <a:extLst>
               <a:ext uri="{FF2B5EF4-FFF2-40B4-BE49-F238E27FC236}">
                 <a16:creationId xmlns:a16="http://schemas.microsoft.com/office/drawing/2014/main" id="{559E3819-F191-45FC-9618-EB20CC32F245}"/>
               </a:ext>
             </a:extLst>
           </p:cNvPr>
           <p:cNvSpPr>
-            <a:spLocks xmlns:a="http://schemas.openxmlformats.org/drawingml/2006/main" noGrp="1"/>
+            <a:spLocks noGrp="1"/>
           </p:cNvSpPr>
           <p:nvPr/>
         </p:nvSpPr>
         <p:spPr>
-          <a:xfrm xmlns:a="http://schemas.openxmlformats.org/drawingml/2006/main">
+          <a:xfrm>
             <a:off x="742950" y="476250"/>
             <a:ext cx="10382250" cy="857250"/>
           </a:xfrm>
-          <a:prstGeom xmlns:a="http://schemas.openxmlformats.org/drawingml/2006/main" prst="rect">
+          <a:prstGeom prst="rect">
             <a:avLst/>
           </a:prstGeom>
-          <a:noFill xmlns:a="http://schemas.openxmlformats.org/drawingml/2006/main"/>
-          <a:ln xmlns:a="http://schemas.openxmlformats.org/drawingml/2006/main" w="0">
+          <a:noFill/>
+          <a:ln w="0">
             <a:noFill/>
           </a:ln>
         </p:spPr>
         <p:txBody>
-          <a:bodyPr xmlns:a="http://schemas.openxmlformats.org/drawingml/2006/main">
-            <a:normAutofit fontScale="100000"/>
+          <a:bodyPr>
+            <a:normAutofit/>
           </a:bodyPr>
-          <a:lstStyle xmlns:a="http://schemas.openxmlformats.org/drawingml/2006/main"/>
-          <a:p xmlns:a="http://schemas.openxmlformats.org/drawingml/2006/main">
+          <a:lstStyle/>
+          <a:p>
             <a:pPr>
               <a:defRPr sz="3225" b="0">
                 <a:solidFill>
@@ -4815,37 +4407,37 @@
       </p:sp>
       <p:sp>
         <p:nvSpPr>
-          <p:cNvPr id="2" name="">
-            <a:extLst xmlns:a="http://schemas.openxmlformats.org/drawingml/2006/main">
+          <p:cNvPr id="2" name="Rectangle 1">
+            <a:extLst>
               <a:ext uri="{FF2B5EF4-FFF2-40B4-BE49-F238E27FC236}">
                 <a16:creationId xmlns:a16="http://schemas.microsoft.com/office/drawing/2014/main" id="{4783E7A6-1C44-4713-B3BE-AA6DCD355D15}"/>
               </a:ext>
             </a:extLst>
           </p:cNvPr>
           <p:cNvSpPr>
-            <a:spLocks xmlns:a="http://schemas.openxmlformats.org/drawingml/2006/main" noGrp="1"/>
+            <a:spLocks noGrp="1"/>
           </p:cNvSpPr>
           <p:nvPr/>
         </p:nvSpPr>
         <p:spPr>
-          <a:xfrm xmlns:a="http://schemas.openxmlformats.org/drawingml/2006/main">
+          <a:xfrm>
             <a:off x="857250" y="1381125"/>
             <a:ext cx="5429250" cy="714375"/>
           </a:xfrm>
-          <a:prstGeom xmlns:a="http://schemas.openxmlformats.org/drawingml/2006/main" prst="rect">
+          <a:prstGeom prst="rect">
             <a:avLst/>
           </a:prstGeom>
-          <a:noFill xmlns:a="http://schemas.openxmlformats.org/drawingml/2006/main"/>
-          <a:ln xmlns:a="http://schemas.openxmlformats.org/drawingml/2006/main" w="0">
+          <a:noFill/>
+          <a:ln w="0">
             <a:noFill/>
           </a:ln>
         </p:spPr>
         <p:txBody>
-          <a:bodyPr xmlns:a="http://schemas.openxmlformats.org/drawingml/2006/main">
-            <a:normAutofit fontScale="100000"/>
+          <a:bodyPr>
+            <a:normAutofit/>
           </a:bodyPr>
-          <a:lstStyle xmlns:a="http://schemas.openxmlformats.org/drawingml/2006/main"/>
-          <a:p xmlns:a="http://schemas.openxmlformats.org/drawingml/2006/main">
+          <a:lstStyle/>
+          <a:p>
             <a:pPr>
               <a:defRPr sz="1950" b="0">
                 <a:solidFill>
@@ -4872,37 +4464,37 @@
       </p:sp>
       <p:sp>
         <p:nvSpPr>
-          <p:cNvPr id="3" name="">
-            <a:extLst xmlns:a="http://schemas.openxmlformats.org/drawingml/2006/main">
+          <p:cNvPr id="3" name="Rectangle 2">
+            <a:extLst>
               <a:ext uri="{FF2B5EF4-FFF2-40B4-BE49-F238E27FC236}">
                 <a16:creationId xmlns:a16="http://schemas.microsoft.com/office/drawing/2014/main" id="{E0D61153-3BB9-471C-A740-0B059971C935}"/>
               </a:ext>
             </a:extLst>
           </p:cNvPr>
           <p:cNvSpPr>
-            <a:spLocks xmlns:a="http://schemas.openxmlformats.org/drawingml/2006/main" noGrp="1"/>
+            <a:spLocks noGrp="1"/>
           </p:cNvSpPr>
           <p:nvPr/>
         </p:nvSpPr>
         <p:spPr>
-          <a:xfrm xmlns:a="http://schemas.openxmlformats.org/drawingml/2006/main">
+          <a:xfrm>
             <a:off x="857250" y="2333625"/>
             <a:ext cx="5429250" cy="3143250"/>
           </a:xfrm>
-          <a:prstGeom xmlns:a="http://schemas.openxmlformats.org/drawingml/2006/main" prst="rect">
+          <a:prstGeom prst="rect">
             <a:avLst/>
           </a:prstGeom>
-          <a:noFill xmlns:a="http://schemas.openxmlformats.org/drawingml/2006/main"/>
-          <a:ln xmlns:a="http://schemas.openxmlformats.org/drawingml/2006/main" w="0">
+          <a:noFill/>
+          <a:ln w="0">
             <a:noFill/>
           </a:ln>
         </p:spPr>
         <p:txBody>
-          <a:bodyPr xmlns:a="http://schemas.openxmlformats.org/drawingml/2006/main">
-            <a:normAutofit fontScale="100000"/>
+          <a:bodyPr>
+            <a:normAutofit/>
           </a:bodyPr>
-          <a:lstStyle xmlns:a="http://schemas.openxmlformats.org/drawingml/2006/main"/>
-          <a:p xmlns:a="http://schemas.openxmlformats.org/drawingml/2006/main">
+          <a:lstStyle/>
+          <a:p>
             <a:pPr>
               <a:defRPr sz="1950" b="0">
                 <a:solidFill>
@@ -4925,7 +4517,7 @@
               <a:t>Παράδειγμα:</a:t>
             </a:r>
           </a:p>
-          <a:p xmlns:a="http://schemas.openxmlformats.org/drawingml/2006/main">
+          <a:p>
             <a:pPr>
               <a:defRPr sz="1950" b="0">
                 <a:solidFill>
@@ -4948,7 +4540,7 @@
               <a:t>Στο D6: =B6*C6</a:t>
             </a:r>
           </a:p>
-          <a:p xmlns:a="http://schemas.openxmlformats.org/drawingml/2006/main">
+          <a:p>
             <a:pPr>
               <a:defRPr sz="1950" b="0">
                 <a:solidFill>
@@ -4971,7 +4563,7 @@
               <a:t>Αντιγραφή μία γραμμή κάτω:</a:t>
             </a:r>
           </a:p>
-          <a:p xmlns:a="http://schemas.openxmlformats.org/drawingml/2006/main">
+          <a:p>
             <a:pPr>
               <a:defRPr sz="1950" b="0">
                 <a:solidFill>
@@ -4998,37 +4590,37 @@
       </p:sp>
       <p:sp>
         <p:nvSpPr>
-          <p:cNvPr id="4" name="">
-            <a:extLst xmlns:a="http://schemas.openxmlformats.org/drawingml/2006/main">
+          <p:cNvPr id="4" name="Rectangle 3">
+            <a:extLst>
               <a:ext uri="{FF2B5EF4-FFF2-40B4-BE49-F238E27FC236}">
                 <a16:creationId xmlns:a16="http://schemas.microsoft.com/office/drawing/2014/main" id="{39F652E0-8919-4828-91EB-C003AA411BF3}"/>
               </a:ext>
             </a:extLst>
           </p:cNvPr>
           <p:cNvSpPr>
-            <a:spLocks xmlns:a="http://schemas.openxmlformats.org/drawingml/2006/main" noGrp="1"/>
+            <a:spLocks noGrp="1"/>
           </p:cNvSpPr>
           <p:nvPr/>
         </p:nvSpPr>
         <p:spPr>
-          <a:xfrm xmlns:a="http://schemas.openxmlformats.org/drawingml/2006/main">
+          <a:xfrm>
             <a:off x="857250" y="5286375"/>
             <a:ext cx="5429250" cy="666750"/>
           </a:xfrm>
-          <a:prstGeom xmlns:a="http://schemas.openxmlformats.org/drawingml/2006/main" prst="rect">
+          <a:prstGeom prst="rect">
             <a:avLst/>
           </a:prstGeom>
-          <a:noFill xmlns:a="http://schemas.openxmlformats.org/drawingml/2006/main"/>
-          <a:ln xmlns:a="http://schemas.openxmlformats.org/drawingml/2006/main" w="0">
+          <a:noFill/>
+          <a:ln w="0">
             <a:noFill/>
           </a:ln>
         </p:spPr>
         <p:txBody>
-          <a:bodyPr xmlns:a="http://schemas.openxmlformats.org/drawingml/2006/main">
-            <a:normAutofit fontScale="100000"/>
+          <a:bodyPr>
+            <a:normAutofit/>
           </a:bodyPr>
-          <a:lstStyle xmlns:a="http://schemas.openxmlformats.org/drawingml/2006/main"/>
-          <a:p xmlns:a="http://schemas.openxmlformats.org/drawingml/2006/main">
+          <a:lstStyle/>
+          <a:p>
             <a:pPr>
               <a:defRPr sz="1650" b="1">
                 <a:solidFill>
@@ -5055,37 +4647,37 @@
       </p:sp>
       <p:sp>
         <p:nvSpPr>
-          <p:cNvPr id="5" name="">
-            <a:extLst xmlns:a="http://schemas.openxmlformats.org/drawingml/2006/main">
+          <p:cNvPr id="5" name="Rectangle 4">
+            <a:extLst>
               <a:ext uri="{FF2B5EF4-FFF2-40B4-BE49-F238E27FC236}">
                 <a16:creationId xmlns:a16="http://schemas.microsoft.com/office/drawing/2014/main" id="{36575A4F-89ED-4D12-BF11-6AD257BD92CB}"/>
               </a:ext>
             </a:extLst>
           </p:cNvPr>
           <p:cNvSpPr>
-            <a:spLocks xmlns:a="http://schemas.openxmlformats.org/drawingml/2006/main" noGrp="1"/>
+            <a:spLocks noGrp="1"/>
           </p:cNvSpPr>
           <p:nvPr/>
         </p:nvSpPr>
         <p:spPr>
-          <a:xfrm xmlns:a="http://schemas.openxmlformats.org/drawingml/2006/main">
+          <a:xfrm>
             <a:off x="6667500" y="2095500"/>
             <a:ext cx="4095750" cy="2190750"/>
           </a:xfrm>
-          <a:prstGeom xmlns:a="http://schemas.openxmlformats.org/drawingml/2006/main" prst="rect">
+          <a:prstGeom prst="rect">
             <a:avLst/>
           </a:prstGeom>
-          <a:noFill xmlns:a="http://schemas.openxmlformats.org/drawingml/2006/main"/>
-          <a:ln xmlns:a="http://schemas.openxmlformats.org/drawingml/2006/main" w="0">
+          <a:noFill/>
+          <a:ln w="0">
             <a:noFill/>
           </a:ln>
         </p:spPr>
         <p:txBody>
-          <a:bodyPr xmlns:a="http://schemas.openxmlformats.org/drawingml/2006/main">
-            <a:normAutofit fontScale="100000"/>
+          <a:bodyPr>
+            <a:normAutofit/>
           </a:bodyPr>
-          <a:lstStyle xmlns:a="http://schemas.openxmlformats.org/drawingml/2006/main"/>
-          <a:p xmlns:a="http://schemas.openxmlformats.org/drawingml/2006/main">
+          <a:lstStyle/>
+          <a:p>
             <a:pPr>
               <a:defRPr sz="2250" b="1">
                 <a:solidFill>
@@ -5108,7 +4700,7 @@
               <a:t>=B6*C6</a:t>
             </a:r>
           </a:p>
-          <a:p xmlns:a="http://schemas.openxmlformats.org/drawingml/2006/main">
+          <a:p>
             <a:pPr>
               <a:defRPr sz="2250" b="1">
                 <a:solidFill>
@@ -5131,7 +4723,7 @@
               <a:t>↓</a:t>
             </a:r>
           </a:p>
-          <a:p xmlns:a="http://schemas.openxmlformats.org/drawingml/2006/main">
+          <a:p>
             <a:pPr>
               <a:defRPr sz="2250" b="1">
                 <a:solidFill>
@@ -5163,11 +4755,14 @@
       </p:ext>
     </p:extLst>
   </p:cSld>
+  <p:clrMapOvr>
+    <a:masterClrMapping/>
+  </p:clrMapOvr>
 </p:sld>
 </file>
 
 <file path=ppt/slides/slide3.xml><?xml version="1.0" encoding="utf-8"?>
-<p:sld xmlns:p="http://schemas.openxmlformats.org/presentationml/2006/main">
+<p:sld xmlns:a="http://schemas.openxmlformats.org/drawingml/2006/main" xmlns:r="http://schemas.openxmlformats.org/officeDocument/2006/relationships" xmlns:p="http://schemas.openxmlformats.org/presentationml/2006/main">
   <p:cSld>
     <p:spTree>
       <p:nvGrpSpPr>
@@ -5176,41 +4771,46 @@
         <p:nvPr/>
       </p:nvGrpSpPr>
       <p:grpSpPr>
-        <a:xfrm xmlns:a="http://schemas.openxmlformats.org/drawingml/2006/main"/>
+        <a:xfrm>
+          <a:off x="0" y="0"/>
+          <a:ext cx="0" cy="0"/>
+          <a:chOff x="0" y="0"/>
+          <a:chExt cx="0" cy="0"/>
+        </a:xfrm>
       </p:grpSpPr>
       <p:sp>
         <p:nvSpPr>
-          <p:cNvPr id="5" name="">
-            <a:extLst xmlns:a="http://schemas.openxmlformats.org/drawingml/2006/main">
+          <p:cNvPr id="5" name="Rectangle 4">
+            <a:extLst>
               <a:ext uri="{FF2B5EF4-FFF2-40B4-BE49-F238E27FC236}">
                 <a16:creationId xmlns:a16="http://schemas.microsoft.com/office/drawing/2014/main" id="{F13A8EB9-137A-4D7A-9C30-DEEAC15CFA60}"/>
               </a:ext>
             </a:extLst>
           </p:cNvPr>
           <p:cNvSpPr>
-            <a:spLocks xmlns:a="http://schemas.openxmlformats.org/drawingml/2006/main" noGrp="1"/>
+            <a:spLocks noGrp="1"/>
           </p:cNvSpPr>
           <p:nvPr/>
         </p:nvSpPr>
         <p:spPr>
-          <a:xfrm xmlns:a="http://schemas.openxmlformats.org/drawingml/2006/main">
+          <a:xfrm>
             <a:off x="742950" y="476250"/>
             <a:ext cx="10382250" cy="857250"/>
           </a:xfrm>
-          <a:prstGeom xmlns:a="http://schemas.openxmlformats.org/drawingml/2006/main" prst="rect">
+          <a:prstGeom prst="rect">
             <a:avLst/>
           </a:prstGeom>
-          <a:noFill xmlns:a="http://schemas.openxmlformats.org/drawingml/2006/main"/>
-          <a:ln xmlns:a="http://schemas.openxmlformats.org/drawingml/2006/main" w="0">
+          <a:noFill/>
+          <a:ln w="0">
             <a:noFill/>
           </a:ln>
         </p:spPr>
         <p:txBody>
-          <a:bodyPr xmlns:a="http://schemas.openxmlformats.org/drawingml/2006/main">
-            <a:normAutofit fontScale="100000"/>
+          <a:bodyPr>
+            <a:normAutofit/>
           </a:bodyPr>
-          <a:lstStyle xmlns:a="http://schemas.openxmlformats.org/drawingml/2006/main"/>
-          <a:p xmlns:a="http://schemas.openxmlformats.org/drawingml/2006/main">
+          <a:lstStyle/>
+          <a:p>
             <a:pPr>
               <a:defRPr sz="3225" b="0">
                 <a:solidFill>
@@ -5237,37 +4837,37 @@
       </p:sp>
       <p:sp>
         <p:nvSpPr>
-          <p:cNvPr id="2" name="">
-            <a:extLst xmlns:a="http://schemas.openxmlformats.org/drawingml/2006/main">
+          <p:cNvPr id="2" name="Rectangle 1">
+            <a:extLst>
               <a:ext uri="{FF2B5EF4-FFF2-40B4-BE49-F238E27FC236}">
                 <a16:creationId xmlns:a16="http://schemas.microsoft.com/office/drawing/2014/main" id="{C5C37A4F-9FA3-4A32-A74B-E1601DE172AE}"/>
               </a:ext>
             </a:extLst>
           </p:cNvPr>
           <p:cNvSpPr>
-            <a:spLocks xmlns:a="http://schemas.openxmlformats.org/drawingml/2006/main" noGrp="1"/>
+            <a:spLocks noGrp="1"/>
           </p:cNvSpPr>
           <p:nvPr/>
         </p:nvSpPr>
         <p:spPr>
-          <a:xfrm xmlns:a="http://schemas.openxmlformats.org/drawingml/2006/main">
+          <a:xfrm>
             <a:off x="857250" y="1381125"/>
             <a:ext cx="5429250" cy="714375"/>
           </a:xfrm>
-          <a:prstGeom xmlns:a="http://schemas.openxmlformats.org/drawingml/2006/main" prst="rect">
+          <a:prstGeom prst="rect">
             <a:avLst/>
           </a:prstGeom>
-          <a:noFill xmlns:a="http://schemas.openxmlformats.org/drawingml/2006/main"/>
-          <a:ln xmlns:a="http://schemas.openxmlformats.org/drawingml/2006/main" w="0">
+          <a:noFill/>
+          <a:ln w="0">
             <a:noFill/>
           </a:ln>
         </p:spPr>
         <p:txBody>
-          <a:bodyPr xmlns:a="http://schemas.openxmlformats.org/drawingml/2006/main">
-            <a:normAutofit fontScale="100000"/>
+          <a:bodyPr>
+            <a:normAutofit/>
           </a:bodyPr>
-          <a:lstStyle xmlns:a="http://schemas.openxmlformats.org/drawingml/2006/main"/>
-          <a:p xmlns:a="http://schemas.openxmlformats.org/drawingml/2006/main">
+          <a:lstStyle/>
+          <a:p>
             <a:pPr>
               <a:defRPr sz="1950" b="0">
                 <a:solidFill>
@@ -5294,37 +4894,37 @@
       </p:sp>
       <p:sp>
         <p:nvSpPr>
-          <p:cNvPr id="3" name="">
-            <a:extLst xmlns:a="http://schemas.openxmlformats.org/drawingml/2006/main">
+          <p:cNvPr id="3" name="Rectangle 2">
+            <a:extLst>
               <a:ext uri="{FF2B5EF4-FFF2-40B4-BE49-F238E27FC236}">
                 <a16:creationId xmlns:a16="http://schemas.microsoft.com/office/drawing/2014/main" id="{227105E0-C8CB-4076-B061-2AB360B4C487}"/>
               </a:ext>
             </a:extLst>
           </p:cNvPr>
           <p:cNvSpPr>
-            <a:spLocks xmlns:a="http://schemas.openxmlformats.org/drawingml/2006/main" noGrp="1"/>
+            <a:spLocks noGrp="1"/>
           </p:cNvSpPr>
           <p:nvPr/>
         </p:nvSpPr>
         <p:spPr>
-          <a:xfrm xmlns:a="http://schemas.openxmlformats.org/drawingml/2006/main">
+          <a:xfrm>
             <a:off x="857250" y="2333625"/>
             <a:ext cx="5429250" cy="3143250"/>
           </a:xfrm>
-          <a:prstGeom xmlns:a="http://schemas.openxmlformats.org/drawingml/2006/main" prst="rect">
+          <a:prstGeom prst="rect">
             <a:avLst/>
           </a:prstGeom>
-          <a:noFill xmlns:a="http://schemas.openxmlformats.org/drawingml/2006/main"/>
-          <a:ln xmlns:a="http://schemas.openxmlformats.org/drawingml/2006/main" w="0">
+          <a:noFill/>
+          <a:ln w="0">
             <a:noFill/>
           </a:ln>
         </p:spPr>
         <p:txBody>
-          <a:bodyPr xmlns:a="http://schemas.openxmlformats.org/drawingml/2006/main">
-            <a:normAutofit fontScale="100000"/>
+          <a:bodyPr>
+            <a:normAutofit/>
           </a:bodyPr>
-          <a:lstStyle xmlns:a="http://schemas.openxmlformats.org/drawingml/2006/main"/>
-          <a:p xmlns:a="http://schemas.openxmlformats.org/drawingml/2006/main">
+          <a:lstStyle/>
+          <a:p>
             <a:pPr>
               <a:defRPr sz="1950" b="0">
                 <a:solidFill>
@@ -5347,7 +4947,7 @@
               <a:t>Παράδειγμα:</a:t>
             </a:r>
           </a:p>
-          <a:p xmlns:a="http://schemas.openxmlformats.org/drawingml/2006/main">
+          <a:p>
             <a:pPr>
               <a:defRPr sz="1950" b="0">
                 <a:solidFill>
@@ -5370,12 +4970,17 @@
               <a:t>=B6*$B$3</a:t>
             </a:r>
           </a:p>
-          <a:p xmlns:a="http://schemas.openxmlformats.org/drawingml/2006/main">
-            <a:r>
-              <a:t/>
-            </a:r>
-          </a:p>
-          <a:p xmlns:a="http://schemas.openxmlformats.org/drawingml/2006/main">
+          <a:p>
+            <a:endParaRPr sz="1950" b="0">
+              <a:solidFill>
+                <a:srgbClr val="151515"/>
+              </a:solidFill>
+              <a:latin typeface="Arial"/>
+              <a:ea typeface="Arial"/>
+              <a:cs typeface="Arial"/>
+            </a:endParaRPr>
+          </a:p>
+          <a:p>
             <a:pPr>
               <a:defRPr sz="1950" b="0">
                 <a:solidFill>
@@ -5402,37 +5007,37 @@
       </p:sp>
       <p:sp>
         <p:nvSpPr>
-          <p:cNvPr id="4" name="">
-            <a:extLst xmlns:a="http://schemas.openxmlformats.org/drawingml/2006/main">
+          <p:cNvPr id="4" name="Rectangle 3">
+            <a:extLst>
               <a:ext uri="{FF2B5EF4-FFF2-40B4-BE49-F238E27FC236}">
                 <a16:creationId xmlns:a16="http://schemas.microsoft.com/office/drawing/2014/main" id="{A7B68C9A-9B33-40A5-BF18-20A10870189D}"/>
               </a:ext>
             </a:extLst>
           </p:cNvPr>
           <p:cNvSpPr>
-            <a:spLocks xmlns:a="http://schemas.openxmlformats.org/drawingml/2006/main" noGrp="1"/>
+            <a:spLocks noGrp="1"/>
           </p:cNvSpPr>
           <p:nvPr/>
         </p:nvSpPr>
         <p:spPr>
-          <a:xfrm xmlns:a="http://schemas.openxmlformats.org/drawingml/2006/main">
+          <a:xfrm>
             <a:off x="6667500" y="2095500"/>
             <a:ext cx="4095750" cy="2190750"/>
           </a:xfrm>
-          <a:prstGeom xmlns:a="http://schemas.openxmlformats.org/drawingml/2006/main" prst="rect">
+          <a:prstGeom prst="rect">
             <a:avLst/>
           </a:prstGeom>
-          <a:noFill xmlns:a="http://schemas.openxmlformats.org/drawingml/2006/main"/>
-          <a:ln xmlns:a="http://schemas.openxmlformats.org/drawingml/2006/main" w="0">
+          <a:noFill/>
+          <a:ln w="0">
             <a:noFill/>
           </a:ln>
         </p:spPr>
         <p:txBody>
-          <a:bodyPr xmlns:a="http://schemas.openxmlformats.org/drawingml/2006/main">
-            <a:normAutofit fontScale="100000"/>
+          <a:bodyPr>
+            <a:normAutofit/>
           </a:bodyPr>
-          <a:lstStyle xmlns:a="http://schemas.openxmlformats.org/drawingml/2006/main"/>
-          <a:p xmlns:a="http://schemas.openxmlformats.org/drawingml/2006/main">
+          <a:lstStyle/>
+          <a:p>
             <a:pPr>
               <a:defRPr sz="2250" b="1">
                 <a:solidFill>
@@ -5455,7 +5060,7 @@
               <a:t>B6  αλλάζει</a:t>
             </a:r>
           </a:p>
-          <a:p xmlns:a="http://schemas.openxmlformats.org/drawingml/2006/main">
+          <a:p>
             <a:pPr>
               <a:defRPr sz="2250" b="1">
                 <a:solidFill>
@@ -5487,11 +5092,14 @@
       </p:ext>
     </p:extLst>
   </p:cSld>
+  <p:clrMapOvr>
+    <a:masterClrMapping/>
+  </p:clrMapOvr>
 </p:sld>
 </file>
 
 <file path=ppt/slides/slide4.xml><?xml version="1.0" encoding="utf-8"?>
-<p:sld xmlns:p="http://schemas.openxmlformats.org/presentationml/2006/main">
+<p:sld xmlns:a="http://schemas.openxmlformats.org/drawingml/2006/main" xmlns:r="http://schemas.openxmlformats.org/officeDocument/2006/relationships" xmlns:p="http://schemas.openxmlformats.org/presentationml/2006/main">
   <p:cSld>
     <p:spTree>
       <p:nvGrpSpPr>
@@ -5500,41 +5108,46 @@
         <p:nvPr/>
       </p:nvGrpSpPr>
       <p:grpSpPr>
-        <a:xfrm xmlns:a="http://schemas.openxmlformats.org/drawingml/2006/main"/>
+        <a:xfrm>
+          <a:off x="0" y="0"/>
+          <a:ext cx="0" cy="0"/>
+          <a:chOff x="0" y="0"/>
+          <a:chExt cx="0" cy="0"/>
+        </a:xfrm>
       </p:grpSpPr>
       <p:sp>
         <p:nvSpPr>
-          <p:cNvPr id="4" name="">
-            <a:extLst xmlns:a="http://schemas.openxmlformats.org/drawingml/2006/main">
+          <p:cNvPr id="4" name="Rectangle 3">
+            <a:extLst>
               <a:ext uri="{FF2B5EF4-FFF2-40B4-BE49-F238E27FC236}">
                 <a16:creationId xmlns:a16="http://schemas.microsoft.com/office/drawing/2014/main" id="{33F87606-7CF0-4F12-BFF8-475CC52E841D}"/>
               </a:ext>
             </a:extLst>
           </p:cNvPr>
           <p:cNvSpPr>
-            <a:spLocks xmlns:a="http://schemas.openxmlformats.org/drawingml/2006/main" noGrp="1"/>
+            <a:spLocks noGrp="1"/>
           </p:cNvSpPr>
           <p:nvPr/>
         </p:nvSpPr>
         <p:spPr>
-          <a:xfrm xmlns:a="http://schemas.openxmlformats.org/drawingml/2006/main">
+          <a:xfrm>
             <a:off x="742950" y="476250"/>
             <a:ext cx="10382250" cy="857250"/>
           </a:xfrm>
-          <a:prstGeom xmlns:a="http://schemas.openxmlformats.org/drawingml/2006/main" prst="rect">
+          <a:prstGeom prst="rect">
             <a:avLst/>
           </a:prstGeom>
-          <a:noFill xmlns:a="http://schemas.openxmlformats.org/drawingml/2006/main"/>
-          <a:ln xmlns:a="http://schemas.openxmlformats.org/drawingml/2006/main" w="0">
+          <a:noFill/>
+          <a:ln w="0">
             <a:noFill/>
           </a:ln>
         </p:spPr>
         <p:txBody>
-          <a:bodyPr xmlns:a="http://schemas.openxmlformats.org/drawingml/2006/main">
-            <a:normAutofit fontScale="100000"/>
+          <a:bodyPr>
+            <a:normAutofit/>
           </a:bodyPr>
-          <a:lstStyle xmlns:a="http://schemas.openxmlformats.org/drawingml/2006/main"/>
-          <a:p xmlns:a="http://schemas.openxmlformats.org/drawingml/2006/main">
+          <a:lstStyle/>
+          <a:p>
             <a:pPr>
               <a:defRPr sz="3225" b="0">
                 <a:solidFill>
@@ -5561,37 +5174,37 @@
       </p:sp>
       <p:sp>
         <p:nvSpPr>
-          <p:cNvPr id="2" name="">
-            <a:extLst xmlns:a="http://schemas.openxmlformats.org/drawingml/2006/main">
+          <p:cNvPr id="2" name="Rectangle 1">
+            <a:extLst>
               <a:ext uri="{FF2B5EF4-FFF2-40B4-BE49-F238E27FC236}">
                 <a16:creationId xmlns:a16="http://schemas.microsoft.com/office/drawing/2014/main" id="{F90B5400-41B7-4ED0-86C9-17CF4C6F68CB}"/>
               </a:ext>
             </a:extLst>
           </p:cNvPr>
           <p:cNvSpPr>
-            <a:spLocks xmlns:a="http://schemas.openxmlformats.org/drawingml/2006/main" noGrp="1"/>
+            <a:spLocks noGrp="1"/>
           </p:cNvSpPr>
           <p:nvPr/>
         </p:nvSpPr>
         <p:spPr>
-          <a:xfrm xmlns:a="http://schemas.openxmlformats.org/drawingml/2006/main">
+          <a:xfrm>
             <a:off x="857250" y="1571625"/>
             <a:ext cx="5429250" cy="3714750"/>
           </a:xfrm>
-          <a:prstGeom xmlns:a="http://schemas.openxmlformats.org/drawingml/2006/main" prst="rect">
+          <a:prstGeom prst="rect">
             <a:avLst/>
           </a:prstGeom>
-          <a:noFill xmlns:a="http://schemas.openxmlformats.org/drawingml/2006/main"/>
-          <a:ln xmlns:a="http://schemas.openxmlformats.org/drawingml/2006/main" w="0">
+          <a:noFill/>
+          <a:ln w="0">
             <a:noFill/>
           </a:ln>
         </p:spPr>
         <p:txBody>
-          <a:bodyPr xmlns:a="http://schemas.openxmlformats.org/drawingml/2006/main">
-            <a:normAutofit fontScale="100000"/>
+          <a:bodyPr>
+            <a:normAutofit/>
           </a:bodyPr>
-          <a:lstStyle xmlns:a="http://schemas.openxmlformats.org/drawingml/2006/main"/>
-          <a:p xmlns:a="http://schemas.openxmlformats.org/drawingml/2006/main">
+          <a:lstStyle/>
+          <a:p>
             <a:pPr>
               <a:defRPr sz="1950" b="0">
                 <a:solidFill>
@@ -5614,7 +5227,7 @@
               <a:t>Κλείδωμα στήλης:</a:t>
             </a:r>
           </a:p>
-          <a:p xmlns:a="http://schemas.openxmlformats.org/drawingml/2006/main">
+          <a:p>
             <a:pPr>
               <a:defRPr sz="1950" b="0">
                 <a:solidFill>
@@ -5637,12 +5250,17 @@
               <a:t>$B3</a:t>
             </a:r>
           </a:p>
-          <a:p xmlns:a="http://schemas.openxmlformats.org/drawingml/2006/main">
-            <a:r>
-              <a:t/>
-            </a:r>
-          </a:p>
-          <a:p xmlns:a="http://schemas.openxmlformats.org/drawingml/2006/main">
+          <a:p>
+            <a:endParaRPr sz="1950" b="0">
+              <a:solidFill>
+                <a:srgbClr val="151515"/>
+              </a:solidFill>
+              <a:latin typeface="Arial"/>
+              <a:ea typeface="Arial"/>
+              <a:cs typeface="Arial"/>
+            </a:endParaRPr>
+          </a:p>
+          <a:p>
             <a:pPr>
               <a:defRPr sz="1950" b="0">
                 <a:solidFill>
@@ -5665,7 +5283,7 @@
               <a:t>Κλείδωμα γραμμής:</a:t>
             </a:r>
           </a:p>
-          <a:p xmlns:a="http://schemas.openxmlformats.org/drawingml/2006/main">
+          <a:p>
             <a:pPr>
               <a:defRPr sz="1950" b="0">
                 <a:solidFill>
@@ -5688,12 +5306,17 @@
               <a:t>B$3</a:t>
             </a:r>
           </a:p>
-          <a:p xmlns:a="http://schemas.openxmlformats.org/drawingml/2006/main">
-            <a:r>
-              <a:t/>
-            </a:r>
-          </a:p>
-          <a:p xmlns:a="http://schemas.openxmlformats.org/drawingml/2006/main">
+          <a:p>
+            <a:endParaRPr sz="1950" b="0">
+              <a:solidFill>
+                <a:srgbClr val="151515"/>
+              </a:solidFill>
+              <a:latin typeface="Arial"/>
+              <a:ea typeface="Arial"/>
+              <a:cs typeface="Arial"/>
+            </a:endParaRPr>
+          </a:p>
+          <a:p>
             <a:pPr>
               <a:defRPr sz="1950" b="0">
                 <a:solidFill>
@@ -5720,37 +5343,37 @@
       </p:sp>
       <p:sp>
         <p:nvSpPr>
-          <p:cNvPr id="3" name="">
-            <a:extLst xmlns:a="http://schemas.openxmlformats.org/drawingml/2006/main">
+          <p:cNvPr id="3" name="Rectangle 2">
+            <a:extLst>
               <a:ext uri="{FF2B5EF4-FFF2-40B4-BE49-F238E27FC236}">
                 <a16:creationId xmlns:a16="http://schemas.microsoft.com/office/drawing/2014/main" id="{AA161813-7758-42C3-8AFD-476BD1BCFE54}"/>
               </a:ext>
             </a:extLst>
           </p:cNvPr>
           <p:cNvSpPr>
-            <a:spLocks xmlns:a="http://schemas.openxmlformats.org/drawingml/2006/main" noGrp="1"/>
+            <a:spLocks noGrp="1"/>
           </p:cNvSpPr>
           <p:nvPr/>
         </p:nvSpPr>
         <p:spPr>
-          <a:xfrm xmlns:a="http://schemas.openxmlformats.org/drawingml/2006/main">
+          <a:xfrm>
             <a:off x="6667500" y="2095500"/>
             <a:ext cx="4095750" cy="2190750"/>
           </a:xfrm>
-          <a:prstGeom xmlns:a="http://schemas.openxmlformats.org/drawingml/2006/main" prst="rect">
+          <a:prstGeom prst="rect">
             <a:avLst/>
           </a:prstGeom>
-          <a:noFill xmlns:a="http://schemas.openxmlformats.org/drawingml/2006/main"/>
-          <a:ln xmlns:a="http://schemas.openxmlformats.org/drawingml/2006/main" w="0">
+          <a:noFill/>
+          <a:ln w="0">
             <a:noFill/>
           </a:ln>
         </p:spPr>
         <p:txBody>
-          <a:bodyPr xmlns:a="http://schemas.openxmlformats.org/drawingml/2006/main">
-            <a:normAutofit fontScale="100000"/>
+          <a:bodyPr>
+            <a:normAutofit/>
           </a:bodyPr>
-          <a:lstStyle xmlns:a="http://schemas.openxmlformats.org/drawingml/2006/main"/>
-          <a:p xmlns:a="http://schemas.openxmlformats.org/drawingml/2006/main">
+          <a:lstStyle/>
+          <a:p>
             <a:pPr>
               <a:defRPr sz="2250" b="1">
                 <a:solidFill>
@@ -5773,12 +5396,17 @@
               <a:t>$B3</a:t>
             </a:r>
           </a:p>
-          <a:p xmlns:a="http://schemas.openxmlformats.org/drawingml/2006/main">
-            <a:r>
-              <a:t/>
-            </a:r>
-          </a:p>
-          <a:p xmlns:a="http://schemas.openxmlformats.org/drawingml/2006/main">
+          <a:p>
+            <a:endParaRPr sz="2250" b="1">
+              <a:solidFill>
+                <a:srgbClr val="D84B00"/>
+              </a:solidFill>
+              <a:latin typeface="Arial"/>
+              <a:ea typeface="Arial"/>
+              <a:cs typeface="Arial"/>
+            </a:endParaRPr>
+          </a:p>
+          <a:p>
             <a:pPr>
               <a:defRPr sz="2250" b="1">
                 <a:solidFill>
@@ -5810,11 +5438,14 @@
       </p:ext>
     </p:extLst>
   </p:cSld>
+  <p:clrMapOvr>
+    <a:masterClrMapping/>
+  </p:clrMapOvr>
 </p:sld>
 </file>
 
 <file path=ppt/slides/slide5.xml><?xml version="1.0" encoding="utf-8"?>
-<p:sld xmlns:p="http://schemas.openxmlformats.org/presentationml/2006/main">
+<p:sld xmlns:a="http://schemas.openxmlformats.org/drawingml/2006/main" xmlns:r="http://schemas.openxmlformats.org/officeDocument/2006/relationships" xmlns:p="http://schemas.openxmlformats.org/presentationml/2006/main">
   <p:cSld>
     <p:spTree>
       <p:nvGrpSpPr>
@@ -5823,41 +5454,46 @@
         <p:nvPr/>
       </p:nvGrpSpPr>
       <p:grpSpPr>
-        <a:xfrm xmlns:a="http://schemas.openxmlformats.org/drawingml/2006/main"/>
+        <a:xfrm>
+          <a:off x="0" y="0"/>
+          <a:ext cx="0" cy="0"/>
+          <a:chOff x="0" y="0"/>
+          <a:chExt cx="0" cy="0"/>
+        </a:xfrm>
       </p:grpSpPr>
       <p:sp>
         <p:nvSpPr>
-          <p:cNvPr id="5" name="">
-            <a:extLst xmlns:a="http://schemas.openxmlformats.org/drawingml/2006/main">
+          <p:cNvPr id="5" name="Rectangle 4">
+            <a:extLst>
               <a:ext uri="{FF2B5EF4-FFF2-40B4-BE49-F238E27FC236}">
                 <a16:creationId xmlns:a16="http://schemas.microsoft.com/office/drawing/2014/main" id="{B2813C47-134A-4AAF-9D56-BB2C4E5837C9}"/>
               </a:ext>
             </a:extLst>
           </p:cNvPr>
           <p:cNvSpPr>
-            <a:spLocks xmlns:a="http://schemas.openxmlformats.org/drawingml/2006/main" noGrp="1"/>
+            <a:spLocks noGrp="1"/>
           </p:cNvSpPr>
           <p:nvPr/>
         </p:nvSpPr>
         <p:spPr>
-          <a:xfrm xmlns:a="http://schemas.openxmlformats.org/drawingml/2006/main">
+          <a:xfrm>
             <a:off x="742950" y="476250"/>
             <a:ext cx="10382250" cy="857250"/>
           </a:xfrm>
-          <a:prstGeom xmlns:a="http://schemas.openxmlformats.org/drawingml/2006/main" prst="rect">
+          <a:prstGeom prst="rect">
             <a:avLst/>
           </a:prstGeom>
-          <a:noFill xmlns:a="http://schemas.openxmlformats.org/drawingml/2006/main"/>
-          <a:ln xmlns:a="http://schemas.openxmlformats.org/drawingml/2006/main" w="0">
+          <a:noFill/>
+          <a:ln w="0">
             <a:noFill/>
           </a:ln>
         </p:spPr>
         <p:txBody>
-          <a:bodyPr xmlns:a="http://schemas.openxmlformats.org/drawingml/2006/main">
-            <a:normAutofit fontScale="100000"/>
+          <a:bodyPr>
+            <a:normAutofit/>
           </a:bodyPr>
-          <a:lstStyle xmlns:a="http://schemas.openxmlformats.org/drawingml/2006/main"/>
-          <a:p xmlns:a="http://schemas.openxmlformats.org/drawingml/2006/main">
+          <a:lstStyle/>
+          <a:p>
             <a:pPr>
               <a:defRPr sz="3225" b="0">
                 <a:solidFill>
@@ -5884,37 +5520,37 @@
       </p:sp>
       <p:sp>
         <p:nvSpPr>
-          <p:cNvPr id="2" name="">
-            <a:extLst xmlns:a="http://schemas.openxmlformats.org/drawingml/2006/main">
+          <p:cNvPr id="2" name="Rectangle 1">
+            <a:extLst>
               <a:ext uri="{FF2B5EF4-FFF2-40B4-BE49-F238E27FC236}">
                 <a16:creationId xmlns:a16="http://schemas.microsoft.com/office/drawing/2014/main" id="{DC6E7345-B10E-4388-927C-48635D11E06E}"/>
               </a:ext>
             </a:extLst>
           </p:cNvPr>
           <p:cNvSpPr>
-            <a:spLocks xmlns:a="http://schemas.openxmlformats.org/drawingml/2006/main" noGrp="1"/>
+            <a:spLocks noGrp="1"/>
           </p:cNvSpPr>
           <p:nvPr/>
         </p:nvSpPr>
         <p:spPr>
-          <a:xfrm xmlns:a="http://schemas.openxmlformats.org/drawingml/2006/main">
+          <a:xfrm>
             <a:off x="857250" y="1571625"/>
             <a:ext cx="5429250" cy="3714750"/>
           </a:xfrm>
-          <a:prstGeom xmlns:a="http://schemas.openxmlformats.org/drawingml/2006/main" prst="rect">
+          <a:prstGeom prst="rect">
             <a:avLst/>
           </a:prstGeom>
-          <a:noFill xmlns:a="http://schemas.openxmlformats.org/drawingml/2006/main"/>
-          <a:ln xmlns:a="http://schemas.openxmlformats.org/drawingml/2006/main" w="0">
+          <a:noFill/>
+          <a:ln w="0">
             <a:noFill/>
           </a:ln>
         </p:spPr>
         <p:txBody>
-          <a:bodyPr xmlns:a="http://schemas.openxmlformats.org/drawingml/2006/main">
-            <a:normAutofit fontScale="100000"/>
+          <a:bodyPr>
+            <a:normAutofit/>
           </a:bodyPr>
-          <a:lstStyle xmlns:a="http://schemas.openxmlformats.org/drawingml/2006/main"/>
-          <a:p xmlns:a="http://schemas.openxmlformats.org/drawingml/2006/main">
+          <a:lstStyle/>
+          <a:p>
             <a:pPr>
               <a:defRPr sz="1950" b="0">
                 <a:solidFill>
@@ -5937,7 +5573,7 @@
               <a:t>1. Επιλέγουμε την αναφορά μέσα στον τύπο.</a:t>
             </a:r>
           </a:p>
-          <a:p xmlns:a="http://schemas.openxmlformats.org/drawingml/2006/main">
+          <a:p>
             <a:pPr>
               <a:defRPr sz="1950" b="0">
                 <a:solidFill>
@@ -5960,7 +5596,7 @@
               <a:t>2. Πατάμε F4.</a:t>
             </a:r>
           </a:p>
-          <a:p xmlns:a="http://schemas.openxmlformats.org/drawingml/2006/main">
+          <a:p>
             <a:pPr>
               <a:defRPr sz="1950" b="0">
                 <a:solidFill>
@@ -5983,7 +5619,7 @@
               <a:t>3. Κάθε πάτημα αλλάζει τη μορφή:</a:t>
             </a:r>
           </a:p>
-          <a:p xmlns:a="http://schemas.openxmlformats.org/drawingml/2006/main">
+          <a:p>
             <a:pPr>
               <a:defRPr sz="1950" b="0">
                 <a:solidFill>
@@ -6010,37 +5646,37 @@
       </p:sp>
       <p:sp>
         <p:nvSpPr>
-          <p:cNvPr id="3" name="">
-            <a:extLst xmlns:a="http://schemas.openxmlformats.org/drawingml/2006/main">
+          <p:cNvPr id="3" name="Rectangle 2">
+            <a:extLst>
               <a:ext uri="{FF2B5EF4-FFF2-40B4-BE49-F238E27FC236}">
                 <a16:creationId xmlns:a16="http://schemas.microsoft.com/office/drawing/2014/main" id="{17963310-7F02-4BF1-A928-40BB7D13F667}"/>
               </a:ext>
             </a:extLst>
           </p:cNvPr>
           <p:cNvSpPr>
-            <a:spLocks xmlns:a="http://schemas.openxmlformats.org/drawingml/2006/main" noGrp="1"/>
+            <a:spLocks noGrp="1"/>
           </p:cNvSpPr>
           <p:nvPr/>
         </p:nvSpPr>
         <p:spPr>
-          <a:xfrm xmlns:a="http://schemas.openxmlformats.org/drawingml/2006/main">
+          <a:xfrm>
             <a:off x="857250" y="5286375"/>
             <a:ext cx="5429250" cy="666750"/>
           </a:xfrm>
-          <a:prstGeom xmlns:a="http://schemas.openxmlformats.org/drawingml/2006/main" prst="rect">
+          <a:prstGeom prst="rect">
             <a:avLst/>
           </a:prstGeom>
-          <a:noFill xmlns:a="http://schemas.openxmlformats.org/drawingml/2006/main"/>
-          <a:ln xmlns:a="http://schemas.openxmlformats.org/drawingml/2006/main" w="0">
+          <a:noFill/>
+          <a:ln w="0">
             <a:noFill/>
           </a:ln>
         </p:spPr>
         <p:txBody>
-          <a:bodyPr xmlns:a="http://schemas.openxmlformats.org/drawingml/2006/main">
-            <a:normAutofit fontScale="100000"/>
+          <a:bodyPr>
+            <a:normAutofit/>
           </a:bodyPr>
-          <a:lstStyle xmlns:a="http://schemas.openxmlformats.org/drawingml/2006/main"/>
-          <a:p xmlns:a="http://schemas.openxmlformats.org/drawingml/2006/main">
+          <a:lstStyle/>
+          <a:p>
             <a:pPr>
               <a:defRPr sz="1650" b="1">
                 <a:solidFill>
@@ -6067,22 +5703,22 @@
       </p:sp>
       <p:pic>
         <p:nvPicPr>
-          <p:cNvPr id="8" name=""/>
+          <p:cNvPr id="8" name="Picture 7"/>
           <p:cNvPicPr>
-            <a:picLocks xmlns:a="http://schemas.openxmlformats.org/drawingml/2006/main" noChangeAspect="1"/>
+            <a:picLocks noChangeAspect="1"/>
           </p:cNvPicPr>
           <p:nvPr/>
         </p:nvPicPr>
         <p:blipFill>
-          <a:blip xmlns:r="http://schemas.openxmlformats.org/officeDocument/2006/relationships" xmlns:a="http://schemas.openxmlformats.org/drawingml/2006/main" r:embed="R1b9cc6ee3d83492f"/>
-          <a:stretch xmlns:a="http://schemas.openxmlformats.org/drawingml/2006/main"/>
+          <a:blip r:embed="rId3"/>
+          <a:stretch/>
         </p:blipFill>
         <p:spPr>
-          <a:xfrm xmlns:a="http://schemas.openxmlformats.org/drawingml/2006/main">
+          <a:xfrm>
             <a:off x="7031601" y="1571625"/>
             <a:ext cx="3653298" cy="3905250"/>
           </a:xfrm>
-          <a:prstGeom xmlns:a="http://schemas.openxmlformats.org/drawingml/2006/main" prst="rect">
+          <a:prstGeom prst="rect">
             <a:avLst/>
           </a:prstGeom>
         </p:spPr>
@@ -6094,11 +5730,14 @@
       </p:ext>
     </p:extLst>
   </p:cSld>
+  <p:clrMapOvr>
+    <a:masterClrMapping/>
+  </p:clrMapOvr>
 </p:sld>
 </file>
 
 <file path=ppt/slides/slide6.xml><?xml version="1.0" encoding="utf-8"?>
-<p:sld xmlns:p="http://schemas.openxmlformats.org/presentationml/2006/main">
+<p:sld xmlns:a="http://schemas.openxmlformats.org/drawingml/2006/main" xmlns:r="http://schemas.openxmlformats.org/officeDocument/2006/relationships" xmlns:p="http://schemas.openxmlformats.org/presentationml/2006/main">
   <p:cSld>
     <p:spTree>
       <p:nvGrpSpPr>
@@ -6107,41 +5746,46 @@
         <p:nvPr/>
       </p:nvGrpSpPr>
       <p:grpSpPr>
-        <a:xfrm xmlns:a="http://schemas.openxmlformats.org/drawingml/2006/main"/>
+        <a:xfrm>
+          <a:off x="0" y="0"/>
+          <a:ext cx="0" cy="0"/>
+          <a:chOff x="0" y="0"/>
+          <a:chExt cx="0" cy="0"/>
+        </a:xfrm>
       </p:grpSpPr>
       <p:sp>
         <p:nvSpPr>
-          <p:cNvPr id="4" name="">
-            <a:extLst xmlns:a="http://schemas.openxmlformats.org/drawingml/2006/main">
+          <p:cNvPr id="4" name="Rectangle 3">
+            <a:extLst>
               <a:ext uri="{FF2B5EF4-FFF2-40B4-BE49-F238E27FC236}">
                 <a16:creationId xmlns:a16="http://schemas.microsoft.com/office/drawing/2014/main" id="{B1E72980-4AD9-4CB4-9CB5-A303B9256751}"/>
               </a:ext>
             </a:extLst>
           </p:cNvPr>
           <p:cNvSpPr>
-            <a:spLocks xmlns:a="http://schemas.openxmlformats.org/drawingml/2006/main" noGrp="1"/>
+            <a:spLocks noGrp="1"/>
           </p:cNvSpPr>
           <p:nvPr/>
         </p:nvSpPr>
         <p:spPr>
-          <a:xfrm xmlns:a="http://schemas.openxmlformats.org/drawingml/2006/main">
+          <a:xfrm>
             <a:off x="742950" y="476250"/>
             <a:ext cx="10382250" cy="857250"/>
           </a:xfrm>
-          <a:prstGeom xmlns:a="http://schemas.openxmlformats.org/drawingml/2006/main" prst="rect">
+          <a:prstGeom prst="rect">
             <a:avLst/>
           </a:prstGeom>
-          <a:noFill xmlns:a="http://schemas.openxmlformats.org/drawingml/2006/main"/>
-          <a:ln xmlns:a="http://schemas.openxmlformats.org/drawingml/2006/main" w="0">
+          <a:noFill/>
+          <a:ln w="0">
             <a:noFill/>
           </a:ln>
         </p:spPr>
         <p:txBody>
-          <a:bodyPr xmlns:a="http://schemas.openxmlformats.org/drawingml/2006/main">
-            <a:normAutofit fontScale="100000"/>
+          <a:bodyPr>
+            <a:normAutofit/>
           </a:bodyPr>
-          <a:lstStyle xmlns:a="http://schemas.openxmlformats.org/drawingml/2006/main"/>
-          <a:p xmlns:a="http://schemas.openxmlformats.org/drawingml/2006/main">
+          <a:lstStyle/>
+          <a:p>
             <a:pPr>
               <a:defRPr sz="3225" b="0">
                 <a:solidFill>
@@ -6168,37 +5812,37 @@
       </p:sp>
       <p:sp>
         <p:nvSpPr>
-          <p:cNvPr id="2" name="">
-            <a:extLst xmlns:a="http://schemas.openxmlformats.org/drawingml/2006/main">
+          <p:cNvPr id="2" name="Rectangle 1">
+            <a:extLst>
               <a:ext uri="{FF2B5EF4-FFF2-40B4-BE49-F238E27FC236}">
                 <a16:creationId xmlns:a16="http://schemas.microsoft.com/office/drawing/2014/main" id="{82CEA923-2D9D-4087-9097-D9FCFF356955}"/>
               </a:ext>
             </a:extLst>
           </p:cNvPr>
           <p:cNvSpPr>
-            <a:spLocks xmlns:a="http://schemas.openxmlformats.org/drawingml/2006/main" noGrp="1"/>
+            <a:spLocks noGrp="1"/>
           </p:cNvSpPr>
           <p:nvPr/>
         </p:nvSpPr>
         <p:spPr>
-          <a:xfrm xmlns:a="http://schemas.openxmlformats.org/drawingml/2006/main">
+          <a:xfrm>
             <a:off x="857250" y="1571625"/>
             <a:ext cx="5429250" cy="3714750"/>
           </a:xfrm>
-          <a:prstGeom xmlns:a="http://schemas.openxmlformats.org/drawingml/2006/main" prst="rect">
+          <a:prstGeom prst="rect">
             <a:avLst/>
           </a:prstGeom>
-          <a:noFill xmlns:a="http://schemas.openxmlformats.org/drawingml/2006/main"/>
-          <a:ln xmlns:a="http://schemas.openxmlformats.org/drawingml/2006/main" w="0">
+          <a:noFill/>
+          <a:ln w="0">
             <a:noFill/>
           </a:ln>
         </p:spPr>
         <p:txBody>
-          <a:bodyPr xmlns:a="http://schemas.openxmlformats.org/drawingml/2006/main">
-            <a:normAutofit fontScale="100000"/>
+          <a:bodyPr>
+            <a:normAutofit/>
           </a:bodyPr>
-          <a:lstStyle xmlns:a="http://schemas.openxmlformats.org/drawingml/2006/main"/>
-          <a:p xmlns:a="http://schemas.openxmlformats.org/drawingml/2006/main">
+          <a:lstStyle/>
+          <a:p>
             <a:pPr>
               <a:defRPr sz="1950" b="0">
                 <a:solidFill>
@@ -6221,12 +5865,17 @@
               <a:t>Σχετική: όταν κάθε γραμμή χρησιμοποιεί τα δικά της δεδομένα.</a:t>
             </a:r>
           </a:p>
-          <a:p xmlns:a="http://schemas.openxmlformats.org/drawingml/2006/main">
-            <a:r>
-              <a:t/>
-            </a:r>
-          </a:p>
-          <a:p xmlns:a="http://schemas.openxmlformats.org/drawingml/2006/main">
+          <a:p>
+            <a:endParaRPr sz="1950" b="0">
+              <a:solidFill>
+                <a:srgbClr val="151515"/>
+              </a:solidFill>
+              <a:latin typeface="Arial"/>
+              <a:ea typeface="Arial"/>
+              <a:cs typeface="Arial"/>
+            </a:endParaRPr>
+          </a:p>
+          <a:p>
             <a:pPr>
               <a:defRPr sz="1950" b="0">
                 <a:solidFill>
@@ -6249,12 +5898,17 @@
               <a:t>Απόλυτη: όταν όλοι οι τύποι χρησιμοποιούν ένα σταθερό κελί, όπως ποσοστό ΦΠΑ.</a:t>
             </a:r>
           </a:p>
-          <a:p xmlns:a="http://schemas.openxmlformats.org/drawingml/2006/main">
-            <a:r>
-              <a:t/>
-            </a:r>
-          </a:p>
-          <a:p xmlns:a="http://schemas.openxmlformats.org/drawingml/2006/main">
+          <a:p>
+            <a:endParaRPr sz="1950" b="0">
+              <a:solidFill>
+                <a:srgbClr val="151515"/>
+              </a:solidFill>
+              <a:latin typeface="Arial"/>
+              <a:ea typeface="Arial"/>
+              <a:cs typeface="Arial"/>
+            </a:endParaRPr>
+          </a:p>
+          <a:p>
             <a:pPr>
               <a:defRPr sz="1950" b="0">
                 <a:solidFill>
@@ -6281,37 +5935,37 @@
       </p:sp>
       <p:sp>
         <p:nvSpPr>
-          <p:cNvPr id="3" name="">
-            <a:extLst xmlns:a="http://schemas.openxmlformats.org/drawingml/2006/main">
+          <p:cNvPr id="3" name="Rectangle 2">
+            <a:extLst>
               <a:ext uri="{FF2B5EF4-FFF2-40B4-BE49-F238E27FC236}">
                 <a16:creationId xmlns:a16="http://schemas.microsoft.com/office/drawing/2014/main" id="{258B5738-ADA9-46D8-803D-E2CCE1C2E306}"/>
               </a:ext>
             </a:extLst>
           </p:cNvPr>
           <p:cNvSpPr>
-            <a:spLocks xmlns:a="http://schemas.openxmlformats.org/drawingml/2006/main" noGrp="1"/>
+            <a:spLocks noGrp="1"/>
           </p:cNvSpPr>
           <p:nvPr/>
         </p:nvSpPr>
         <p:spPr>
-          <a:xfrm xmlns:a="http://schemas.openxmlformats.org/drawingml/2006/main">
+          <a:xfrm>
             <a:off x="6667500" y="2095500"/>
             <a:ext cx="4095750" cy="2190750"/>
           </a:xfrm>
-          <a:prstGeom xmlns:a="http://schemas.openxmlformats.org/drawingml/2006/main" prst="rect">
+          <a:prstGeom prst="rect">
             <a:avLst/>
           </a:prstGeom>
-          <a:noFill xmlns:a="http://schemas.openxmlformats.org/drawingml/2006/main"/>
-          <a:ln xmlns:a="http://schemas.openxmlformats.org/drawingml/2006/main" w="0">
+          <a:noFill/>
+          <a:ln w="0">
             <a:noFill/>
           </a:ln>
         </p:spPr>
         <p:txBody>
-          <a:bodyPr xmlns:a="http://schemas.openxmlformats.org/drawingml/2006/main">
-            <a:normAutofit fontScale="100000"/>
+          <a:bodyPr>
+            <a:normAutofit/>
           </a:bodyPr>
-          <a:lstStyle xmlns:a="http://schemas.openxmlformats.org/drawingml/2006/main"/>
-          <a:p xmlns:a="http://schemas.openxmlformats.org/drawingml/2006/main">
+          <a:lstStyle/>
+          <a:p>
             <a:pPr>
               <a:defRPr sz="2250" b="1">
                 <a:solidFill>
@@ -6334,7 +5988,7 @@
               <a:t>Σχετική  B6</a:t>
             </a:r>
           </a:p>
-          <a:p xmlns:a="http://schemas.openxmlformats.org/drawingml/2006/main">
+          <a:p>
             <a:pPr>
               <a:defRPr sz="2250" b="1">
                 <a:solidFill>
@@ -6357,7 +6011,7 @@
               <a:t>Απόλυτη  $B$3</a:t>
             </a:r>
           </a:p>
-          <a:p xmlns:a="http://schemas.openxmlformats.org/drawingml/2006/main">
+          <a:p>
             <a:pPr>
               <a:defRPr sz="2250" b="1">
                 <a:solidFill>
@@ -6389,616 +6043,9 @@
       </p:ext>
     </p:extLst>
   </p:cSld>
-</p:sld>
-</file>
-
-<file path=ppt/slides/slide7.xml><?xml version="1.0" encoding="utf-8"?>
-<p:sld xmlns:p="http://schemas.openxmlformats.org/presentationml/2006/main">
-  <p:cSld>
-    <p:bg>
-      <p:bgRef idx="1001">
-        <a:schemeClr xmlns:a="http://schemas.openxmlformats.org/drawingml/2006/main" val="bg1"/>
-      </p:bgRef>
-    </p:bg>
-    <p:spTree>
-      <p:nvGrpSpPr>
-        <p:cNvPr id="1" name=""/>
-        <p:cNvGrpSpPr/>
-        <p:nvPr/>
-      </p:nvGrpSpPr>
-      <p:grpSpPr>
-        <a:xfrm xmlns:a="http://schemas.openxmlformats.org/drawingml/2006/main"/>
-      </p:grpSpPr>
-      <p:sp>
-        <p:nvSpPr>
-          <p:cNvPr id="5" name="">
-            <a:extLst xmlns:a="http://schemas.openxmlformats.org/drawingml/2006/main">
-              <a:ext uri="{FF2B5EF4-FFF2-40B4-BE49-F238E27FC236}">
-                <a16:creationId xmlns:a16="http://schemas.microsoft.com/office/drawing/2014/main" id="{1EEB5815-90A0-4243-8AEE-ED8682AB1875}"/>
-              </a:ext>
-            </a:extLst>
-          </p:cNvPr>
-          <p:cNvSpPr>
-            <a:spLocks xmlns:a="http://schemas.openxmlformats.org/drawingml/2006/main" noGrp="1"/>
-          </p:cNvSpPr>
-          <p:nvPr/>
-        </p:nvSpPr>
-        <p:spPr>
-          <a:xfrm xmlns:a="http://schemas.openxmlformats.org/drawingml/2006/main">
-            <a:off x="742950" y="476250"/>
-            <a:ext cx="4953000" cy="857250"/>
-          </a:xfrm>
-          <a:prstGeom xmlns:a="http://schemas.openxmlformats.org/drawingml/2006/main" prst="rect">
-            <a:avLst/>
-          </a:prstGeom>
-          <a:noFill xmlns:a="http://schemas.openxmlformats.org/drawingml/2006/main"/>
-          <a:ln xmlns:a="http://schemas.openxmlformats.org/drawingml/2006/main" w="0">
-            <a:noFill/>
-          </a:ln>
-        </p:spPr>
-        <p:txBody>
-          <a:bodyPr xmlns:a="http://schemas.openxmlformats.org/drawingml/2006/main">
-            <a:normAutofit fontScale="92043"/>
-          </a:bodyPr>
-          <a:lstStyle xmlns:a="http://schemas.openxmlformats.org/drawingml/2006/main"/>
-          <a:p xmlns:a="http://schemas.openxmlformats.org/drawingml/2006/main">
-            <a:pPr>
-              <a:defRPr sz="3225" b="0">
-                <a:solidFill>
-                  <a:srgbClr val="6B1E72"/>
-                </a:solidFill>
-                <a:latin typeface="Calibri Light"/>
-                <a:ea typeface="Calibri Light"/>
-                <a:cs typeface="Calibri Light"/>
-              </a:defRPr>
-            </a:pPr>
-            <a:r>
-              <a:rPr sz="3225" b="0">
-                <a:solidFill>
-                  <a:srgbClr val="6B1E72"/>
-                </a:solidFill>
-                <a:latin typeface="Calibri Light"/>
-                <a:ea typeface="Calibri Light"/>
-                <a:cs typeface="Calibri Light"/>
-              </a:rPr>
-              <a:t>Δραστηριότητες Εμπέδωσης</a:t>
-            </a:r>
-          </a:p>
-        </p:txBody>
-      </p:sp>
-      <p:sp>
-        <p:nvSpPr>
-          <p:cNvPr id="2" name="">
-            <a:extLst xmlns:a="http://schemas.openxmlformats.org/drawingml/2006/main">
-              <a:ext uri="{FF2B5EF4-FFF2-40B4-BE49-F238E27FC236}">
-                <a16:creationId xmlns:a16="http://schemas.microsoft.com/office/drawing/2014/main" id="{E5778ED3-73F1-481F-86CF-1F7ED0D66CF5}"/>
-              </a:ext>
-            </a:extLst>
-          </p:cNvPr>
-          <p:cNvSpPr>
-            <a:spLocks xmlns:a="http://schemas.openxmlformats.org/drawingml/2006/main" noGrp="1"/>
-          </p:cNvSpPr>
-          <p:nvPr/>
-        </p:nvSpPr>
-        <p:spPr>
-          <a:xfrm xmlns:a="http://schemas.openxmlformats.org/drawingml/2006/main">
-            <a:off x="5905500" y="1190625"/>
-            <a:ext cx="6191250" cy="523875"/>
-          </a:xfrm>
-          <a:prstGeom xmlns:a="http://schemas.openxmlformats.org/drawingml/2006/main" prst="rect">
-            <a:avLst/>
-          </a:prstGeom>
-          <a:noFill xmlns:a="http://schemas.openxmlformats.org/drawingml/2006/main"/>
-          <a:ln xmlns:a="http://schemas.openxmlformats.org/drawingml/2006/main" w="0">
-            <a:noFill/>
-          </a:ln>
-        </p:spPr>
-        <p:txBody>
-          <a:bodyPr xmlns:a="http://schemas.openxmlformats.org/drawingml/2006/main">
-            <a:normAutofit fontScale="100000"/>
-          </a:bodyPr>
-          <a:lstStyle xmlns:a="http://schemas.openxmlformats.org/drawingml/2006/main"/>
-          <a:p xmlns:a="http://schemas.openxmlformats.org/drawingml/2006/main">
-            <a:pPr>
-              <a:defRPr sz="2250" b="1">
-                <a:solidFill>
-                  <a:srgbClr val="D84B00"/>
-                </a:solidFill>
-                <a:latin typeface="Arial"/>
-                <a:ea typeface="Arial"/>
-                <a:cs typeface="Arial"/>
-              </a:defRPr>
-            </a:pPr>
-            <a:r>
-              <a:rPr sz="2250" b="1">
-                <a:solidFill>
-                  <a:srgbClr val="D84B00"/>
-                </a:solidFill>
-                <a:latin typeface="Arial"/>
-                <a:ea typeface="Arial"/>
-                <a:cs typeface="Arial"/>
-              </a:rPr>
-              <a:t>Φύλλο Εργασίας Β.4.1.M8</a:t>
-            </a:r>
-          </a:p>
-        </p:txBody>
-      </p:sp>
-      <p:sp>
-        <p:nvSpPr>
-          <p:cNvPr id="3" name="">
-            <a:extLst xmlns:a="http://schemas.openxmlformats.org/drawingml/2006/main">
-              <a:ext uri="{FF2B5EF4-FFF2-40B4-BE49-F238E27FC236}">
-                <a16:creationId xmlns:a16="http://schemas.microsoft.com/office/drawing/2014/main" id="{89405779-F57E-4B17-B60B-DDF81C456036}"/>
-              </a:ext>
-            </a:extLst>
-          </p:cNvPr>
-          <p:cNvSpPr>
-            <a:spLocks xmlns:a="http://schemas.openxmlformats.org/drawingml/2006/main" noGrp="1"/>
-          </p:cNvSpPr>
-          <p:nvPr/>
-        </p:nvSpPr>
-        <p:spPr>
-          <a:xfrm xmlns:a="http://schemas.openxmlformats.org/drawingml/2006/main">
-            <a:off x="5905500" y="2095500"/>
-            <a:ext cx="6191250" cy="1809750"/>
-          </a:xfrm>
-          <a:prstGeom xmlns:a="http://schemas.openxmlformats.org/drawingml/2006/main" prst="rect">
-            <a:avLst/>
-          </a:prstGeom>
-          <a:noFill xmlns:a="http://schemas.openxmlformats.org/drawingml/2006/main"/>
-          <a:ln xmlns:a="http://schemas.openxmlformats.org/drawingml/2006/main" w="0">
-            <a:noFill/>
-          </a:ln>
-        </p:spPr>
-        <p:txBody>
-          <a:bodyPr xmlns:a="http://schemas.openxmlformats.org/drawingml/2006/main">
-            <a:normAutofit fontScale="100000"/>
-          </a:bodyPr>
-          <a:lstStyle xmlns:a="http://schemas.openxmlformats.org/drawingml/2006/main"/>
-          <a:p xmlns:a="http://schemas.openxmlformats.org/drawingml/2006/main">
-            <a:pPr>
-              <a:defRPr sz="2175" b="0">
-                <a:solidFill>
-                  <a:srgbClr val="151515"/>
-                </a:solidFill>
-                <a:latin typeface="Arial"/>
-                <a:ea typeface="Arial"/>
-                <a:cs typeface="Arial"/>
-              </a:defRPr>
-            </a:pPr>
-            <a:r>
-              <a:rPr sz="2175" b="0">
-                <a:solidFill>
-                  <a:srgbClr val="151515"/>
-                </a:solidFill>
-                <a:latin typeface="Arial"/>
-                <a:ea typeface="Arial"/>
-                <a:cs typeface="Arial"/>
-              </a:rPr>
-              <a:t>Σελίδα 37</a:t>
-            </a:r>
-          </a:p>
-          <a:p xmlns:a="http://schemas.openxmlformats.org/drawingml/2006/main">
-            <a:pPr>
-              <a:defRPr sz="2175" b="0">
-                <a:solidFill>
-                  <a:srgbClr val="151515"/>
-                </a:solidFill>
-                <a:latin typeface="Arial"/>
-                <a:ea typeface="Arial"/>
-                <a:cs typeface="Arial"/>
-              </a:defRPr>
-            </a:pPr>
-            <a:r>
-              <a:rPr sz="2175" b="0">
-                <a:solidFill>
-                  <a:srgbClr val="151515"/>
-                </a:solidFill>
-                <a:latin typeface="Arial"/>
-                <a:ea typeface="Arial"/>
-                <a:cs typeface="Arial"/>
-              </a:rPr>
-              <a:t>Ασκήσεις 1–11</a:t>
-            </a:r>
-          </a:p>
-          <a:p xmlns:a="http://schemas.openxmlformats.org/drawingml/2006/main">
-            <a:r>
-              <a:t/>
-            </a:r>
-          </a:p>
-          <a:p xmlns:a="http://schemas.openxmlformats.org/drawingml/2006/main">
-            <a:pPr>
-              <a:defRPr sz="2175" b="0">
-                <a:solidFill>
-                  <a:srgbClr val="151515"/>
-                </a:solidFill>
-                <a:latin typeface="Arial"/>
-                <a:ea typeface="Arial"/>
-                <a:cs typeface="Arial"/>
-              </a:defRPr>
-            </a:pPr>
-            <a:r>
-              <a:rPr sz="2175" b="0">
-                <a:solidFill>
-                  <a:srgbClr val="151515"/>
-                </a:solidFill>
-                <a:latin typeface="Arial"/>
-                <a:ea typeface="Arial"/>
-                <a:cs typeface="Arial"/>
-              </a:rPr>
-              <a:t>Αρχείο: Κόστος.xlsx</a:t>
-            </a:r>
-          </a:p>
-        </p:txBody>
-      </p:sp>
-      <p:sp>
-        <p:nvSpPr>
-          <p:cNvPr id="4" name="">
-            <a:extLst xmlns:a="http://schemas.openxmlformats.org/drawingml/2006/main">
-              <a:ext uri="{FF2B5EF4-FFF2-40B4-BE49-F238E27FC236}">
-                <a16:creationId xmlns:a16="http://schemas.microsoft.com/office/drawing/2014/main" id="{3CA70BE3-AEE5-4E9A-A244-F7798135132E}"/>
-              </a:ext>
-            </a:extLst>
-          </p:cNvPr>
-          <p:cNvSpPr>
-            <a:spLocks xmlns:a="http://schemas.openxmlformats.org/drawingml/2006/main" noGrp="1"/>
-          </p:cNvSpPr>
-          <p:nvPr/>
-        </p:nvSpPr>
-        <p:spPr>
-          <a:xfrm xmlns:a="http://schemas.openxmlformats.org/drawingml/2006/main">
-            <a:off x="5905500" y="5000625"/>
-            <a:ext cx="6096000" cy="857250"/>
-          </a:xfrm>
-          <a:prstGeom xmlns:a="http://schemas.openxmlformats.org/drawingml/2006/main" prst="rect">
-            <a:avLst/>
-          </a:prstGeom>
-          <a:noFill xmlns:a="http://schemas.openxmlformats.org/drawingml/2006/main"/>
-          <a:ln xmlns:a="http://schemas.openxmlformats.org/drawingml/2006/main" w="0">
-            <a:noFill/>
-          </a:ln>
-        </p:spPr>
-        <p:txBody>
-          <a:bodyPr xmlns:a="http://schemas.openxmlformats.org/drawingml/2006/main">
-            <a:normAutofit fontScale="100000"/>
-          </a:bodyPr>
-          <a:lstStyle xmlns:a="http://schemas.openxmlformats.org/drawingml/2006/main"/>
-          <a:p xmlns:a="http://schemas.openxmlformats.org/drawingml/2006/main">
-            <a:pPr>
-              <a:defRPr sz="1725" b="0">
-                <a:solidFill>
-                  <a:srgbClr val="6B1E72"/>
-                </a:solidFill>
-                <a:latin typeface="Arial"/>
-                <a:ea typeface="Arial"/>
-                <a:cs typeface="Arial"/>
-              </a:defRPr>
-            </a:pPr>
-            <a:r>
-              <a:rPr sz="1725" b="0">
-                <a:solidFill>
-                  <a:srgbClr val="6B1E72"/>
-                </a:solidFill>
-                <a:latin typeface="Arial"/>
-                <a:ea typeface="Arial"/>
-                <a:cs typeface="Arial"/>
-              </a:rPr>
-              <a:t>Σχετικές και απόλυτες αναφορές σε τύπους ΦΠΑ.</a:t>
-            </a:r>
-          </a:p>
-        </p:txBody>
-      </p:sp>
-    </p:spTree>
-    <p:extLst>
-      <p:ext uri="{BB962C8B-B14F-4D97-AF65-F5344CB8AC3E}">
-        <p14:creationId xmlns:p14="http://schemas.microsoft.com/office/powerpoint/2010/main" val="3815878654"/>
-      </p:ext>
-    </p:extLst>
-  </p:cSld>
   <p:clrMapOvr>
-    <a:overrideClrMapping xmlns:a="http://schemas.openxmlformats.org/drawingml/2006/main" bg1="lt1" tx1="dk1" bg2="lt2" tx2="dk2" accent1="accent1" accent2="accent2" accent3="accent3" accent4="accent4" accent5="accent5" accent6="accent6" hlink="hlink" folHlink="folHlink"/>
+    <a:masterClrMapping/>
   </p:clrMapOvr>
-</p:sld>
-</file>
-
-<file path=ppt/slides/slide8.xml><?xml version="1.0" encoding="utf-8"?>
-<p:sld xmlns:p="http://schemas.openxmlformats.org/presentationml/2006/main">
-  <p:cSld>
-    <p:spTree>
-      <p:nvGrpSpPr>
-        <p:cNvPr id="1" name=""/>
-        <p:cNvGrpSpPr/>
-        <p:nvPr/>
-      </p:nvGrpSpPr>
-      <p:grpSpPr>
-        <a:xfrm xmlns:a="http://schemas.openxmlformats.org/drawingml/2006/main"/>
-      </p:grpSpPr>
-      <p:sp>
-        <p:nvSpPr>
-          <p:cNvPr id="5" name="">
-            <a:extLst xmlns:a="http://schemas.openxmlformats.org/drawingml/2006/main">
-              <a:ext uri="{FF2B5EF4-FFF2-40B4-BE49-F238E27FC236}">
-                <a16:creationId xmlns:a16="http://schemas.microsoft.com/office/drawing/2014/main" id="{E4F712E3-854D-44CE-AFAB-13FAB247A73E}"/>
-              </a:ext>
-            </a:extLst>
-          </p:cNvPr>
-          <p:cNvSpPr>
-            <a:spLocks xmlns:a="http://schemas.openxmlformats.org/drawingml/2006/main" noGrp="1"/>
-          </p:cNvSpPr>
-          <p:nvPr/>
-        </p:nvSpPr>
-        <p:spPr>
-          <a:xfrm xmlns:a="http://schemas.openxmlformats.org/drawingml/2006/main">
-            <a:off x="742950" y="476250"/>
-            <a:ext cx="3905250" cy="857250"/>
-          </a:xfrm>
-          <a:prstGeom xmlns:a="http://schemas.openxmlformats.org/drawingml/2006/main" prst="rect">
-            <a:avLst/>
-          </a:prstGeom>
-          <a:noFill xmlns:a="http://schemas.openxmlformats.org/drawingml/2006/main"/>
-          <a:ln xmlns:a="http://schemas.openxmlformats.org/drawingml/2006/main" w="0">
-            <a:noFill/>
-          </a:ln>
-        </p:spPr>
-        <p:txBody>
-          <a:bodyPr xmlns:a="http://schemas.openxmlformats.org/drawingml/2006/main">
-            <a:normAutofit fontScale="77907"/>
-          </a:bodyPr>
-          <a:lstStyle xmlns:a="http://schemas.openxmlformats.org/drawingml/2006/main"/>
-          <a:p xmlns:a="http://schemas.openxmlformats.org/drawingml/2006/main">
-            <a:pPr>
-              <a:defRPr sz="3225" b="0">
-                <a:solidFill>
-                  <a:srgbClr val="6B1E72"/>
-                </a:solidFill>
-                <a:latin typeface="Calibri Light"/>
-                <a:ea typeface="Calibri Light"/>
-                <a:cs typeface="Calibri Light"/>
-              </a:defRPr>
-            </a:pPr>
-            <a:r>
-              <a:rPr sz="3225" b="0">
-                <a:solidFill>
-                  <a:srgbClr val="6B1E72"/>
-                </a:solidFill>
-                <a:latin typeface="Calibri Light"/>
-                <a:ea typeface="Calibri Light"/>
-                <a:cs typeface="Calibri Light"/>
-              </a:rPr>
-              <a:t>Δραστηριότητες Αξιολόγησης</a:t>
-            </a:r>
-          </a:p>
-        </p:txBody>
-      </p:sp>
-      <p:sp>
-        <p:nvSpPr>
-          <p:cNvPr id="2" name="">
-            <a:extLst xmlns:a="http://schemas.openxmlformats.org/drawingml/2006/main">
-              <a:ext uri="{FF2B5EF4-FFF2-40B4-BE49-F238E27FC236}">
-                <a16:creationId xmlns:a16="http://schemas.microsoft.com/office/drawing/2014/main" id="{E957513D-F2F6-4EF0-B217-F48CF05331B6}"/>
-              </a:ext>
-            </a:extLst>
-          </p:cNvPr>
-          <p:cNvSpPr>
-            <a:spLocks xmlns:a="http://schemas.openxmlformats.org/drawingml/2006/main" noGrp="1"/>
-          </p:cNvSpPr>
-          <p:nvPr/>
-        </p:nvSpPr>
-        <p:spPr>
-          <a:xfrm xmlns:a="http://schemas.openxmlformats.org/drawingml/2006/main">
-            <a:off x="4762500" y="1857375"/>
-            <a:ext cx="6191250" cy="523875"/>
-          </a:xfrm>
-          <a:prstGeom xmlns:a="http://schemas.openxmlformats.org/drawingml/2006/main" prst="rect">
-            <a:avLst/>
-          </a:prstGeom>
-          <a:noFill xmlns:a="http://schemas.openxmlformats.org/drawingml/2006/main"/>
-          <a:ln xmlns:a="http://schemas.openxmlformats.org/drawingml/2006/main" w="0">
-            <a:noFill/>
-          </a:ln>
-        </p:spPr>
-        <p:txBody>
-          <a:bodyPr xmlns:a="http://schemas.openxmlformats.org/drawingml/2006/main">
-            <a:normAutofit fontScale="100000"/>
-          </a:bodyPr>
-          <a:lstStyle xmlns:a="http://schemas.openxmlformats.org/drawingml/2006/main"/>
-          <a:p xmlns:a="http://schemas.openxmlformats.org/drawingml/2006/main">
-            <a:pPr>
-              <a:defRPr sz="2250" b="1">
-                <a:solidFill>
-                  <a:srgbClr val="D84B00"/>
-                </a:solidFill>
-                <a:latin typeface="Arial"/>
-                <a:ea typeface="Arial"/>
-                <a:cs typeface="Arial"/>
-              </a:defRPr>
-            </a:pPr>
-            <a:r>
-              <a:rPr sz="2250" b="1">
-                <a:solidFill>
-                  <a:srgbClr val="D84B00"/>
-                </a:solidFill>
-                <a:latin typeface="Arial"/>
-                <a:ea typeface="Arial"/>
-                <a:cs typeface="Arial"/>
-              </a:rPr>
-              <a:t>Φύλλο Εργασίας Β.4.1.M8</a:t>
-            </a:r>
-          </a:p>
-        </p:txBody>
-      </p:sp>
-      <p:sp>
-        <p:nvSpPr>
-          <p:cNvPr id="3" name="">
-            <a:extLst xmlns:a="http://schemas.openxmlformats.org/drawingml/2006/main">
-              <a:ext uri="{FF2B5EF4-FFF2-40B4-BE49-F238E27FC236}">
-                <a16:creationId xmlns:a16="http://schemas.microsoft.com/office/drawing/2014/main" id="{97565E1E-7817-4F61-A4DB-94B18CE4D149}"/>
-              </a:ext>
-            </a:extLst>
-          </p:cNvPr>
-          <p:cNvSpPr>
-            <a:spLocks xmlns:a="http://schemas.openxmlformats.org/drawingml/2006/main" noGrp="1"/>
-          </p:cNvSpPr>
-          <p:nvPr/>
-        </p:nvSpPr>
-        <p:spPr>
-          <a:xfrm xmlns:a="http://schemas.openxmlformats.org/drawingml/2006/main">
-            <a:off x="4762500" y="2857500"/>
-            <a:ext cx="6191250" cy="1809750"/>
-          </a:xfrm>
-          <a:prstGeom xmlns:a="http://schemas.openxmlformats.org/drawingml/2006/main" prst="rect">
-            <a:avLst/>
-          </a:prstGeom>
-          <a:noFill xmlns:a="http://schemas.openxmlformats.org/drawingml/2006/main"/>
-          <a:ln xmlns:a="http://schemas.openxmlformats.org/drawingml/2006/main" w="0">
-            <a:noFill/>
-          </a:ln>
-        </p:spPr>
-        <p:txBody>
-          <a:bodyPr xmlns:a="http://schemas.openxmlformats.org/drawingml/2006/main">
-            <a:normAutofit fontScale="100000"/>
-          </a:bodyPr>
-          <a:lstStyle xmlns:a="http://schemas.openxmlformats.org/drawingml/2006/main"/>
-          <a:p xmlns:a="http://schemas.openxmlformats.org/drawingml/2006/main">
-            <a:pPr>
-              <a:defRPr sz="2175" b="0">
-                <a:solidFill>
-                  <a:srgbClr val="151515"/>
-                </a:solidFill>
-                <a:latin typeface="Arial"/>
-                <a:ea typeface="Arial"/>
-                <a:cs typeface="Arial"/>
-              </a:defRPr>
-            </a:pPr>
-            <a:r>
-              <a:rPr sz="2175" b="0">
-                <a:solidFill>
-                  <a:srgbClr val="151515"/>
-                </a:solidFill>
-                <a:latin typeface="Arial"/>
-                <a:ea typeface="Arial"/>
-                <a:cs typeface="Arial"/>
-              </a:rPr>
-              <a:t>Σελίδα 38</a:t>
-            </a:r>
-          </a:p>
-          <a:p xmlns:a="http://schemas.openxmlformats.org/drawingml/2006/main">
-            <a:pPr>
-              <a:defRPr sz="2175" b="0">
-                <a:solidFill>
-                  <a:srgbClr val="151515"/>
-                </a:solidFill>
-                <a:latin typeface="Arial"/>
-                <a:ea typeface="Arial"/>
-                <a:cs typeface="Arial"/>
-              </a:defRPr>
-            </a:pPr>
-            <a:r>
-              <a:rPr sz="2175" b="0">
-                <a:solidFill>
-                  <a:srgbClr val="151515"/>
-                </a:solidFill>
-                <a:latin typeface="Arial"/>
-                <a:ea typeface="Arial"/>
-                <a:cs typeface="Arial"/>
-              </a:rPr>
-              <a:t>Ασκήσεις 12–18</a:t>
-            </a:r>
-          </a:p>
-          <a:p xmlns:a="http://schemas.openxmlformats.org/drawingml/2006/main">
-            <a:r>
-              <a:t/>
-            </a:r>
-          </a:p>
-          <a:p xmlns:a="http://schemas.openxmlformats.org/drawingml/2006/main">
-            <a:pPr>
-              <a:defRPr sz="2175" b="0">
-                <a:solidFill>
-                  <a:srgbClr val="151515"/>
-                </a:solidFill>
-                <a:latin typeface="Arial"/>
-                <a:ea typeface="Arial"/>
-                <a:cs typeface="Arial"/>
-              </a:defRPr>
-            </a:pPr>
-            <a:r>
-              <a:rPr sz="2175" b="0">
-                <a:solidFill>
-                  <a:srgbClr val="151515"/>
-                </a:solidFill>
-                <a:latin typeface="Arial"/>
-                <a:ea typeface="Arial"/>
-                <a:cs typeface="Arial"/>
-              </a:rPr>
-              <a:t>Αρχείο: Βαθμολόγιο.xlsx</a:t>
-            </a:r>
-          </a:p>
-        </p:txBody>
-      </p:sp>
-      <p:sp>
-        <p:nvSpPr>
-          <p:cNvPr id="4" name="">
-            <a:extLst xmlns:a="http://schemas.openxmlformats.org/drawingml/2006/main">
-              <a:ext uri="{FF2B5EF4-FFF2-40B4-BE49-F238E27FC236}">
-                <a16:creationId xmlns:a16="http://schemas.microsoft.com/office/drawing/2014/main" id="{C376501E-CA4F-4D81-A7D8-FE29255FA4F0}"/>
-              </a:ext>
-            </a:extLst>
-          </p:cNvPr>
-          <p:cNvSpPr>
-            <a:spLocks xmlns:a="http://schemas.openxmlformats.org/drawingml/2006/main" noGrp="1"/>
-          </p:cNvSpPr>
-          <p:nvPr/>
-        </p:nvSpPr>
-        <p:spPr>
-          <a:xfrm xmlns:a="http://schemas.openxmlformats.org/drawingml/2006/main">
-            <a:off x="4762500" y="5000625"/>
-            <a:ext cx="6096000" cy="857250"/>
-          </a:xfrm>
-          <a:prstGeom xmlns:a="http://schemas.openxmlformats.org/drawingml/2006/main" prst="rect">
-            <a:avLst/>
-          </a:prstGeom>
-          <a:noFill xmlns:a="http://schemas.openxmlformats.org/drawingml/2006/main"/>
-          <a:ln xmlns:a="http://schemas.openxmlformats.org/drawingml/2006/main" w="0">
-            <a:noFill/>
-          </a:ln>
-        </p:spPr>
-        <p:txBody>
-          <a:bodyPr xmlns:a="http://schemas.openxmlformats.org/drawingml/2006/main">
-            <a:normAutofit fontScale="100000"/>
-          </a:bodyPr>
-          <a:lstStyle xmlns:a="http://schemas.openxmlformats.org/drawingml/2006/main"/>
-          <a:p xmlns:a="http://schemas.openxmlformats.org/drawingml/2006/main">
-            <a:pPr>
-              <a:defRPr sz="1725" b="0">
-                <a:solidFill>
-                  <a:srgbClr val="6B1E72"/>
-                </a:solidFill>
-                <a:latin typeface="Arial"/>
-                <a:ea typeface="Arial"/>
-                <a:cs typeface="Arial"/>
-              </a:defRPr>
-            </a:pPr>
-            <a:r>
-              <a:rPr sz="1725" b="0">
-                <a:solidFill>
-                  <a:srgbClr val="6B1E72"/>
-                </a:solidFill>
-                <a:latin typeface="Arial"/>
-                <a:ea typeface="Arial"/>
-                <a:cs typeface="Arial"/>
-              </a:rPr>
-              <a:t>Χρησιμοποίησε σωστά σταθερές και μεταβαλλόμενες αναφορές.</a:t>
-            </a:r>
-          </a:p>
-        </p:txBody>
-      </p:sp>
-    </p:spTree>
-    <p:extLst>
-      <p:ext uri="{BB962C8B-B14F-4D97-AF65-F5344CB8AC3E}">
-        <p14:creationId xmlns:p14="http://schemas.microsoft.com/office/powerpoint/2010/main" val="608684808"/>
-      </p:ext>
-    </p:extLst>
-  </p:cSld>
 </p:sld>
 </file>
 
@@ -7284,5 +6331,294 @@
       </a:bgFillStyleLst>
     </a:fmtScheme>
   </a:themeElements>
+  <a:objectDefaults/>
+  <a:extraClrSchemeLst/>
+</a:theme>
+</file>
+
+<file path=ppt/theme/theme2.xml><?xml version="1.0" encoding="utf-8"?>
+<a:theme xmlns:a="http://schemas.openxmlformats.org/drawingml/2006/main" name="Office Theme">
+  <a:themeElements>
+    <a:clrScheme name="Red Violet">
+      <a:dk1>
+        <a:sysClr val="windowText" lastClr="000000"/>
+      </a:dk1>
+      <a:lt1>
+        <a:sysClr val="window" lastClr="FFFFFF"/>
+      </a:lt1>
+      <a:dk2>
+        <a:srgbClr val="454551"/>
+      </a:dk2>
+      <a:lt2>
+        <a:srgbClr val="D8D9DC"/>
+      </a:lt2>
+      <a:accent1>
+        <a:srgbClr val="E32D91"/>
+      </a:accent1>
+      <a:accent2>
+        <a:srgbClr val="C830CC"/>
+      </a:accent2>
+      <a:accent3>
+        <a:srgbClr val="4EA6DC"/>
+      </a:accent3>
+      <a:accent4>
+        <a:srgbClr val="4775E7"/>
+      </a:accent4>
+      <a:accent5>
+        <a:srgbClr val="8971E1"/>
+      </a:accent5>
+      <a:accent6>
+        <a:srgbClr val="D54773"/>
+      </a:accent6>
+      <a:hlink>
+        <a:srgbClr val="6B9F25"/>
+      </a:hlink>
+      <a:folHlink>
+        <a:srgbClr val="8C8C8C"/>
+      </a:folHlink>
+    </a:clrScheme>
+    <a:fontScheme name="Office">
+      <a:majorFont>
+        <a:latin typeface="Calibri Light"/>
+        <a:ea typeface=""/>
+        <a:cs typeface=""/>
+        <a:font script="Jpan" typeface="游ゴシック Light"/>
+        <a:font script="Hang" typeface="맑은 고딕"/>
+        <a:font script="Hans" typeface="等线 Light"/>
+        <a:font script="Hant" typeface="新細明體"/>
+        <a:font script="Arab" typeface="Times New Roman"/>
+        <a:font script="Hebr" typeface="Times New Roman"/>
+        <a:font script="Thai" typeface="Angsana New"/>
+        <a:font script="Ethi" typeface="Nyala"/>
+        <a:font script="Beng" typeface="Vrinda"/>
+        <a:font script="Gujr" typeface="Shruti"/>
+        <a:font script="Khmr" typeface="MoolBoran"/>
+        <a:font script="Knda" typeface="Tunga"/>
+        <a:font script="Guru" typeface="Raavi"/>
+        <a:font script="Cans" typeface="Euphemia"/>
+        <a:font script="Cher" typeface="Plantagenet Cherokee"/>
+        <a:font script="Yiii" typeface="Microsoft Yi Baiti"/>
+        <a:font script="Tibt" typeface="Microsoft Himalaya"/>
+        <a:font script="Thaa" typeface="MV Boli"/>
+        <a:font script="Deva" typeface="Mangal"/>
+        <a:font script="Telu" typeface="Gautami"/>
+        <a:font script="Taml" typeface="Latha"/>
+        <a:font script="Syrc" typeface="Estrangelo Edessa"/>
+        <a:font script="Orya" typeface="Kalinga"/>
+        <a:font script="Mlym" typeface="Kartika"/>
+        <a:font script="Laoo" typeface="DokChampa"/>
+        <a:font script="Sinh" typeface="Iskoola Pota"/>
+        <a:font script="Mong" typeface="Mongolian Baiti"/>
+        <a:font script="Viet" typeface="Times New Roman"/>
+        <a:font script="Uigh" typeface="Microsoft Uighur"/>
+        <a:font script="Geor" typeface="Sylfaen"/>
+        <a:font script="Armn" typeface="Arial"/>
+        <a:font script="Bugi" typeface="Leelawadee UI"/>
+        <a:font script="Bopo" typeface="Microsoft JhengHei"/>
+        <a:font script="Java" typeface="Javanese Text"/>
+        <a:font script="Lisu" typeface="Segoe UI"/>
+        <a:font script="Mymr" typeface="Myanmar Text"/>
+        <a:font script="Nkoo" typeface="Ebrima"/>
+        <a:font script="Olck" typeface="Nirmala UI"/>
+        <a:font script="Osma" typeface="Ebrima"/>
+        <a:font script="Phag" typeface="Phagspa"/>
+        <a:font script="Syrn" typeface="Estrangelo Edessa"/>
+        <a:font script="Syrj" typeface="Estrangelo Edessa"/>
+        <a:font script="Syre" typeface="Estrangelo Edessa"/>
+        <a:font script="Sora" typeface="Nirmala UI"/>
+        <a:font script="Tale" typeface="Microsoft Tai Le"/>
+        <a:font script="Talu" typeface="Microsoft New Tai Lue"/>
+        <a:font script="Tfng" typeface="Ebrima"/>
+      </a:majorFont>
+      <a:minorFont>
+        <a:latin typeface="Calibri"/>
+        <a:ea typeface=""/>
+        <a:cs typeface=""/>
+        <a:font script="Jpan" typeface="游ゴシック"/>
+        <a:font script="Hang" typeface="맑은 고딕"/>
+        <a:font script="Hans" typeface="等线"/>
+        <a:font script="Hant" typeface="新細明體"/>
+        <a:font script="Arab" typeface="Arial"/>
+        <a:font script="Hebr" typeface="Arial"/>
+        <a:font script="Thai" typeface="Cordia New"/>
+        <a:font script="Ethi" typeface="Nyala"/>
+        <a:font script="Beng" typeface="Vrinda"/>
+        <a:font script="Gujr" typeface="Shruti"/>
+        <a:font script="Khmr" typeface="DaunPenh"/>
+        <a:font script="Knda" typeface="Tunga"/>
+        <a:font script="Guru" typeface="Raavi"/>
+        <a:font script="Cans" typeface="Euphemia"/>
+        <a:font script="Cher" typeface="Plantagenet Cherokee"/>
+        <a:font script="Yiii" typeface="Microsoft Yi Baiti"/>
+        <a:font script="Tibt" typeface="Microsoft Himalaya"/>
+        <a:font script="Thaa" typeface="MV Boli"/>
+        <a:font script="Deva" typeface="Mangal"/>
+        <a:font script="Telu" typeface="Gautami"/>
+        <a:font script="Taml" typeface="Latha"/>
+        <a:font script="Syrc" typeface="Estrangelo Edessa"/>
+        <a:font script="Orya" typeface="Kalinga"/>
+        <a:font script="Mlym" typeface="Kartika"/>
+        <a:font script="Laoo" typeface="DokChampa"/>
+        <a:font script="Sinh" typeface="Iskoola Pota"/>
+        <a:font script="Mong" typeface="Mongolian Baiti"/>
+        <a:font script="Viet" typeface="Arial"/>
+        <a:font script="Uigh" typeface="Microsoft Uighur"/>
+        <a:font script="Geor" typeface="Sylfaen"/>
+        <a:font script="Armn" typeface="Arial"/>
+        <a:font script="Bugi" typeface="Leelawadee UI"/>
+        <a:font script="Bopo" typeface="Microsoft JhengHei"/>
+        <a:font script="Java" typeface="Javanese Text"/>
+        <a:font script="Lisu" typeface="Segoe UI"/>
+        <a:font script="Mymr" typeface="Myanmar Text"/>
+        <a:font script="Nkoo" typeface="Ebrima"/>
+        <a:font script="Olck" typeface="Nirmala UI"/>
+        <a:font script="Osma" typeface="Ebrima"/>
+        <a:font script="Phag" typeface="Phagspa"/>
+        <a:font script="Syrn" typeface="Estrangelo Edessa"/>
+        <a:font script="Syrj" typeface="Estrangelo Edessa"/>
+        <a:font script="Syre" typeface="Estrangelo Edessa"/>
+        <a:font script="Sora" typeface="Nirmala UI"/>
+        <a:font script="Tale" typeface="Microsoft Tai Le"/>
+        <a:font script="Talu" typeface="Microsoft New Tai Lue"/>
+        <a:font script="Tfng" typeface="Ebrima"/>
+      </a:minorFont>
+    </a:fontScheme>
+    <a:fmtScheme name="Red Violet">
+      <a:fillStyleLst>
+        <a:solidFill>
+          <a:schemeClr val="phClr"/>
+        </a:solidFill>
+        <a:gradFill rotWithShape="1">
+          <a:gsLst>
+            <a:gs pos="0">
+              <a:schemeClr val="phClr">
+                <a:tint val="67000"/>
+                <a:lumMod val="110000"/>
+                <a:satMod val="105000"/>
+              </a:schemeClr>
+            </a:gs>
+            <a:gs pos="50000">
+              <a:schemeClr val="phClr">
+                <a:tint val="73000"/>
+                <a:lumMod val="105000"/>
+                <a:satMod val="103000"/>
+              </a:schemeClr>
+            </a:gs>
+            <a:gs pos="100000">
+              <a:schemeClr val="phClr">
+                <a:tint val="81000"/>
+                <a:lumMod val="105000"/>
+                <a:satMod val="109000"/>
+              </a:schemeClr>
+            </a:gs>
+          </a:gsLst>
+          <a:lin ang="5400000" scaled="0"/>
+        </a:gradFill>
+        <a:gradFill rotWithShape="1">
+          <a:gsLst>
+            <a:gs pos="0">
+              <a:schemeClr val="phClr">
+                <a:tint val="94000"/>
+                <a:lumMod val="102000"/>
+                <a:satMod val="103000"/>
+              </a:schemeClr>
+            </a:gs>
+            <a:gs pos="50000">
+              <a:schemeClr val="phClr">
+                <a:shade val="100000"/>
+                <a:lumMod val="100000"/>
+                <a:satMod val="110000"/>
+              </a:schemeClr>
+            </a:gs>
+            <a:gs pos="100000">
+              <a:schemeClr val="phClr">
+                <a:shade val="78000"/>
+                <a:lumMod val="99000"/>
+                <a:satMod val="120000"/>
+              </a:schemeClr>
+            </a:gs>
+          </a:gsLst>
+          <a:lin ang="5400000" scaled="0"/>
+        </a:gradFill>
+      </a:fillStyleLst>
+      <a:lnStyleLst>
+        <a:ln w="6350">
+          <a:solidFill>
+            <a:schemeClr val="phClr"/>
+          </a:solidFill>
+          <a:prstDash val="solid"/>
+        </a:ln>
+        <a:ln w="12700">
+          <a:solidFill>
+            <a:schemeClr val="phClr"/>
+          </a:solidFill>
+          <a:prstDash val="solid"/>
+        </a:ln>
+        <a:ln w="19050">
+          <a:solidFill>
+            <a:schemeClr val="phClr"/>
+          </a:solidFill>
+          <a:prstDash val="solid"/>
+        </a:ln>
+      </a:lnStyleLst>
+      <a:effectStyleLst>
+        <a:effectStyle>
+          <a:effectLst/>
+        </a:effectStyle>
+        <a:effectStyle>
+          <a:effectLst/>
+        </a:effectStyle>
+        <a:effectStyle>
+          <a:effectLst>
+            <a:outerShdw blurRad="57150" dist="19050" dir="5400000" algn="ctr" rotWithShape="0">
+              <a:srgbClr val="000000">
+                <a:alpha val="63000"/>
+              </a:srgbClr>
+            </a:outerShdw>
+          </a:effectLst>
+        </a:effectStyle>
+      </a:effectStyleLst>
+      <a:bgFillStyleLst>
+        <a:solidFill>
+          <a:schemeClr val="phClr"/>
+        </a:solidFill>
+        <a:solidFill>
+          <a:schemeClr val="phClr">
+            <a:tint val="95000"/>
+            <a:satMod val="170000"/>
+          </a:schemeClr>
+        </a:solidFill>
+        <a:gradFill rotWithShape="1">
+          <a:gsLst>
+            <a:gs pos="0">
+              <a:schemeClr val="phClr">
+                <a:tint val="93000"/>
+                <a:shade val="98000"/>
+                <a:lumMod val="102000"/>
+                <a:satMod val="150000"/>
+              </a:schemeClr>
+            </a:gs>
+            <a:gs pos="50000">
+              <a:schemeClr val="phClr">
+                <a:tint val="98000"/>
+                <a:shade val="90000"/>
+                <a:lumMod val="103000"/>
+                <a:satMod val="130000"/>
+              </a:schemeClr>
+            </a:gs>
+            <a:gs pos="100000">
+              <a:schemeClr val="phClr">
+                <a:shade val="63000"/>
+                <a:satMod val="120000"/>
+              </a:schemeClr>
+            </a:gs>
+          </a:gsLst>
+          <a:lin ang="5400000" scaled="0"/>
+        </a:gradFill>
+      </a:bgFillStyleLst>
+    </a:fmtScheme>
+  </a:themeElements>
+  <a:objectDefaults/>
+  <a:extraClrSchemeLst/>
 </a:theme>
 </file>